--- a/document/Muhammad Miftah Faridh.pptx
+++ b/document/Muhammad Miftah Faridh.pptx
@@ -877,7 +877,1057 @@
 </dgm:colorsDef>
 </file>
 
+<file path=ppt/diagrams/colors2.xml><?xml version="1.0" encoding="utf-8"?>
+<dgm:colorsDef xmlns:dgm="http://schemas.openxmlformats.org/drawingml/2006/diagram" xmlns:a="http://schemas.openxmlformats.org/drawingml/2006/main" uniqueId="urn:microsoft.com/office/officeart/2005/8/colors/accent1_2">
+  <dgm:title val=""/>
+  <dgm:desc val=""/>
+  <dgm:catLst>
+    <dgm:cat type="accent1" pri="11200"/>
+  </dgm:catLst>
+  <dgm:styleLbl name="node0">
+    <dgm:fillClrLst meth="repeat">
+      <a:schemeClr val="accent1"/>
+    </dgm:fillClrLst>
+    <dgm:linClrLst meth="repeat">
+      <a:schemeClr val="lt1"/>
+    </dgm:linClrLst>
+    <dgm:effectClrLst/>
+    <dgm:txLinClrLst/>
+    <dgm:txFillClrLst/>
+    <dgm:txEffectClrLst/>
+  </dgm:styleLbl>
+  <dgm:styleLbl name="alignNode1">
+    <dgm:fillClrLst meth="repeat">
+      <a:schemeClr val="accent1"/>
+    </dgm:fillClrLst>
+    <dgm:linClrLst meth="repeat">
+      <a:schemeClr val="accent1"/>
+    </dgm:linClrLst>
+    <dgm:effectClrLst/>
+    <dgm:txLinClrLst/>
+    <dgm:txFillClrLst/>
+    <dgm:txEffectClrLst/>
+  </dgm:styleLbl>
+  <dgm:styleLbl name="node1">
+    <dgm:fillClrLst meth="repeat">
+      <a:schemeClr val="accent1"/>
+    </dgm:fillClrLst>
+    <dgm:linClrLst meth="repeat">
+      <a:schemeClr val="lt1"/>
+    </dgm:linClrLst>
+    <dgm:effectClrLst/>
+    <dgm:txLinClrLst/>
+    <dgm:txFillClrLst/>
+    <dgm:txEffectClrLst/>
+  </dgm:styleLbl>
+  <dgm:styleLbl name="lnNode1">
+    <dgm:fillClrLst meth="repeat">
+      <a:schemeClr val="accent1"/>
+    </dgm:fillClrLst>
+    <dgm:linClrLst meth="repeat">
+      <a:schemeClr val="lt1"/>
+    </dgm:linClrLst>
+    <dgm:effectClrLst/>
+    <dgm:txLinClrLst/>
+    <dgm:txFillClrLst/>
+    <dgm:txEffectClrLst/>
+  </dgm:styleLbl>
+  <dgm:styleLbl name="vennNode1">
+    <dgm:fillClrLst meth="repeat">
+      <a:schemeClr val="accent1">
+        <a:alpha val="50000"/>
+      </a:schemeClr>
+    </dgm:fillClrLst>
+    <dgm:linClrLst meth="repeat">
+      <a:schemeClr val="lt1"/>
+    </dgm:linClrLst>
+    <dgm:effectClrLst/>
+    <dgm:txLinClrLst/>
+    <dgm:txFillClrLst/>
+    <dgm:txEffectClrLst/>
+  </dgm:styleLbl>
+  <dgm:styleLbl name="node2">
+    <dgm:fillClrLst meth="repeat">
+      <a:schemeClr val="accent1"/>
+    </dgm:fillClrLst>
+    <dgm:linClrLst meth="repeat">
+      <a:schemeClr val="lt1"/>
+    </dgm:linClrLst>
+    <dgm:effectClrLst/>
+    <dgm:txLinClrLst/>
+    <dgm:txFillClrLst/>
+    <dgm:txEffectClrLst/>
+  </dgm:styleLbl>
+  <dgm:styleLbl name="node3">
+    <dgm:fillClrLst meth="repeat">
+      <a:schemeClr val="accent1"/>
+    </dgm:fillClrLst>
+    <dgm:linClrLst meth="repeat">
+      <a:schemeClr val="lt1"/>
+    </dgm:linClrLst>
+    <dgm:effectClrLst/>
+    <dgm:txLinClrLst/>
+    <dgm:txFillClrLst/>
+    <dgm:txEffectClrLst/>
+  </dgm:styleLbl>
+  <dgm:styleLbl name="node4">
+    <dgm:fillClrLst meth="repeat">
+      <a:schemeClr val="accent1"/>
+    </dgm:fillClrLst>
+    <dgm:linClrLst meth="repeat">
+      <a:schemeClr val="lt1"/>
+    </dgm:linClrLst>
+    <dgm:effectClrLst/>
+    <dgm:txLinClrLst/>
+    <dgm:txFillClrLst/>
+    <dgm:txEffectClrLst/>
+  </dgm:styleLbl>
+  <dgm:styleLbl name="fgImgPlace1">
+    <dgm:fillClrLst meth="repeat">
+      <a:schemeClr val="accent1">
+        <a:tint val="50000"/>
+      </a:schemeClr>
+    </dgm:fillClrLst>
+    <dgm:linClrLst meth="repeat">
+      <a:schemeClr val="lt1"/>
+    </dgm:linClrLst>
+    <dgm:effectClrLst/>
+    <dgm:txLinClrLst/>
+    <dgm:txFillClrLst meth="repeat">
+      <a:schemeClr val="lt1"/>
+    </dgm:txFillClrLst>
+    <dgm:txEffectClrLst/>
+  </dgm:styleLbl>
+  <dgm:styleLbl name="alignImgPlace1">
+    <dgm:fillClrLst meth="repeat">
+      <a:schemeClr val="accent1">
+        <a:tint val="50000"/>
+      </a:schemeClr>
+    </dgm:fillClrLst>
+    <dgm:linClrLst meth="repeat">
+      <a:schemeClr val="lt1"/>
+    </dgm:linClrLst>
+    <dgm:effectClrLst/>
+    <dgm:txLinClrLst/>
+    <dgm:txFillClrLst meth="repeat">
+      <a:schemeClr val="lt1"/>
+    </dgm:txFillClrLst>
+    <dgm:txEffectClrLst/>
+  </dgm:styleLbl>
+  <dgm:styleLbl name="bgImgPlace1">
+    <dgm:fillClrLst meth="repeat">
+      <a:schemeClr val="accent1">
+        <a:tint val="50000"/>
+      </a:schemeClr>
+    </dgm:fillClrLst>
+    <dgm:linClrLst meth="repeat">
+      <a:schemeClr val="lt1"/>
+    </dgm:linClrLst>
+    <dgm:effectClrLst/>
+    <dgm:txLinClrLst/>
+    <dgm:txFillClrLst meth="repeat">
+      <a:schemeClr val="lt1"/>
+    </dgm:txFillClrLst>
+    <dgm:txEffectClrLst/>
+  </dgm:styleLbl>
+  <dgm:styleLbl name="sibTrans2D1">
+    <dgm:fillClrLst meth="repeat">
+      <a:schemeClr val="accent1">
+        <a:tint val="60000"/>
+      </a:schemeClr>
+    </dgm:fillClrLst>
+    <dgm:linClrLst meth="repeat">
+      <a:schemeClr val="accent1">
+        <a:tint val="60000"/>
+      </a:schemeClr>
+    </dgm:linClrLst>
+    <dgm:effectClrLst/>
+    <dgm:txLinClrLst/>
+    <dgm:txFillClrLst/>
+    <dgm:txEffectClrLst/>
+  </dgm:styleLbl>
+  <dgm:styleLbl name="fgSibTrans2D1">
+    <dgm:fillClrLst meth="repeat">
+      <a:schemeClr val="accent1">
+        <a:tint val="60000"/>
+      </a:schemeClr>
+    </dgm:fillClrLst>
+    <dgm:linClrLst meth="repeat">
+      <a:schemeClr val="accent1">
+        <a:tint val="60000"/>
+      </a:schemeClr>
+    </dgm:linClrLst>
+    <dgm:effectClrLst/>
+    <dgm:txLinClrLst/>
+    <dgm:txFillClrLst/>
+    <dgm:txEffectClrLst/>
+  </dgm:styleLbl>
+  <dgm:styleLbl name="bgSibTrans2D1">
+    <dgm:fillClrLst meth="repeat">
+      <a:schemeClr val="accent1">
+        <a:tint val="60000"/>
+      </a:schemeClr>
+    </dgm:fillClrLst>
+    <dgm:linClrLst meth="repeat">
+      <a:schemeClr val="accent1">
+        <a:tint val="60000"/>
+      </a:schemeClr>
+    </dgm:linClrLst>
+    <dgm:effectClrLst/>
+    <dgm:txLinClrLst/>
+    <dgm:txFillClrLst/>
+    <dgm:txEffectClrLst/>
+  </dgm:styleLbl>
+  <dgm:styleLbl name="sibTrans1D1">
+    <dgm:fillClrLst meth="repeat">
+      <a:schemeClr val="accent1"/>
+    </dgm:fillClrLst>
+    <dgm:linClrLst meth="repeat">
+      <a:schemeClr val="accent1"/>
+    </dgm:linClrLst>
+    <dgm:effectClrLst/>
+    <dgm:txLinClrLst/>
+    <dgm:txFillClrLst meth="repeat">
+      <a:schemeClr val="tx1"/>
+    </dgm:txFillClrLst>
+    <dgm:txEffectClrLst/>
+  </dgm:styleLbl>
+  <dgm:styleLbl name="callout">
+    <dgm:fillClrLst meth="repeat">
+      <a:schemeClr val="accent1"/>
+    </dgm:fillClrLst>
+    <dgm:linClrLst meth="repeat">
+      <a:schemeClr val="accent1">
+        <a:tint val="50000"/>
+      </a:schemeClr>
+    </dgm:linClrLst>
+    <dgm:effectClrLst/>
+    <dgm:txLinClrLst/>
+    <dgm:txFillClrLst meth="repeat">
+      <a:schemeClr val="tx1"/>
+    </dgm:txFillClrLst>
+    <dgm:txEffectClrLst/>
+  </dgm:styleLbl>
+  <dgm:styleLbl name="asst0">
+    <dgm:fillClrLst meth="repeat">
+      <a:schemeClr val="accent1"/>
+    </dgm:fillClrLst>
+    <dgm:linClrLst meth="repeat">
+      <a:schemeClr val="lt1"/>
+    </dgm:linClrLst>
+    <dgm:effectClrLst/>
+    <dgm:txLinClrLst/>
+    <dgm:txFillClrLst/>
+    <dgm:txEffectClrLst/>
+  </dgm:styleLbl>
+  <dgm:styleLbl name="asst1">
+    <dgm:fillClrLst meth="repeat">
+      <a:schemeClr val="accent1"/>
+    </dgm:fillClrLst>
+    <dgm:linClrLst meth="repeat">
+      <a:schemeClr val="lt1"/>
+    </dgm:linClrLst>
+    <dgm:effectClrLst/>
+    <dgm:txLinClrLst/>
+    <dgm:txFillClrLst/>
+    <dgm:txEffectClrLst/>
+  </dgm:styleLbl>
+  <dgm:styleLbl name="asst2">
+    <dgm:fillClrLst meth="repeat">
+      <a:schemeClr val="accent1"/>
+    </dgm:fillClrLst>
+    <dgm:linClrLst meth="repeat">
+      <a:schemeClr val="lt1"/>
+    </dgm:linClrLst>
+    <dgm:effectClrLst/>
+    <dgm:txLinClrLst/>
+    <dgm:txFillClrLst/>
+    <dgm:txEffectClrLst/>
+  </dgm:styleLbl>
+  <dgm:styleLbl name="asst3">
+    <dgm:fillClrLst meth="repeat">
+      <a:schemeClr val="accent1"/>
+    </dgm:fillClrLst>
+    <dgm:linClrLst meth="repeat">
+      <a:schemeClr val="lt1"/>
+    </dgm:linClrLst>
+    <dgm:effectClrLst/>
+    <dgm:txLinClrLst/>
+    <dgm:txFillClrLst/>
+    <dgm:txEffectClrLst/>
+  </dgm:styleLbl>
+  <dgm:styleLbl name="asst4">
+    <dgm:fillClrLst meth="repeat">
+      <a:schemeClr val="accent1"/>
+    </dgm:fillClrLst>
+    <dgm:linClrLst meth="repeat">
+      <a:schemeClr val="lt1"/>
+    </dgm:linClrLst>
+    <dgm:effectClrLst/>
+    <dgm:txLinClrLst/>
+    <dgm:txFillClrLst/>
+    <dgm:txEffectClrLst/>
+  </dgm:styleLbl>
+  <dgm:styleLbl name="parChTrans2D1">
+    <dgm:fillClrLst meth="repeat">
+      <a:schemeClr val="accent1">
+        <a:tint val="60000"/>
+      </a:schemeClr>
+    </dgm:fillClrLst>
+    <dgm:linClrLst meth="repeat">
+      <a:schemeClr val="accent1">
+        <a:tint val="60000"/>
+      </a:schemeClr>
+    </dgm:linClrLst>
+    <dgm:effectClrLst/>
+    <dgm:txLinClrLst/>
+    <dgm:txFillClrLst meth="repeat">
+      <a:schemeClr val="lt1"/>
+    </dgm:txFillClrLst>
+    <dgm:txEffectClrLst/>
+  </dgm:styleLbl>
+  <dgm:styleLbl name="parChTrans2D2">
+    <dgm:fillClrLst meth="repeat">
+      <a:schemeClr val="accent1"/>
+    </dgm:fillClrLst>
+    <dgm:linClrLst meth="repeat">
+      <a:schemeClr val="accent1"/>
+    </dgm:linClrLst>
+    <dgm:effectClrLst/>
+    <dgm:txLinClrLst/>
+    <dgm:txFillClrLst meth="repeat">
+      <a:schemeClr val="lt1"/>
+    </dgm:txFillClrLst>
+    <dgm:txEffectClrLst/>
+  </dgm:styleLbl>
+  <dgm:styleLbl name="parChTrans2D3">
+    <dgm:fillClrLst meth="repeat">
+      <a:schemeClr val="accent1"/>
+    </dgm:fillClrLst>
+    <dgm:linClrLst meth="repeat">
+      <a:schemeClr val="accent1"/>
+    </dgm:linClrLst>
+    <dgm:effectClrLst/>
+    <dgm:txLinClrLst/>
+    <dgm:txFillClrLst meth="repeat">
+      <a:schemeClr val="lt1"/>
+    </dgm:txFillClrLst>
+    <dgm:txEffectClrLst/>
+  </dgm:styleLbl>
+  <dgm:styleLbl name="parChTrans2D4">
+    <dgm:fillClrLst meth="repeat">
+      <a:schemeClr val="accent1"/>
+    </dgm:fillClrLst>
+    <dgm:linClrLst meth="repeat">
+      <a:schemeClr val="accent1"/>
+    </dgm:linClrLst>
+    <dgm:effectClrLst/>
+    <dgm:txLinClrLst/>
+    <dgm:txFillClrLst meth="repeat">
+      <a:schemeClr val="lt1"/>
+    </dgm:txFillClrLst>
+    <dgm:txEffectClrLst/>
+  </dgm:styleLbl>
+  <dgm:styleLbl name="parChTrans1D1">
+    <dgm:fillClrLst meth="repeat">
+      <a:schemeClr val="accent1"/>
+    </dgm:fillClrLst>
+    <dgm:linClrLst meth="repeat">
+      <a:schemeClr val="accent1">
+        <a:shade val="60000"/>
+      </a:schemeClr>
+    </dgm:linClrLst>
+    <dgm:effectClrLst/>
+    <dgm:txLinClrLst/>
+    <dgm:txFillClrLst meth="repeat">
+      <a:schemeClr val="tx1"/>
+    </dgm:txFillClrLst>
+    <dgm:txEffectClrLst/>
+  </dgm:styleLbl>
+  <dgm:styleLbl name="parChTrans1D2">
+    <dgm:fillClrLst meth="repeat">
+      <a:schemeClr val="accent1"/>
+    </dgm:fillClrLst>
+    <dgm:linClrLst meth="repeat">
+      <a:schemeClr val="accent1">
+        <a:shade val="60000"/>
+      </a:schemeClr>
+    </dgm:linClrLst>
+    <dgm:effectClrLst/>
+    <dgm:txLinClrLst/>
+    <dgm:txFillClrLst meth="repeat">
+      <a:schemeClr val="tx1"/>
+    </dgm:txFillClrLst>
+    <dgm:txEffectClrLst/>
+  </dgm:styleLbl>
+  <dgm:styleLbl name="parChTrans1D3">
+    <dgm:fillClrLst meth="repeat">
+      <a:schemeClr val="accent1"/>
+    </dgm:fillClrLst>
+    <dgm:linClrLst meth="repeat">
+      <a:schemeClr val="accent1">
+        <a:shade val="80000"/>
+      </a:schemeClr>
+    </dgm:linClrLst>
+    <dgm:effectClrLst/>
+    <dgm:txLinClrLst/>
+    <dgm:txFillClrLst meth="repeat">
+      <a:schemeClr val="tx1"/>
+    </dgm:txFillClrLst>
+    <dgm:txEffectClrLst/>
+  </dgm:styleLbl>
+  <dgm:styleLbl name="parChTrans1D4">
+    <dgm:fillClrLst meth="repeat">
+      <a:schemeClr val="accent1"/>
+    </dgm:fillClrLst>
+    <dgm:linClrLst meth="repeat">
+      <a:schemeClr val="accent1">
+        <a:shade val="80000"/>
+      </a:schemeClr>
+    </dgm:linClrLst>
+    <dgm:effectClrLst/>
+    <dgm:txLinClrLst/>
+    <dgm:txFillClrLst meth="repeat">
+      <a:schemeClr val="tx1"/>
+    </dgm:txFillClrLst>
+    <dgm:txEffectClrLst/>
+  </dgm:styleLbl>
+  <dgm:styleLbl name="fgAcc1">
+    <dgm:fillClrLst meth="repeat">
+      <a:schemeClr val="lt1">
+        <a:alpha val="90000"/>
+      </a:schemeClr>
+    </dgm:fillClrLst>
+    <dgm:linClrLst meth="repeat">
+      <a:schemeClr val="accent1"/>
+    </dgm:linClrLst>
+    <dgm:effectClrLst/>
+    <dgm:txLinClrLst/>
+    <dgm:txFillClrLst meth="repeat">
+      <a:schemeClr val="dk1"/>
+    </dgm:txFillClrLst>
+    <dgm:txEffectClrLst/>
+  </dgm:styleLbl>
+  <dgm:styleLbl name="conFgAcc1">
+    <dgm:fillClrLst meth="repeat">
+      <a:schemeClr val="lt1">
+        <a:alpha val="90000"/>
+      </a:schemeClr>
+    </dgm:fillClrLst>
+    <dgm:linClrLst meth="repeat">
+      <a:schemeClr val="accent1"/>
+    </dgm:linClrLst>
+    <dgm:effectClrLst/>
+    <dgm:txLinClrLst/>
+    <dgm:txFillClrLst meth="repeat">
+      <a:schemeClr val="dk1"/>
+    </dgm:txFillClrLst>
+    <dgm:txEffectClrLst/>
+  </dgm:styleLbl>
+  <dgm:styleLbl name="alignAcc1">
+    <dgm:fillClrLst meth="repeat">
+      <a:schemeClr val="lt1">
+        <a:alpha val="90000"/>
+      </a:schemeClr>
+    </dgm:fillClrLst>
+    <dgm:linClrLst meth="repeat">
+      <a:schemeClr val="accent1"/>
+    </dgm:linClrLst>
+    <dgm:effectClrLst/>
+    <dgm:txLinClrLst/>
+    <dgm:txFillClrLst meth="repeat">
+      <a:schemeClr val="dk1"/>
+    </dgm:txFillClrLst>
+    <dgm:txEffectClrLst/>
+  </dgm:styleLbl>
+  <dgm:styleLbl name="trAlignAcc1">
+    <dgm:fillClrLst meth="repeat">
+      <a:schemeClr val="lt1">
+        <a:alpha val="40000"/>
+      </a:schemeClr>
+    </dgm:fillClrLst>
+    <dgm:linClrLst meth="repeat">
+      <a:schemeClr val="accent1"/>
+    </dgm:linClrLst>
+    <dgm:effectClrLst/>
+    <dgm:txLinClrLst/>
+    <dgm:txFillClrLst meth="repeat">
+      <a:schemeClr val="dk1"/>
+    </dgm:txFillClrLst>
+    <dgm:txEffectClrLst/>
+  </dgm:styleLbl>
+  <dgm:styleLbl name="bgAcc1">
+    <dgm:fillClrLst meth="repeat">
+      <a:schemeClr val="lt1">
+        <a:alpha val="90000"/>
+      </a:schemeClr>
+    </dgm:fillClrLst>
+    <dgm:linClrLst meth="repeat">
+      <a:schemeClr val="accent1"/>
+    </dgm:linClrLst>
+    <dgm:effectClrLst/>
+    <dgm:txLinClrLst/>
+    <dgm:txFillClrLst meth="repeat">
+      <a:schemeClr val="dk1"/>
+    </dgm:txFillClrLst>
+    <dgm:txEffectClrLst/>
+  </dgm:styleLbl>
+  <dgm:styleLbl name="solidFgAcc1">
+    <dgm:fillClrLst meth="repeat">
+      <a:schemeClr val="lt1"/>
+    </dgm:fillClrLst>
+    <dgm:linClrLst meth="repeat">
+      <a:schemeClr val="accent1"/>
+    </dgm:linClrLst>
+    <dgm:effectClrLst/>
+    <dgm:txLinClrLst/>
+    <dgm:txFillClrLst meth="repeat">
+      <a:schemeClr val="dk1"/>
+    </dgm:txFillClrLst>
+    <dgm:txEffectClrLst/>
+  </dgm:styleLbl>
+  <dgm:styleLbl name="solidAlignAcc1">
+    <dgm:fillClrLst meth="repeat">
+      <a:schemeClr val="lt1"/>
+    </dgm:fillClrLst>
+    <dgm:linClrLst meth="repeat">
+      <a:schemeClr val="accent1"/>
+    </dgm:linClrLst>
+    <dgm:effectClrLst/>
+    <dgm:txLinClrLst/>
+    <dgm:txFillClrLst meth="repeat">
+      <a:schemeClr val="dk1"/>
+    </dgm:txFillClrLst>
+    <dgm:txEffectClrLst/>
+  </dgm:styleLbl>
+  <dgm:styleLbl name="solidBgAcc1">
+    <dgm:fillClrLst meth="repeat">
+      <a:schemeClr val="lt1"/>
+    </dgm:fillClrLst>
+    <dgm:linClrLst meth="repeat">
+      <a:schemeClr val="accent1"/>
+    </dgm:linClrLst>
+    <dgm:effectClrLst/>
+    <dgm:txLinClrLst/>
+    <dgm:txFillClrLst meth="repeat">
+      <a:schemeClr val="dk1"/>
+    </dgm:txFillClrLst>
+    <dgm:txEffectClrLst/>
+  </dgm:styleLbl>
+  <dgm:styleLbl name="fgAccFollowNode1">
+    <dgm:fillClrLst meth="repeat">
+      <a:schemeClr val="accent1">
+        <a:alpha val="90000"/>
+        <a:tint val="40000"/>
+      </a:schemeClr>
+    </dgm:fillClrLst>
+    <dgm:linClrLst meth="repeat">
+      <a:schemeClr val="accent1">
+        <a:alpha val="90000"/>
+        <a:tint val="40000"/>
+      </a:schemeClr>
+    </dgm:linClrLst>
+    <dgm:effectClrLst/>
+    <dgm:txLinClrLst/>
+    <dgm:txFillClrLst meth="repeat">
+      <a:schemeClr val="dk1"/>
+    </dgm:txFillClrLst>
+    <dgm:txEffectClrLst/>
+  </dgm:styleLbl>
+  <dgm:styleLbl name="alignAccFollowNode1">
+    <dgm:fillClrLst meth="repeat">
+      <a:schemeClr val="accent1">
+        <a:alpha val="90000"/>
+        <a:tint val="40000"/>
+      </a:schemeClr>
+    </dgm:fillClrLst>
+    <dgm:linClrLst meth="repeat">
+      <a:schemeClr val="accent1">
+        <a:alpha val="90000"/>
+        <a:tint val="40000"/>
+      </a:schemeClr>
+    </dgm:linClrLst>
+    <dgm:effectClrLst/>
+    <dgm:txLinClrLst/>
+    <dgm:txFillClrLst meth="repeat">
+      <a:schemeClr val="dk1"/>
+    </dgm:txFillClrLst>
+    <dgm:txEffectClrLst/>
+  </dgm:styleLbl>
+  <dgm:styleLbl name="bgAccFollowNode1">
+    <dgm:fillClrLst meth="repeat">
+      <a:schemeClr val="accent1">
+        <a:alpha val="90000"/>
+        <a:tint val="40000"/>
+      </a:schemeClr>
+    </dgm:fillClrLst>
+    <dgm:linClrLst meth="repeat">
+      <a:schemeClr val="accent1">
+        <a:alpha val="90000"/>
+        <a:tint val="40000"/>
+      </a:schemeClr>
+    </dgm:linClrLst>
+    <dgm:effectClrLst/>
+    <dgm:txLinClrLst/>
+    <dgm:txFillClrLst meth="repeat">
+      <a:schemeClr val="dk1"/>
+    </dgm:txFillClrLst>
+    <dgm:txEffectClrLst/>
+  </dgm:styleLbl>
+  <dgm:styleLbl name="fgAcc0">
+    <dgm:fillClrLst meth="repeat">
+      <a:schemeClr val="lt1">
+        <a:alpha val="90000"/>
+      </a:schemeClr>
+    </dgm:fillClrLst>
+    <dgm:linClrLst meth="repeat">
+      <a:schemeClr val="accent1"/>
+    </dgm:linClrLst>
+    <dgm:effectClrLst/>
+    <dgm:txLinClrLst/>
+    <dgm:txFillClrLst meth="repeat">
+      <a:schemeClr val="dk1"/>
+    </dgm:txFillClrLst>
+    <dgm:txEffectClrLst/>
+  </dgm:styleLbl>
+  <dgm:styleLbl name="fgAcc2">
+    <dgm:fillClrLst meth="repeat">
+      <a:schemeClr val="lt1">
+        <a:alpha val="90000"/>
+      </a:schemeClr>
+    </dgm:fillClrLst>
+    <dgm:linClrLst meth="repeat">
+      <a:schemeClr val="accent1"/>
+    </dgm:linClrLst>
+    <dgm:effectClrLst/>
+    <dgm:txLinClrLst/>
+    <dgm:txFillClrLst meth="repeat">
+      <a:schemeClr val="dk1"/>
+    </dgm:txFillClrLst>
+    <dgm:txEffectClrLst/>
+  </dgm:styleLbl>
+  <dgm:styleLbl name="fgAcc3">
+    <dgm:fillClrLst meth="repeat">
+      <a:schemeClr val="lt1">
+        <a:alpha val="90000"/>
+      </a:schemeClr>
+    </dgm:fillClrLst>
+    <dgm:linClrLst meth="repeat">
+      <a:schemeClr val="accent1"/>
+    </dgm:linClrLst>
+    <dgm:effectClrLst/>
+    <dgm:txLinClrLst/>
+    <dgm:txFillClrLst meth="repeat">
+      <a:schemeClr val="dk1"/>
+    </dgm:txFillClrLst>
+    <dgm:txEffectClrLst/>
+  </dgm:styleLbl>
+  <dgm:styleLbl name="fgAcc4">
+    <dgm:fillClrLst meth="repeat">
+      <a:schemeClr val="lt1">
+        <a:alpha val="90000"/>
+      </a:schemeClr>
+    </dgm:fillClrLst>
+    <dgm:linClrLst meth="repeat">
+      <a:schemeClr val="accent1"/>
+    </dgm:linClrLst>
+    <dgm:effectClrLst/>
+    <dgm:txLinClrLst/>
+    <dgm:txFillClrLst meth="repeat">
+      <a:schemeClr val="dk1"/>
+    </dgm:txFillClrLst>
+    <dgm:txEffectClrLst/>
+  </dgm:styleLbl>
+  <dgm:styleLbl name="bgShp">
+    <dgm:fillClrLst meth="repeat">
+      <a:schemeClr val="accent1">
+        <a:tint val="40000"/>
+      </a:schemeClr>
+    </dgm:fillClrLst>
+    <dgm:linClrLst meth="repeat">
+      <a:schemeClr val="accent1"/>
+    </dgm:linClrLst>
+    <dgm:effectClrLst/>
+    <dgm:txLinClrLst/>
+    <dgm:txFillClrLst meth="repeat">
+      <a:schemeClr val="dk1"/>
+    </dgm:txFillClrLst>
+    <dgm:txEffectClrLst/>
+  </dgm:styleLbl>
+  <dgm:styleLbl name="dkBgShp">
+    <dgm:fillClrLst meth="repeat">
+      <a:schemeClr val="accent1">
+        <a:shade val="80000"/>
+      </a:schemeClr>
+    </dgm:fillClrLst>
+    <dgm:linClrLst meth="repeat">
+      <a:schemeClr val="accent1"/>
+    </dgm:linClrLst>
+    <dgm:effectClrLst/>
+    <dgm:txLinClrLst/>
+    <dgm:txFillClrLst meth="repeat">
+      <a:schemeClr val="lt1"/>
+    </dgm:txFillClrLst>
+    <dgm:txEffectClrLst/>
+  </dgm:styleLbl>
+  <dgm:styleLbl name="trBgShp">
+    <dgm:fillClrLst meth="repeat">
+      <a:schemeClr val="accent1">
+        <a:tint val="50000"/>
+        <a:alpha val="40000"/>
+      </a:schemeClr>
+    </dgm:fillClrLst>
+    <dgm:linClrLst meth="repeat">
+      <a:schemeClr val="accent1"/>
+    </dgm:linClrLst>
+    <dgm:effectClrLst/>
+    <dgm:txLinClrLst/>
+    <dgm:txFillClrLst meth="repeat">
+      <a:schemeClr val="lt1"/>
+    </dgm:txFillClrLst>
+    <dgm:txEffectClrLst/>
+  </dgm:styleLbl>
+  <dgm:styleLbl name="fgShp">
+    <dgm:fillClrLst meth="repeat">
+      <a:schemeClr val="accent1">
+        <a:tint val="60000"/>
+      </a:schemeClr>
+    </dgm:fillClrLst>
+    <dgm:linClrLst meth="repeat">
+      <a:schemeClr val="lt1"/>
+    </dgm:linClrLst>
+    <dgm:effectClrLst/>
+    <dgm:txLinClrLst/>
+    <dgm:txFillClrLst meth="repeat">
+      <a:schemeClr val="dk1"/>
+    </dgm:txFillClrLst>
+    <dgm:txEffectClrLst/>
+  </dgm:styleLbl>
+  <dgm:styleLbl name="revTx">
+    <dgm:fillClrLst meth="repeat">
+      <a:schemeClr val="lt1">
+        <a:alpha val="0"/>
+      </a:schemeClr>
+    </dgm:fillClrLst>
+    <dgm:linClrLst meth="repeat">
+      <a:schemeClr val="dk1">
+        <a:alpha val="0"/>
+      </a:schemeClr>
+    </dgm:linClrLst>
+    <dgm:effectClrLst/>
+    <dgm:txLinClrLst/>
+    <dgm:txFillClrLst meth="repeat">
+      <a:schemeClr val="tx1"/>
+    </dgm:txFillClrLst>
+    <dgm:txEffectClrLst/>
+  </dgm:styleLbl>
+</dgm:colorsDef>
+</file>
+
 <file path=ppt/diagrams/data1.xml><?xml version="1.0" encoding="utf-8"?>
+<dgm:dataModel xmlns:dgm="http://schemas.openxmlformats.org/drawingml/2006/diagram" xmlns:a="http://schemas.openxmlformats.org/drawingml/2006/main">
+  <dgm:ptLst>
+    <dgm:pt modelId="{CDEC4ADE-CE41-43F2-9EF7-C339785EAFE9}" type="doc">
+      <dgm:prSet loTypeId="urn:microsoft.com/office/officeart/2005/8/layout/vProcess5" loCatId="process" qsTypeId="urn:microsoft.com/office/officeart/2005/8/quickstyle/simple1" qsCatId="simple" csTypeId="urn:microsoft.com/office/officeart/2005/8/colors/accent1_2" csCatId="accent1"/>
+      <dgm:spPr/>
+      <dgm:t>
+        <a:bodyPr/>
+        <a:lstStyle/>
+        <a:p>
+          <a:endParaRPr lang="en-US"/>
+        </a:p>
+      </dgm:t>
+    </dgm:pt>
+    <dgm:pt modelId="{33767BFD-059B-4737-AADC-D2D29705699C}">
+      <dgm:prSet/>
+      <dgm:spPr/>
+      <dgm:t>
+        <a:bodyPr/>
+        <a:lstStyle/>
+        <a:p>
+          <a:r>
+            <a:rPr lang="en-US"/>
+            <a:t>Reliance on fossil fuels may lead to an energy crisis due to pollution and greenhouse gas emissions, making them unreliable as future energy sources. </a:t>
+          </a:r>
+        </a:p>
+      </dgm:t>
+    </dgm:pt>
+    <dgm:pt modelId="{2DD34BFB-CADC-493C-90E2-909C7952FCD6}" type="parTrans" cxnId="{5588A983-92EF-4F4C-A1B4-235BB28D8A25}">
+      <dgm:prSet/>
+      <dgm:spPr/>
+      <dgm:t>
+        <a:bodyPr/>
+        <a:lstStyle/>
+        <a:p>
+          <a:endParaRPr lang="en-US"/>
+        </a:p>
+      </dgm:t>
+    </dgm:pt>
+    <dgm:pt modelId="{E5639056-F79F-4CC2-8ED0-572A50F7AD59}" type="sibTrans" cxnId="{5588A983-92EF-4F4C-A1B4-235BB28D8A25}">
+      <dgm:prSet/>
+      <dgm:spPr/>
+      <dgm:t>
+        <a:bodyPr/>
+        <a:lstStyle/>
+        <a:p>
+          <a:endParaRPr lang="en-US"/>
+        </a:p>
+      </dgm:t>
+    </dgm:pt>
+    <dgm:pt modelId="{2980DDA6-35EE-4362-AEB4-0809AFD5A153}">
+      <dgm:prSet/>
+      <dgm:spPr/>
+      <dgm:t>
+        <a:bodyPr/>
+        <a:lstStyle/>
+        <a:p>
+          <a:r>
+            <a:rPr lang="en-US"/>
+            <a:t>To address the challenge of predicting solar irradiance for solar energy potential, models such as multi-regression and Artificial Neural Networks (ANN) have been developed</a:t>
+          </a:r>
+        </a:p>
+      </dgm:t>
+    </dgm:pt>
+    <dgm:pt modelId="{7C623E80-E2D6-4FEA-BA1A-9BBA7A1DB3A4}" type="parTrans" cxnId="{734689F1-0E99-4D26-8763-63601DCB3CD9}">
+      <dgm:prSet/>
+      <dgm:spPr/>
+      <dgm:t>
+        <a:bodyPr/>
+        <a:lstStyle/>
+        <a:p>
+          <a:endParaRPr lang="en-US"/>
+        </a:p>
+      </dgm:t>
+    </dgm:pt>
+    <dgm:pt modelId="{74916F90-4E47-4137-8A6D-2A2824454C51}" type="sibTrans" cxnId="{734689F1-0E99-4D26-8763-63601DCB3CD9}">
+      <dgm:prSet/>
+      <dgm:spPr/>
+      <dgm:t>
+        <a:bodyPr/>
+        <a:lstStyle/>
+        <a:p>
+          <a:endParaRPr lang="en-US"/>
+        </a:p>
+      </dgm:t>
+    </dgm:pt>
+    <dgm:pt modelId="{F2CAF9F0-997B-45D4-9C79-0FA014B8427F}">
+      <dgm:prSet/>
+      <dgm:spPr/>
+      <dgm:t>
+        <a:bodyPr/>
+        <a:lstStyle/>
+        <a:p>
+          <a:r>
+            <a:rPr lang="en-US"/>
+            <a:t>This research aims to use advanced ANN models, including LSTM, Bi-LSTM, RNN, and ConvLSTM, to forecast solar power generation using plant data and weather information. </a:t>
+          </a:r>
+        </a:p>
+      </dgm:t>
+    </dgm:pt>
+    <dgm:pt modelId="{4DDFF539-563C-4253-8A91-D75C3ACF066E}" type="parTrans" cxnId="{9470A565-4D69-4A32-BA94-8192523B733C}">
+      <dgm:prSet/>
+      <dgm:spPr/>
+      <dgm:t>
+        <a:bodyPr/>
+        <a:lstStyle/>
+        <a:p>
+          <a:endParaRPr lang="en-US"/>
+        </a:p>
+      </dgm:t>
+    </dgm:pt>
+    <dgm:pt modelId="{AFAF4069-53E5-45E3-A5FE-B9DBD582B1EA}" type="sibTrans" cxnId="{9470A565-4D69-4A32-BA94-8192523B733C}">
+      <dgm:prSet/>
+      <dgm:spPr/>
+      <dgm:t>
+        <a:bodyPr/>
+        <a:lstStyle/>
+        <a:p>
+          <a:endParaRPr lang="en-US"/>
+        </a:p>
+      </dgm:t>
+    </dgm:pt>
+    <dgm:pt modelId="{23F65248-F33D-4EF9-9E5D-2554B510A089}">
+      <dgm:prSet/>
+      <dgm:spPr/>
+      <dgm:t>
+        <a:bodyPr/>
+        <a:lstStyle/>
+        <a:p>
+          <a:r>
+            <a:rPr lang="en-US" dirty="0"/>
+            <a:t>A REST API will be created for output predictions, reducing deviations in solar power production and maintaining reliability with accurate forecasting from advanced ANN mode.</a:t>
+          </a:r>
+        </a:p>
+      </dgm:t>
+    </dgm:pt>
+    <dgm:pt modelId="{FCD364E5-ED1D-404D-BB33-8EF6156019A5}" type="parTrans" cxnId="{F7A062D7-C45A-48BB-B467-76069F483348}">
+      <dgm:prSet/>
+      <dgm:spPr/>
+      <dgm:t>
+        <a:bodyPr/>
+        <a:lstStyle/>
+        <a:p>
+          <a:endParaRPr lang="en-US"/>
+        </a:p>
+      </dgm:t>
+    </dgm:pt>
+    <dgm:pt modelId="{FB3A4A15-BCF2-44BB-9171-8BA38CE608B0}" type="sibTrans" cxnId="{F7A062D7-C45A-48BB-B467-76069F483348}">
+      <dgm:prSet/>
+      <dgm:spPr/>
+      <dgm:t>
+        <a:bodyPr/>
+        <a:lstStyle/>
+        <a:p>
+          <a:endParaRPr lang="en-US"/>
+        </a:p>
+      </dgm:t>
+    </dgm:pt>
+    <dgm:pt modelId="{48F4E8B0-9E30-402A-9668-E7793CE49A71}" type="pres">
+      <dgm:prSet presAssocID="{CDEC4ADE-CE41-43F2-9EF7-C339785EAFE9}" presName="outerComposite" presStyleCnt="0">
+        <dgm:presLayoutVars>
+          <dgm:chMax val="5"/>
+          <dgm:dir/>
+          <dgm:resizeHandles val="exact"/>
+        </dgm:presLayoutVars>
+      </dgm:prSet>
+      <dgm:spPr/>
+    </dgm:pt>
+    <dgm:pt modelId="{0DC66DF1-E37D-4301-B4B6-E876D3AB5C71}" type="pres">
+      <dgm:prSet presAssocID="{CDEC4ADE-CE41-43F2-9EF7-C339785EAFE9}" presName="dummyMaxCanvas" presStyleCnt="0">
+        <dgm:presLayoutVars/>
+      </dgm:prSet>
+      <dgm:spPr/>
+    </dgm:pt>
+    <dgm:pt modelId="{1A52FC0E-E007-40E7-8267-6188F8F925B8}" type="pres">
+      <dgm:prSet presAssocID="{CDEC4ADE-CE41-43F2-9EF7-C339785EAFE9}" presName="FourNodes_1" presStyleLbl="node1" presStyleIdx="0" presStyleCnt="4">
+        <dgm:presLayoutVars>
+          <dgm:bulletEnabled val="1"/>
+        </dgm:presLayoutVars>
+      </dgm:prSet>
+      <dgm:spPr/>
+    </dgm:pt>
+    <dgm:pt modelId="{76A7F1EF-A229-4543-8BB2-004A22C042E9}" type="pres">
+      <dgm:prSet presAssocID="{CDEC4ADE-CE41-43F2-9EF7-C339785EAFE9}" presName="FourNodes_2" presStyleLbl="node1" presStyleIdx="1" presStyleCnt="4">
+        <dgm:presLayoutVars>
+          <dgm:bulletEnabled val="1"/>
+        </dgm:presLayoutVars>
+      </dgm:prSet>
+      <dgm:spPr/>
+    </dgm:pt>
+    <dgm:pt modelId="{75C60ED4-6375-4E47-98A0-03EC777D07B1}" type="pres">
+      <dgm:prSet presAssocID="{CDEC4ADE-CE41-43F2-9EF7-C339785EAFE9}" presName="FourNodes_3" presStyleLbl="node1" presStyleIdx="2" presStyleCnt="4">
+        <dgm:presLayoutVars>
+          <dgm:bulletEnabled val="1"/>
+        </dgm:presLayoutVars>
+      </dgm:prSet>
+      <dgm:spPr/>
+    </dgm:pt>
+    <dgm:pt modelId="{DB1D6F21-3568-4306-A524-9BD486A025E7}" type="pres">
+      <dgm:prSet presAssocID="{CDEC4ADE-CE41-43F2-9EF7-C339785EAFE9}" presName="FourNodes_4" presStyleLbl="node1" presStyleIdx="3" presStyleCnt="4">
+        <dgm:presLayoutVars>
+          <dgm:bulletEnabled val="1"/>
+        </dgm:presLayoutVars>
+      </dgm:prSet>
+      <dgm:spPr/>
+    </dgm:pt>
+    <dgm:pt modelId="{31FB057D-A3A3-4CB5-8FC3-15082CFE93D4}" type="pres">
+      <dgm:prSet presAssocID="{CDEC4ADE-CE41-43F2-9EF7-C339785EAFE9}" presName="FourConn_1-2" presStyleLbl="fgAccFollowNode1" presStyleIdx="0" presStyleCnt="3">
+        <dgm:presLayoutVars>
+          <dgm:bulletEnabled val="1"/>
+        </dgm:presLayoutVars>
+      </dgm:prSet>
+      <dgm:spPr/>
+    </dgm:pt>
+    <dgm:pt modelId="{3D198B3B-75AC-4B3D-AC5F-F4E3D1A96993}" type="pres">
+      <dgm:prSet presAssocID="{CDEC4ADE-CE41-43F2-9EF7-C339785EAFE9}" presName="FourConn_2-3" presStyleLbl="fgAccFollowNode1" presStyleIdx="1" presStyleCnt="3">
+        <dgm:presLayoutVars>
+          <dgm:bulletEnabled val="1"/>
+        </dgm:presLayoutVars>
+      </dgm:prSet>
+      <dgm:spPr/>
+    </dgm:pt>
+    <dgm:pt modelId="{DF2C90DF-EECE-4155-9EC5-73C9A1B65950}" type="pres">
+      <dgm:prSet presAssocID="{CDEC4ADE-CE41-43F2-9EF7-C339785EAFE9}" presName="FourConn_3-4" presStyleLbl="fgAccFollowNode1" presStyleIdx="2" presStyleCnt="3">
+        <dgm:presLayoutVars>
+          <dgm:bulletEnabled val="1"/>
+        </dgm:presLayoutVars>
+      </dgm:prSet>
+      <dgm:spPr/>
+    </dgm:pt>
+    <dgm:pt modelId="{716F3C33-A995-4383-B374-D1A3F44EF158}" type="pres">
+      <dgm:prSet presAssocID="{CDEC4ADE-CE41-43F2-9EF7-C339785EAFE9}" presName="FourNodes_1_text" presStyleLbl="node1" presStyleIdx="3" presStyleCnt="4">
+        <dgm:presLayoutVars>
+          <dgm:bulletEnabled val="1"/>
+        </dgm:presLayoutVars>
+      </dgm:prSet>
+      <dgm:spPr/>
+    </dgm:pt>
+    <dgm:pt modelId="{E287D971-6B99-4661-A167-615584022EF3}" type="pres">
+      <dgm:prSet presAssocID="{CDEC4ADE-CE41-43F2-9EF7-C339785EAFE9}" presName="FourNodes_2_text" presStyleLbl="node1" presStyleIdx="3" presStyleCnt="4">
+        <dgm:presLayoutVars>
+          <dgm:bulletEnabled val="1"/>
+        </dgm:presLayoutVars>
+      </dgm:prSet>
+      <dgm:spPr/>
+    </dgm:pt>
+    <dgm:pt modelId="{CA78598D-9FC8-45DE-9EEE-0A65DDFB6512}" type="pres">
+      <dgm:prSet presAssocID="{CDEC4ADE-CE41-43F2-9EF7-C339785EAFE9}" presName="FourNodes_3_text" presStyleLbl="node1" presStyleIdx="3" presStyleCnt="4">
+        <dgm:presLayoutVars>
+          <dgm:bulletEnabled val="1"/>
+        </dgm:presLayoutVars>
+      </dgm:prSet>
+      <dgm:spPr/>
+    </dgm:pt>
+    <dgm:pt modelId="{A490C2A3-8F2E-44B4-8F4C-E0E0D5C7A929}" type="pres">
+      <dgm:prSet presAssocID="{CDEC4ADE-CE41-43F2-9EF7-C339785EAFE9}" presName="FourNodes_4_text" presStyleLbl="node1" presStyleIdx="3" presStyleCnt="4">
+        <dgm:presLayoutVars>
+          <dgm:bulletEnabled val="1"/>
+        </dgm:presLayoutVars>
+      </dgm:prSet>
+      <dgm:spPr/>
+    </dgm:pt>
+  </dgm:ptLst>
+  <dgm:cxnLst>
+    <dgm:cxn modelId="{88039D01-2334-43F1-A6F1-0EE79A739633}" type="presOf" srcId="{F2CAF9F0-997B-45D4-9C79-0FA014B8427F}" destId="{CA78598D-9FC8-45DE-9EEE-0A65DDFB6512}" srcOrd="1" destOrd="0" presId="urn:microsoft.com/office/officeart/2005/8/layout/vProcess5"/>
+    <dgm:cxn modelId="{A992BE02-6878-4CC2-9F06-2399A83EF3BF}" type="presOf" srcId="{33767BFD-059B-4737-AADC-D2D29705699C}" destId="{716F3C33-A995-4383-B374-D1A3F44EF158}" srcOrd="1" destOrd="0" presId="urn:microsoft.com/office/officeart/2005/8/layout/vProcess5"/>
+    <dgm:cxn modelId="{0508930D-D652-45F9-863A-CD1B4A3BEDC8}" type="presOf" srcId="{CDEC4ADE-CE41-43F2-9EF7-C339785EAFE9}" destId="{48F4E8B0-9E30-402A-9668-E7793CE49A71}" srcOrd="0" destOrd="0" presId="urn:microsoft.com/office/officeart/2005/8/layout/vProcess5"/>
+    <dgm:cxn modelId="{D48D6614-6919-4408-B076-192D01FF8C07}" type="presOf" srcId="{2980DDA6-35EE-4362-AEB4-0809AFD5A153}" destId="{76A7F1EF-A229-4543-8BB2-004A22C042E9}" srcOrd="0" destOrd="0" presId="urn:microsoft.com/office/officeart/2005/8/layout/vProcess5"/>
+    <dgm:cxn modelId="{47D4072F-D0F5-4D95-867B-830493D9167F}" type="presOf" srcId="{2980DDA6-35EE-4362-AEB4-0809AFD5A153}" destId="{E287D971-6B99-4661-A167-615584022EF3}" srcOrd="1" destOrd="0" presId="urn:microsoft.com/office/officeart/2005/8/layout/vProcess5"/>
+    <dgm:cxn modelId="{9910093F-E7DD-451F-801C-0D9A9E7B0A82}" type="presOf" srcId="{AFAF4069-53E5-45E3-A5FE-B9DBD582B1EA}" destId="{DF2C90DF-EECE-4155-9EC5-73C9A1B65950}" srcOrd="0" destOrd="0" presId="urn:microsoft.com/office/officeart/2005/8/layout/vProcess5"/>
+    <dgm:cxn modelId="{9470A565-4D69-4A32-BA94-8192523B733C}" srcId="{CDEC4ADE-CE41-43F2-9EF7-C339785EAFE9}" destId="{F2CAF9F0-997B-45D4-9C79-0FA014B8427F}" srcOrd="2" destOrd="0" parTransId="{4DDFF539-563C-4253-8A91-D75C3ACF066E}" sibTransId="{AFAF4069-53E5-45E3-A5FE-B9DBD582B1EA}"/>
+    <dgm:cxn modelId="{9D888752-055B-49CB-ACA6-5693907319EF}" type="presOf" srcId="{F2CAF9F0-997B-45D4-9C79-0FA014B8427F}" destId="{75C60ED4-6375-4E47-98A0-03EC777D07B1}" srcOrd="0" destOrd="0" presId="urn:microsoft.com/office/officeart/2005/8/layout/vProcess5"/>
+    <dgm:cxn modelId="{5588A983-92EF-4F4C-A1B4-235BB28D8A25}" srcId="{CDEC4ADE-CE41-43F2-9EF7-C339785EAFE9}" destId="{33767BFD-059B-4737-AADC-D2D29705699C}" srcOrd="0" destOrd="0" parTransId="{2DD34BFB-CADC-493C-90E2-909C7952FCD6}" sibTransId="{E5639056-F79F-4CC2-8ED0-572A50F7AD59}"/>
+    <dgm:cxn modelId="{2AD72E9F-22F9-4B6E-AEAE-6BFCBDC7EDC8}" type="presOf" srcId="{23F65248-F33D-4EF9-9E5D-2554B510A089}" destId="{DB1D6F21-3568-4306-A524-9BD486A025E7}" srcOrd="0" destOrd="0" presId="urn:microsoft.com/office/officeart/2005/8/layout/vProcess5"/>
+    <dgm:cxn modelId="{0BFE9BBB-4898-40E2-A6A0-3A628E75AD7D}" type="presOf" srcId="{74916F90-4E47-4137-8A6D-2A2824454C51}" destId="{3D198B3B-75AC-4B3D-AC5F-F4E3D1A96993}" srcOrd="0" destOrd="0" presId="urn:microsoft.com/office/officeart/2005/8/layout/vProcess5"/>
+    <dgm:cxn modelId="{FB3738C0-71CC-4928-BA99-1006B643CD74}" type="presOf" srcId="{23F65248-F33D-4EF9-9E5D-2554B510A089}" destId="{A490C2A3-8F2E-44B4-8F4C-E0E0D5C7A929}" srcOrd="1" destOrd="0" presId="urn:microsoft.com/office/officeart/2005/8/layout/vProcess5"/>
+    <dgm:cxn modelId="{72851FCE-0DF3-4BD7-8784-00DFB6BF0896}" type="presOf" srcId="{33767BFD-059B-4737-AADC-D2D29705699C}" destId="{1A52FC0E-E007-40E7-8267-6188F8F925B8}" srcOrd="0" destOrd="0" presId="urn:microsoft.com/office/officeart/2005/8/layout/vProcess5"/>
+    <dgm:cxn modelId="{F7A062D7-C45A-48BB-B467-76069F483348}" srcId="{CDEC4ADE-CE41-43F2-9EF7-C339785EAFE9}" destId="{23F65248-F33D-4EF9-9E5D-2554B510A089}" srcOrd="3" destOrd="0" parTransId="{FCD364E5-ED1D-404D-BB33-8EF6156019A5}" sibTransId="{FB3A4A15-BCF2-44BB-9171-8BA38CE608B0}"/>
+    <dgm:cxn modelId="{734689F1-0E99-4D26-8763-63601DCB3CD9}" srcId="{CDEC4ADE-CE41-43F2-9EF7-C339785EAFE9}" destId="{2980DDA6-35EE-4362-AEB4-0809AFD5A153}" srcOrd="1" destOrd="0" parTransId="{7C623E80-E2D6-4FEA-BA1A-9BBA7A1DB3A4}" sibTransId="{74916F90-4E47-4137-8A6D-2A2824454C51}"/>
+    <dgm:cxn modelId="{2777A9F3-0E3E-428C-BD0F-BECCB82183CB}" type="presOf" srcId="{E5639056-F79F-4CC2-8ED0-572A50F7AD59}" destId="{31FB057D-A3A3-4CB5-8FC3-15082CFE93D4}" srcOrd="0" destOrd="0" presId="urn:microsoft.com/office/officeart/2005/8/layout/vProcess5"/>
+    <dgm:cxn modelId="{DB720E36-B10C-4563-BB10-8E1626D43900}" type="presParOf" srcId="{48F4E8B0-9E30-402A-9668-E7793CE49A71}" destId="{0DC66DF1-E37D-4301-B4B6-E876D3AB5C71}" srcOrd="0" destOrd="0" presId="urn:microsoft.com/office/officeart/2005/8/layout/vProcess5"/>
+    <dgm:cxn modelId="{3CEEB651-AA9D-4324-8B6F-45ED22B144ED}" type="presParOf" srcId="{48F4E8B0-9E30-402A-9668-E7793CE49A71}" destId="{1A52FC0E-E007-40E7-8267-6188F8F925B8}" srcOrd="1" destOrd="0" presId="urn:microsoft.com/office/officeart/2005/8/layout/vProcess5"/>
+    <dgm:cxn modelId="{4D6501A3-8A8D-484C-883A-14262DCAE010}" type="presParOf" srcId="{48F4E8B0-9E30-402A-9668-E7793CE49A71}" destId="{76A7F1EF-A229-4543-8BB2-004A22C042E9}" srcOrd="2" destOrd="0" presId="urn:microsoft.com/office/officeart/2005/8/layout/vProcess5"/>
+    <dgm:cxn modelId="{6E1EF0BE-D572-42BE-867B-D8A784A424AB}" type="presParOf" srcId="{48F4E8B0-9E30-402A-9668-E7793CE49A71}" destId="{75C60ED4-6375-4E47-98A0-03EC777D07B1}" srcOrd="3" destOrd="0" presId="urn:microsoft.com/office/officeart/2005/8/layout/vProcess5"/>
+    <dgm:cxn modelId="{F918DAC7-6232-4B6E-9B9D-A3DA3F655D92}" type="presParOf" srcId="{48F4E8B0-9E30-402A-9668-E7793CE49A71}" destId="{DB1D6F21-3568-4306-A524-9BD486A025E7}" srcOrd="4" destOrd="0" presId="urn:microsoft.com/office/officeart/2005/8/layout/vProcess5"/>
+    <dgm:cxn modelId="{4F0CB129-5A2E-4C30-8A48-30DD34DDCEF4}" type="presParOf" srcId="{48F4E8B0-9E30-402A-9668-E7793CE49A71}" destId="{31FB057D-A3A3-4CB5-8FC3-15082CFE93D4}" srcOrd="5" destOrd="0" presId="urn:microsoft.com/office/officeart/2005/8/layout/vProcess5"/>
+    <dgm:cxn modelId="{6387C733-5B47-40E5-939E-77DC03A9F7C2}" type="presParOf" srcId="{48F4E8B0-9E30-402A-9668-E7793CE49A71}" destId="{3D198B3B-75AC-4B3D-AC5F-F4E3D1A96993}" srcOrd="6" destOrd="0" presId="urn:microsoft.com/office/officeart/2005/8/layout/vProcess5"/>
+    <dgm:cxn modelId="{3925A798-7F9A-4B61-AE27-91F593E07262}" type="presParOf" srcId="{48F4E8B0-9E30-402A-9668-E7793CE49A71}" destId="{DF2C90DF-EECE-4155-9EC5-73C9A1B65950}" srcOrd="7" destOrd="0" presId="urn:microsoft.com/office/officeart/2005/8/layout/vProcess5"/>
+    <dgm:cxn modelId="{6986B941-D546-4880-9F77-0220E2663B4A}" type="presParOf" srcId="{48F4E8B0-9E30-402A-9668-E7793CE49A71}" destId="{716F3C33-A995-4383-B374-D1A3F44EF158}" srcOrd="8" destOrd="0" presId="urn:microsoft.com/office/officeart/2005/8/layout/vProcess5"/>
+    <dgm:cxn modelId="{CD6A5D2E-7194-4F70-8B79-71DB8AD543D0}" type="presParOf" srcId="{48F4E8B0-9E30-402A-9668-E7793CE49A71}" destId="{E287D971-6B99-4661-A167-615584022EF3}" srcOrd="9" destOrd="0" presId="urn:microsoft.com/office/officeart/2005/8/layout/vProcess5"/>
+    <dgm:cxn modelId="{648CD2C6-A409-43C4-B2BE-49804FAC472F}" type="presParOf" srcId="{48F4E8B0-9E30-402A-9668-E7793CE49A71}" destId="{CA78598D-9FC8-45DE-9EEE-0A65DDFB6512}" srcOrd="10" destOrd="0" presId="urn:microsoft.com/office/officeart/2005/8/layout/vProcess5"/>
+    <dgm:cxn modelId="{3506E750-6151-4D07-A80F-9B27A12E13D7}" type="presParOf" srcId="{48F4E8B0-9E30-402A-9668-E7793CE49A71}" destId="{A490C2A3-8F2E-44B4-8F4C-E0E0D5C7A929}" srcOrd="11" destOrd="0" presId="urn:microsoft.com/office/officeart/2005/8/layout/vProcess5"/>
+  </dgm:cxnLst>
+  <dgm:bg/>
+  <dgm:whole/>
+  <dgm:extLst>
+    <a:ext uri="http://schemas.microsoft.com/office/drawing/2008/diagram">
+      <dsp:dataModelExt xmlns:dsp="http://schemas.microsoft.com/office/drawing/2008/diagram" relId="rId8" minVer="http://schemas.openxmlformats.org/drawingml/2006/diagram"/>
+    </a:ext>
+  </dgm:extLst>
+</dgm:dataModel>
+</file>
+
+<file path=ppt/diagrams/data2.xml><?xml version="1.0" encoding="utf-8"?>
 <dgm:dataModel xmlns:dgm="http://schemas.openxmlformats.org/drawingml/2006/diagram" xmlns:a="http://schemas.openxmlformats.org/drawingml/2006/main">
   <dgm:ptLst>
     <dgm:pt modelId="{2CF927C6-88F1-4267-A6DA-2C822A42AF47}" type="doc">
@@ -1121,6 +2171,578 @@
 </file>
 
 <file path=ppt/diagrams/drawing1.xml><?xml version="1.0" encoding="utf-8"?>
+<dsp:drawing xmlns:dgm="http://schemas.openxmlformats.org/drawingml/2006/diagram" xmlns:dsp="http://schemas.microsoft.com/office/drawing/2008/diagram" xmlns:a="http://schemas.openxmlformats.org/drawingml/2006/main">
+  <dsp:spTree>
+    <dsp:nvGrpSpPr>
+      <dsp:cNvPr id="0" name=""/>
+      <dsp:cNvGrpSpPr/>
+    </dsp:nvGrpSpPr>
+    <dsp:grpSpPr/>
+    <dsp:sp modelId="{1A52FC0E-E007-40E7-8267-6188F8F925B8}">
+      <dsp:nvSpPr>
+        <dsp:cNvPr id="0" name=""/>
+        <dsp:cNvSpPr/>
+      </dsp:nvSpPr>
+      <dsp:spPr>
+        <a:xfrm>
+          <a:off x="0" y="0"/>
+          <a:ext cx="7158534" cy="1121204"/>
+        </a:xfrm>
+        <a:prstGeom prst="roundRect">
+          <a:avLst>
+            <a:gd name="adj" fmla="val 10000"/>
+          </a:avLst>
+        </a:prstGeom>
+        <a:solidFill>
+          <a:schemeClr val="accent1">
+            <a:hueOff val="0"/>
+            <a:satOff val="0"/>
+            <a:lumOff val="0"/>
+            <a:alphaOff val="0"/>
+          </a:schemeClr>
+        </a:solidFill>
+        <a:ln w="12700" cap="flat" cmpd="sng" algn="ctr">
+          <a:solidFill>
+            <a:schemeClr val="lt1">
+              <a:hueOff val="0"/>
+              <a:satOff val="0"/>
+              <a:lumOff val="0"/>
+              <a:alphaOff val="0"/>
+            </a:schemeClr>
+          </a:solidFill>
+          <a:prstDash val="solid"/>
+          <a:miter lim="800000"/>
+        </a:ln>
+        <a:effectLst/>
+      </dsp:spPr>
+      <dsp:style>
+        <a:lnRef idx="2">
+          <a:scrgbClr r="0" g="0" b="0"/>
+        </a:lnRef>
+        <a:fillRef idx="1">
+          <a:scrgbClr r="0" g="0" b="0"/>
+        </a:fillRef>
+        <a:effectRef idx="0">
+          <a:scrgbClr r="0" g="0" b="0"/>
+        </a:effectRef>
+        <a:fontRef idx="minor">
+          <a:schemeClr val="lt1"/>
+        </a:fontRef>
+      </dsp:style>
+      <dsp:txBody>
+        <a:bodyPr spcFirstLastPara="0" vert="horz" wrap="square" lIns="64770" tIns="64770" rIns="64770" bIns="64770" numCol="1" spcCol="1270" anchor="ctr" anchorCtr="0">
+          <a:noAutofit/>
+        </a:bodyPr>
+        <a:lstStyle/>
+        <a:p>
+          <a:pPr marL="0" lvl="0" indent="0" algn="l" defTabSz="755650">
+            <a:lnSpc>
+              <a:spcPct val="90000"/>
+            </a:lnSpc>
+            <a:spcBef>
+              <a:spcPct val="0"/>
+            </a:spcBef>
+            <a:spcAft>
+              <a:spcPct val="35000"/>
+            </a:spcAft>
+            <a:buNone/>
+          </a:pPr>
+          <a:r>
+            <a:rPr lang="en-US" sz="1700" kern="1200"/>
+            <a:t>Reliance on fossil fuels may lead to an energy crisis due to pollution and greenhouse gas emissions, making them unreliable as future energy sources. </a:t>
+          </a:r>
+        </a:p>
+      </dsp:txBody>
+      <dsp:txXfrm>
+        <a:off x="32839" y="32839"/>
+        <a:ext cx="5853924" cy="1055526"/>
+      </dsp:txXfrm>
+    </dsp:sp>
+    <dsp:sp modelId="{76A7F1EF-A229-4543-8BB2-004A22C042E9}">
+      <dsp:nvSpPr>
+        <dsp:cNvPr id="0" name=""/>
+        <dsp:cNvSpPr/>
+      </dsp:nvSpPr>
+      <dsp:spPr>
+        <a:xfrm>
+          <a:off x="599527" y="1325060"/>
+          <a:ext cx="7158534" cy="1121204"/>
+        </a:xfrm>
+        <a:prstGeom prst="roundRect">
+          <a:avLst>
+            <a:gd name="adj" fmla="val 10000"/>
+          </a:avLst>
+        </a:prstGeom>
+        <a:solidFill>
+          <a:schemeClr val="accent1">
+            <a:hueOff val="0"/>
+            <a:satOff val="0"/>
+            <a:lumOff val="0"/>
+            <a:alphaOff val="0"/>
+          </a:schemeClr>
+        </a:solidFill>
+        <a:ln w="12700" cap="flat" cmpd="sng" algn="ctr">
+          <a:solidFill>
+            <a:schemeClr val="lt1">
+              <a:hueOff val="0"/>
+              <a:satOff val="0"/>
+              <a:lumOff val="0"/>
+              <a:alphaOff val="0"/>
+            </a:schemeClr>
+          </a:solidFill>
+          <a:prstDash val="solid"/>
+          <a:miter lim="800000"/>
+        </a:ln>
+        <a:effectLst/>
+      </dsp:spPr>
+      <dsp:style>
+        <a:lnRef idx="2">
+          <a:scrgbClr r="0" g="0" b="0"/>
+        </a:lnRef>
+        <a:fillRef idx="1">
+          <a:scrgbClr r="0" g="0" b="0"/>
+        </a:fillRef>
+        <a:effectRef idx="0">
+          <a:scrgbClr r="0" g="0" b="0"/>
+        </a:effectRef>
+        <a:fontRef idx="minor">
+          <a:schemeClr val="lt1"/>
+        </a:fontRef>
+      </dsp:style>
+      <dsp:txBody>
+        <a:bodyPr spcFirstLastPara="0" vert="horz" wrap="square" lIns="64770" tIns="64770" rIns="64770" bIns="64770" numCol="1" spcCol="1270" anchor="ctr" anchorCtr="0">
+          <a:noAutofit/>
+        </a:bodyPr>
+        <a:lstStyle/>
+        <a:p>
+          <a:pPr marL="0" lvl="0" indent="0" algn="l" defTabSz="755650">
+            <a:lnSpc>
+              <a:spcPct val="90000"/>
+            </a:lnSpc>
+            <a:spcBef>
+              <a:spcPct val="0"/>
+            </a:spcBef>
+            <a:spcAft>
+              <a:spcPct val="35000"/>
+            </a:spcAft>
+            <a:buNone/>
+          </a:pPr>
+          <a:r>
+            <a:rPr lang="en-US" sz="1700" kern="1200"/>
+            <a:t>To address the challenge of predicting solar irradiance for solar energy potential, models such as multi-regression and Artificial Neural Networks (ANN) have been developed</a:t>
+          </a:r>
+        </a:p>
+      </dsp:txBody>
+      <dsp:txXfrm>
+        <a:off x="632366" y="1357899"/>
+        <a:ext cx="5764545" cy="1055526"/>
+      </dsp:txXfrm>
+    </dsp:sp>
+    <dsp:sp modelId="{75C60ED4-6375-4E47-98A0-03EC777D07B1}">
+      <dsp:nvSpPr>
+        <dsp:cNvPr id="0" name=""/>
+        <dsp:cNvSpPr/>
+      </dsp:nvSpPr>
+      <dsp:spPr>
+        <a:xfrm>
+          <a:off x="1190106" y="2650120"/>
+          <a:ext cx="7158534" cy="1121204"/>
+        </a:xfrm>
+        <a:prstGeom prst="roundRect">
+          <a:avLst>
+            <a:gd name="adj" fmla="val 10000"/>
+          </a:avLst>
+        </a:prstGeom>
+        <a:solidFill>
+          <a:schemeClr val="accent1">
+            <a:hueOff val="0"/>
+            <a:satOff val="0"/>
+            <a:lumOff val="0"/>
+            <a:alphaOff val="0"/>
+          </a:schemeClr>
+        </a:solidFill>
+        <a:ln w="12700" cap="flat" cmpd="sng" algn="ctr">
+          <a:solidFill>
+            <a:schemeClr val="lt1">
+              <a:hueOff val="0"/>
+              <a:satOff val="0"/>
+              <a:lumOff val="0"/>
+              <a:alphaOff val="0"/>
+            </a:schemeClr>
+          </a:solidFill>
+          <a:prstDash val="solid"/>
+          <a:miter lim="800000"/>
+        </a:ln>
+        <a:effectLst/>
+      </dsp:spPr>
+      <dsp:style>
+        <a:lnRef idx="2">
+          <a:scrgbClr r="0" g="0" b="0"/>
+        </a:lnRef>
+        <a:fillRef idx="1">
+          <a:scrgbClr r="0" g="0" b="0"/>
+        </a:fillRef>
+        <a:effectRef idx="0">
+          <a:scrgbClr r="0" g="0" b="0"/>
+        </a:effectRef>
+        <a:fontRef idx="minor">
+          <a:schemeClr val="lt1"/>
+        </a:fontRef>
+      </dsp:style>
+      <dsp:txBody>
+        <a:bodyPr spcFirstLastPara="0" vert="horz" wrap="square" lIns="64770" tIns="64770" rIns="64770" bIns="64770" numCol="1" spcCol="1270" anchor="ctr" anchorCtr="0">
+          <a:noAutofit/>
+        </a:bodyPr>
+        <a:lstStyle/>
+        <a:p>
+          <a:pPr marL="0" lvl="0" indent="0" algn="l" defTabSz="755650">
+            <a:lnSpc>
+              <a:spcPct val="90000"/>
+            </a:lnSpc>
+            <a:spcBef>
+              <a:spcPct val="0"/>
+            </a:spcBef>
+            <a:spcAft>
+              <a:spcPct val="35000"/>
+            </a:spcAft>
+            <a:buNone/>
+          </a:pPr>
+          <a:r>
+            <a:rPr lang="en-US" sz="1700" kern="1200"/>
+            <a:t>This research aims to use advanced ANN models, including LSTM, Bi-LSTM, RNN, and ConvLSTM, to forecast solar power generation using plant data and weather information. </a:t>
+          </a:r>
+        </a:p>
+      </dsp:txBody>
+      <dsp:txXfrm>
+        <a:off x="1222945" y="2682959"/>
+        <a:ext cx="5773494" cy="1055526"/>
+      </dsp:txXfrm>
+    </dsp:sp>
+    <dsp:sp modelId="{DB1D6F21-3568-4306-A524-9BD486A025E7}">
+      <dsp:nvSpPr>
+        <dsp:cNvPr id="0" name=""/>
+        <dsp:cNvSpPr/>
+      </dsp:nvSpPr>
+      <dsp:spPr>
+        <a:xfrm>
+          <a:off x="1789633" y="3975181"/>
+          <a:ext cx="7158534" cy="1121204"/>
+        </a:xfrm>
+        <a:prstGeom prst="roundRect">
+          <a:avLst>
+            <a:gd name="adj" fmla="val 10000"/>
+          </a:avLst>
+        </a:prstGeom>
+        <a:solidFill>
+          <a:schemeClr val="accent1">
+            <a:hueOff val="0"/>
+            <a:satOff val="0"/>
+            <a:lumOff val="0"/>
+            <a:alphaOff val="0"/>
+          </a:schemeClr>
+        </a:solidFill>
+        <a:ln w="12700" cap="flat" cmpd="sng" algn="ctr">
+          <a:solidFill>
+            <a:schemeClr val="lt1">
+              <a:hueOff val="0"/>
+              <a:satOff val="0"/>
+              <a:lumOff val="0"/>
+              <a:alphaOff val="0"/>
+            </a:schemeClr>
+          </a:solidFill>
+          <a:prstDash val="solid"/>
+          <a:miter lim="800000"/>
+        </a:ln>
+        <a:effectLst/>
+      </dsp:spPr>
+      <dsp:style>
+        <a:lnRef idx="2">
+          <a:scrgbClr r="0" g="0" b="0"/>
+        </a:lnRef>
+        <a:fillRef idx="1">
+          <a:scrgbClr r="0" g="0" b="0"/>
+        </a:fillRef>
+        <a:effectRef idx="0">
+          <a:scrgbClr r="0" g="0" b="0"/>
+        </a:effectRef>
+        <a:fontRef idx="minor">
+          <a:schemeClr val="lt1"/>
+        </a:fontRef>
+      </dsp:style>
+      <dsp:txBody>
+        <a:bodyPr spcFirstLastPara="0" vert="horz" wrap="square" lIns="64770" tIns="64770" rIns="64770" bIns="64770" numCol="1" spcCol="1270" anchor="ctr" anchorCtr="0">
+          <a:noAutofit/>
+        </a:bodyPr>
+        <a:lstStyle/>
+        <a:p>
+          <a:pPr marL="0" lvl="0" indent="0" algn="l" defTabSz="755650">
+            <a:lnSpc>
+              <a:spcPct val="90000"/>
+            </a:lnSpc>
+            <a:spcBef>
+              <a:spcPct val="0"/>
+            </a:spcBef>
+            <a:spcAft>
+              <a:spcPct val="35000"/>
+            </a:spcAft>
+            <a:buNone/>
+          </a:pPr>
+          <a:r>
+            <a:rPr lang="en-US" sz="1700" kern="1200" dirty="0"/>
+            <a:t>A REST API will be created for output predictions, reducing deviations in solar power production and maintaining reliability with accurate forecasting from advanced ANN mode.</a:t>
+          </a:r>
+        </a:p>
+      </dsp:txBody>
+      <dsp:txXfrm>
+        <a:off x="1822472" y="4008020"/>
+        <a:ext cx="5764545" cy="1055526"/>
+      </dsp:txXfrm>
+    </dsp:sp>
+    <dsp:sp modelId="{31FB057D-A3A3-4CB5-8FC3-15082CFE93D4}">
+      <dsp:nvSpPr>
+        <dsp:cNvPr id="0" name=""/>
+        <dsp:cNvSpPr/>
+      </dsp:nvSpPr>
+      <dsp:spPr>
+        <a:xfrm>
+          <a:off x="6429751" y="858741"/>
+          <a:ext cx="728783" cy="728783"/>
+        </a:xfrm>
+        <a:prstGeom prst="downArrow">
+          <a:avLst>
+            <a:gd name="adj1" fmla="val 55000"/>
+            <a:gd name="adj2" fmla="val 45000"/>
+          </a:avLst>
+        </a:prstGeom>
+        <a:solidFill>
+          <a:schemeClr val="accent1">
+            <a:alpha val="90000"/>
+            <a:tint val="40000"/>
+            <a:hueOff val="0"/>
+            <a:satOff val="0"/>
+            <a:lumOff val="0"/>
+            <a:alphaOff val="0"/>
+          </a:schemeClr>
+        </a:solidFill>
+        <a:ln w="12700" cap="flat" cmpd="sng" algn="ctr">
+          <a:solidFill>
+            <a:schemeClr val="accent1">
+              <a:alpha val="90000"/>
+              <a:tint val="40000"/>
+              <a:hueOff val="0"/>
+              <a:satOff val="0"/>
+              <a:lumOff val="0"/>
+              <a:alphaOff val="0"/>
+            </a:schemeClr>
+          </a:solidFill>
+          <a:prstDash val="solid"/>
+          <a:miter lim="800000"/>
+        </a:ln>
+        <a:effectLst/>
+      </dsp:spPr>
+      <dsp:style>
+        <a:lnRef idx="2">
+          <a:scrgbClr r="0" g="0" b="0"/>
+        </a:lnRef>
+        <a:fillRef idx="1">
+          <a:scrgbClr r="0" g="0" b="0"/>
+        </a:fillRef>
+        <a:effectRef idx="0">
+          <a:scrgbClr r="0" g="0" b="0"/>
+        </a:effectRef>
+        <a:fontRef idx="minor"/>
+      </dsp:style>
+      <dsp:txBody>
+        <a:bodyPr spcFirstLastPara="0" vert="horz" wrap="square" lIns="41910" tIns="41910" rIns="41910" bIns="41910" numCol="1" spcCol="1270" anchor="ctr" anchorCtr="0">
+          <a:noAutofit/>
+        </a:bodyPr>
+        <a:lstStyle/>
+        <a:p>
+          <a:pPr marL="0" lvl="0" indent="0" algn="ctr" defTabSz="1466850">
+            <a:lnSpc>
+              <a:spcPct val="90000"/>
+            </a:lnSpc>
+            <a:spcBef>
+              <a:spcPct val="0"/>
+            </a:spcBef>
+            <a:spcAft>
+              <a:spcPct val="35000"/>
+            </a:spcAft>
+            <a:buNone/>
+          </a:pPr>
+          <a:endParaRPr lang="en-US" sz="3300" kern="1200"/>
+        </a:p>
+      </dsp:txBody>
+      <dsp:txXfrm>
+        <a:off x="6593727" y="858741"/>
+        <a:ext cx="400831" cy="548409"/>
+      </dsp:txXfrm>
+    </dsp:sp>
+    <dsp:sp modelId="{3D198B3B-75AC-4B3D-AC5F-F4E3D1A96993}">
+      <dsp:nvSpPr>
+        <dsp:cNvPr id="0" name=""/>
+        <dsp:cNvSpPr/>
+      </dsp:nvSpPr>
+      <dsp:spPr>
+        <a:xfrm>
+          <a:off x="7029278" y="2183801"/>
+          <a:ext cx="728783" cy="728783"/>
+        </a:xfrm>
+        <a:prstGeom prst="downArrow">
+          <a:avLst>
+            <a:gd name="adj1" fmla="val 55000"/>
+            <a:gd name="adj2" fmla="val 45000"/>
+          </a:avLst>
+        </a:prstGeom>
+        <a:solidFill>
+          <a:schemeClr val="accent1">
+            <a:alpha val="90000"/>
+            <a:tint val="40000"/>
+            <a:hueOff val="0"/>
+            <a:satOff val="0"/>
+            <a:lumOff val="0"/>
+            <a:alphaOff val="0"/>
+          </a:schemeClr>
+        </a:solidFill>
+        <a:ln w="12700" cap="flat" cmpd="sng" algn="ctr">
+          <a:solidFill>
+            <a:schemeClr val="accent1">
+              <a:alpha val="90000"/>
+              <a:tint val="40000"/>
+              <a:hueOff val="0"/>
+              <a:satOff val="0"/>
+              <a:lumOff val="0"/>
+              <a:alphaOff val="0"/>
+            </a:schemeClr>
+          </a:solidFill>
+          <a:prstDash val="solid"/>
+          <a:miter lim="800000"/>
+        </a:ln>
+        <a:effectLst/>
+      </dsp:spPr>
+      <dsp:style>
+        <a:lnRef idx="2">
+          <a:scrgbClr r="0" g="0" b="0"/>
+        </a:lnRef>
+        <a:fillRef idx="1">
+          <a:scrgbClr r="0" g="0" b="0"/>
+        </a:fillRef>
+        <a:effectRef idx="0">
+          <a:scrgbClr r="0" g="0" b="0"/>
+        </a:effectRef>
+        <a:fontRef idx="minor"/>
+      </dsp:style>
+      <dsp:txBody>
+        <a:bodyPr spcFirstLastPara="0" vert="horz" wrap="square" lIns="41910" tIns="41910" rIns="41910" bIns="41910" numCol="1" spcCol="1270" anchor="ctr" anchorCtr="0">
+          <a:noAutofit/>
+        </a:bodyPr>
+        <a:lstStyle/>
+        <a:p>
+          <a:pPr marL="0" lvl="0" indent="0" algn="ctr" defTabSz="1466850">
+            <a:lnSpc>
+              <a:spcPct val="90000"/>
+            </a:lnSpc>
+            <a:spcBef>
+              <a:spcPct val="0"/>
+            </a:spcBef>
+            <a:spcAft>
+              <a:spcPct val="35000"/>
+            </a:spcAft>
+            <a:buNone/>
+          </a:pPr>
+          <a:endParaRPr lang="en-US" sz="3300" kern="1200"/>
+        </a:p>
+      </dsp:txBody>
+      <dsp:txXfrm>
+        <a:off x="7193254" y="2183801"/>
+        <a:ext cx="400831" cy="548409"/>
+      </dsp:txXfrm>
+    </dsp:sp>
+    <dsp:sp modelId="{DF2C90DF-EECE-4155-9EC5-73C9A1B65950}">
+      <dsp:nvSpPr>
+        <dsp:cNvPr id="0" name=""/>
+        <dsp:cNvSpPr/>
+      </dsp:nvSpPr>
+      <dsp:spPr>
+        <a:xfrm>
+          <a:off x="7619857" y="3508861"/>
+          <a:ext cx="728783" cy="728783"/>
+        </a:xfrm>
+        <a:prstGeom prst="downArrow">
+          <a:avLst>
+            <a:gd name="adj1" fmla="val 55000"/>
+            <a:gd name="adj2" fmla="val 45000"/>
+          </a:avLst>
+        </a:prstGeom>
+        <a:solidFill>
+          <a:schemeClr val="accent1">
+            <a:alpha val="90000"/>
+            <a:tint val="40000"/>
+            <a:hueOff val="0"/>
+            <a:satOff val="0"/>
+            <a:lumOff val="0"/>
+            <a:alphaOff val="0"/>
+          </a:schemeClr>
+        </a:solidFill>
+        <a:ln w="12700" cap="flat" cmpd="sng" algn="ctr">
+          <a:solidFill>
+            <a:schemeClr val="accent1">
+              <a:alpha val="90000"/>
+              <a:tint val="40000"/>
+              <a:hueOff val="0"/>
+              <a:satOff val="0"/>
+              <a:lumOff val="0"/>
+              <a:alphaOff val="0"/>
+            </a:schemeClr>
+          </a:solidFill>
+          <a:prstDash val="solid"/>
+          <a:miter lim="800000"/>
+        </a:ln>
+        <a:effectLst/>
+      </dsp:spPr>
+      <dsp:style>
+        <a:lnRef idx="2">
+          <a:scrgbClr r="0" g="0" b="0"/>
+        </a:lnRef>
+        <a:fillRef idx="1">
+          <a:scrgbClr r="0" g="0" b="0"/>
+        </a:fillRef>
+        <a:effectRef idx="0">
+          <a:scrgbClr r="0" g="0" b="0"/>
+        </a:effectRef>
+        <a:fontRef idx="minor"/>
+      </dsp:style>
+      <dsp:txBody>
+        <a:bodyPr spcFirstLastPara="0" vert="horz" wrap="square" lIns="41910" tIns="41910" rIns="41910" bIns="41910" numCol="1" spcCol="1270" anchor="ctr" anchorCtr="0">
+          <a:noAutofit/>
+        </a:bodyPr>
+        <a:lstStyle/>
+        <a:p>
+          <a:pPr marL="0" lvl="0" indent="0" algn="ctr" defTabSz="1466850">
+            <a:lnSpc>
+              <a:spcPct val="90000"/>
+            </a:lnSpc>
+            <a:spcBef>
+              <a:spcPct val="0"/>
+            </a:spcBef>
+            <a:spcAft>
+              <a:spcPct val="35000"/>
+            </a:spcAft>
+            <a:buNone/>
+          </a:pPr>
+          <a:endParaRPr lang="en-US" sz="3300" kern="1200"/>
+        </a:p>
+      </dsp:txBody>
+      <dsp:txXfrm>
+        <a:off x="7783833" y="3508861"/>
+        <a:ext cx="400831" cy="548409"/>
+      </dsp:txXfrm>
+    </dsp:sp>
+  </dsp:spTree>
+</dsp:drawing>
+</file>
+
+<file path=ppt/diagrams/drawing2.xml><?xml version="1.0" encoding="utf-8"?>
 <dsp:drawing xmlns:dgm="http://schemas.openxmlformats.org/drawingml/2006/diagram" xmlns:dsp="http://schemas.microsoft.com/office/drawing/2008/diagram" xmlns:a="http://schemas.openxmlformats.org/drawingml/2006/main">
   <dsp:spTree>
     <dsp:nvGrpSpPr>
@@ -1485,6 +3107,1232 @@
 </file>
 
 <file path=ppt/diagrams/layout1.xml><?xml version="1.0" encoding="utf-8"?>
+<dgm:layoutDef xmlns:dgm="http://schemas.openxmlformats.org/drawingml/2006/diagram" xmlns:a="http://schemas.openxmlformats.org/drawingml/2006/main" uniqueId="urn:microsoft.com/office/officeart/2005/8/layout/vProcess5">
+  <dgm:title val=""/>
+  <dgm:desc val=""/>
+  <dgm:catLst>
+    <dgm:cat type="process" pri="14000"/>
+  </dgm:catLst>
+  <dgm:sampData>
+    <dgm:dataModel>
+      <dgm:ptLst>
+        <dgm:pt modelId="0" type="doc"/>
+        <dgm:pt modelId="1">
+          <dgm:prSet phldr="1"/>
+        </dgm:pt>
+        <dgm:pt modelId="2">
+          <dgm:prSet phldr="1"/>
+        </dgm:pt>
+        <dgm:pt modelId="3">
+          <dgm:prSet phldr="1"/>
+        </dgm:pt>
+      </dgm:ptLst>
+      <dgm:cxnLst>
+        <dgm:cxn modelId="5" srcId="0" destId="1" srcOrd="0" destOrd="0"/>
+        <dgm:cxn modelId="6" srcId="0" destId="2" srcOrd="1" destOrd="0"/>
+        <dgm:cxn modelId="7" srcId="0" destId="3" srcOrd="2" destOrd="0"/>
+      </dgm:cxnLst>
+      <dgm:bg/>
+      <dgm:whole/>
+    </dgm:dataModel>
+  </dgm:sampData>
+  <dgm:styleData>
+    <dgm:dataModel>
+      <dgm:ptLst>
+        <dgm:pt modelId="0" type="doc"/>
+        <dgm:pt modelId="1"/>
+        <dgm:pt modelId="2"/>
+      </dgm:ptLst>
+      <dgm:cxnLst>
+        <dgm:cxn modelId="3" srcId="0" destId="1" srcOrd="0" destOrd="0"/>
+        <dgm:cxn modelId="4" srcId="0" destId="2" srcOrd="1" destOrd="0"/>
+      </dgm:cxnLst>
+      <dgm:bg/>
+      <dgm:whole/>
+    </dgm:dataModel>
+  </dgm:styleData>
+  <dgm:clrData>
+    <dgm:dataModel>
+      <dgm:ptLst>
+        <dgm:pt modelId="0" type="doc"/>
+        <dgm:pt modelId="1"/>
+        <dgm:pt modelId="2"/>
+        <dgm:pt modelId="3"/>
+        <dgm:pt modelId="4"/>
+      </dgm:ptLst>
+      <dgm:cxnLst>
+        <dgm:cxn modelId="6" srcId="0" destId="1" srcOrd="0" destOrd="0"/>
+        <dgm:cxn modelId="7" srcId="0" destId="2" srcOrd="1" destOrd="0"/>
+        <dgm:cxn modelId="8" srcId="0" destId="3" srcOrd="2" destOrd="0"/>
+        <dgm:cxn modelId="9" srcId="0" destId="4" srcOrd="3" destOrd="0"/>
+      </dgm:cxnLst>
+      <dgm:bg/>
+      <dgm:whole/>
+    </dgm:dataModel>
+  </dgm:clrData>
+  <dgm:layoutNode name="outerComposite">
+    <dgm:varLst>
+      <dgm:chMax val="5"/>
+      <dgm:dir/>
+      <dgm:resizeHandles val="exact"/>
+    </dgm:varLst>
+    <dgm:alg type="composite"/>
+    <dgm:shape xmlns:r="http://schemas.openxmlformats.org/officeDocument/2006/relationships" r:blip="">
+      <dgm:adjLst/>
+    </dgm:shape>
+    <dgm:presOf/>
+    <dgm:choose name="Name0">
+      <dgm:if name="Name1" func="var" arg="dir" op="equ" val="norm">
+        <dgm:constrLst>
+          <dgm:constr type="primFontSz" for="ch" ptType="node" op="equ" val="65"/>
+          <dgm:constr type="w" for="ch" forName="dummyMaxCanvas" refType="w"/>
+          <dgm:constr type="h" for="ch" forName="dummyMaxCanvas" refType="h"/>
+          <dgm:constr type="w" for="ch" forName="OneNode_1" refType="w"/>
+          <dgm:constr type="h" for="ch" forName="OneNode_1" refType="h" fact="0.5"/>
+          <dgm:constr type="ctrY" for="ch" forName="OneNode_1" refType="h" fact="0.5"/>
+          <dgm:constr type="w" for="ch" forName="TwoNodes_1" refType="w" fact="0.85"/>
+          <dgm:constr type="h" for="ch" forName="TwoNodes_1" refType="h" fact="0.45"/>
+          <dgm:constr type="t" for="ch" forName="TwoNodes_1"/>
+          <dgm:constr type="l" for="ch" forName="TwoNodes_1"/>
+          <dgm:constr type="w" for="ch" forName="TwoNodes_2" refType="w" fact="0.85"/>
+          <dgm:constr type="h" for="ch" forName="TwoNodes_2" refType="h" fact="0.45"/>
+          <dgm:constr type="b" for="ch" forName="TwoNodes_2" refType="h"/>
+          <dgm:constr type="r" for="ch" forName="TwoNodes_2" refType="w"/>
+          <dgm:constr type="w" for="ch" forName="TwoConn_1-2" refType="h" refFor="ch" refForName="TwoNodes_1" fact="0.65"/>
+          <dgm:constr type="h" for="ch" forName="TwoConn_1-2" refType="h" refFor="ch" refForName="TwoNodes_1" fact="0.65"/>
+          <dgm:constr type="ctrY" for="ch" forName="TwoConn_1-2" refType="h" fact="0.5"/>
+          <dgm:constr type="r" for="ch" forName="TwoConn_1-2" refType="r" refFor="ch" refForName="TwoNodes_1"/>
+          <dgm:constr type="r" for="ch" forName="TwoNodes_1_text" refType="l" refFor="ch" refForName="TwoConn_1-2"/>
+          <dgm:constr type="rOff" for="ch" forName="TwoNodes_1_text" refType="w" refFor="ch" refForName="TwoConn_1-2" fact="-0.5"/>
+          <dgm:constr type="t" for="ch" forName="TwoNodes_1_text" refType="t" refFor="ch" refForName="TwoNodes_1"/>
+          <dgm:constr type="b" for="ch" forName="TwoNodes_1_text" refType="b" refFor="ch" refForName="TwoNodes_1"/>
+          <dgm:constr type="l" for="ch" forName="TwoNodes_1_text" refType="l" refFor="ch" refForName="TwoNodes_1"/>
+          <dgm:constr type="r" for="ch" forName="TwoNodes_2_text" refType="l" refFor="ch" refForName="TwoConn_1-2"/>
+          <dgm:constr type="t" for="ch" forName="TwoNodes_2_text" refType="t" refFor="ch" refForName="TwoNodes_2"/>
+          <dgm:constr type="b" for="ch" forName="TwoNodes_2_text" refType="b" refFor="ch" refForName="TwoNodes_2"/>
+          <dgm:constr type="l" for="ch" forName="TwoNodes_2_text" refType="l" refFor="ch" refForName="TwoNodes_2"/>
+          <dgm:constr type="w" for="ch" forName="ThreeNodes_1" refType="w" fact="0.85"/>
+          <dgm:constr type="h" for="ch" forName="ThreeNodes_1" refType="h" fact="0.3"/>
+          <dgm:constr type="t" for="ch" forName="ThreeNodes_1"/>
+          <dgm:constr type="l" for="ch" forName="ThreeNodes_1"/>
+          <dgm:constr type="w" for="ch" forName="ThreeNodes_2" refType="w" fact="0.85"/>
+          <dgm:constr type="h" for="ch" forName="ThreeNodes_2" refType="h" fact="0.3"/>
+          <dgm:constr type="ctrY" for="ch" forName="ThreeNodes_2" refType="h" fact="0.5"/>
+          <dgm:constr type="ctrX" for="ch" forName="ThreeNodes_2" refType="w" fact="0.5"/>
+          <dgm:constr type="w" for="ch" forName="ThreeNodes_3" refType="w" fact="0.85"/>
+          <dgm:constr type="h" for="ch" forName="ThreeNodes_3" refType="h" fact="0.3"/>
+          <dgm:constr type="b" for="ch" forName="ThreeNodes_3" refType="h"/>
+          <dgm:constr type="r" for="ch" forName="ThreeNodes_3" refType="w"/>
+          <dgm:constr type="w" for="ch" forName="ThreeConn_1-2" refType="h" refFor="ch" refForName="ThreeNodes_1" fact="0.65"/>
+          <dgm:constr type="h" for="ch" forName="ThreeConn_1-2" refType="h" refFor="ch" refForName="ThreeNodes_1" fact="0.65"/>
+          <dgm:constr type="ctrY" for="ch" forName="ThreeConn_1-2" refType="h" fact="0.325"/>
+          <dgm:constr type="r" for="ch" forName="ThreeConn_1-2" refType="r" refFor="ch" refForName="ThreeNodes_1"/>
+          <dgm:constr type="w" for="ch" forName="ThreeConn_2-3" refType="h" refFor="ch" refForName="ThreeNodes_2" fact="0.65"/>
+          <dgm:constr type="h" for="ch" forName="ThreeConn_2-3" refType="h" refFor="ch" refForName="ThreeNodes_2" fact="0.65"/>
+          <dgm:constr type="ctrY" for="ch" forName="ThreeConn_2-3" refType="h" fact="0.673"/>
+          <dgm:constr type="r" for="ch" forName="ThreeConn_2-3" refType="r" refFor="ch" refForName="ThreeNodes_2"/>
+          <dgm:constr type="r" for="ch" forName="ThreeNodes_1_text" refType="l" refFor="ch" refForName="ThreeConn_1-2"/>
+          <dgm:constr type="rOff" for="ch" forName="ThreeNodes_1_text" refType="w" refFor="ch" refForName="ThreeConn_1-2" fact="-0.57"/>
+          <dgm:constr type="t" for="ch" forName="ThreeNodes_1_text" refType="t" refFor="ch" refForName="ThreeNodes_1"/>
+          <dgm:constr type="b" for="ch" forName="ThreeNodes_1_text" refType="b" refFor="ch" refForName="ThreeNodes_1"/>
+          <dgm:constr type="l" for="ch" forName="ThreeNodes_1_text" refType="l" refFor="ch" refForName="ThreeNodes_1"/>
+          <dgm:constr type="r" for="ch" forName="ThreeNodes_2_text" refType="l" refFor="ch" refForName="ThreeConn_1-2"/>
+          <dgm:constr type="t" for="ch" forName="ThreeNodes_2_text" refType="t" refFor="ch" refForName="ThreeNodes_2"/>
+          <dgm:constr type="b" for="ch" forName="ThreeNodes_2_text" refType="b" refFor="ch" refForName="ThreeNodes_2"/>
+          <dgm:constr type="l" for="ch" forName="ThreeNodes_2_text" refType="l" refFor="ch" refForName="ThreeNodes_2"/>
+          <dgm:constr type="r" for="ch" forName="ThreeNodes_3_text" refType="l" refFor="ch" refForName="ThreeConn_2-3"/>
+          <dgm:constr type="t" for="ch" forName="ThreeNodes_3_text" refType="t" refFor="ch" refForName="ThreeNodes_3"/>
+          <dgm:constr type="b" for="ch" forName="ThreeNodes_3_text" refType="b" refFor="ch" refForName="ThreeNodes_3"/>
+          <dgm:constr type="l" for="ch" forName="ThreeNodes_3_text" refType="l" refFor="ch" refForName="ThreeNodes_3"/>
+          <dgm:constr type="w" for="ch" forName="FourNodes_1" refType="w" fact="0.8"/>
+          <dgm:constr type="h" for="ch" forName="FourNodes_1" refType="h" fact="0.22"/>
+          <dgm:constr type="t" for="ch" forName="FourNodes_1"/>
+          <dgm:constr type="l" for="ch" forName="FourNodes_1"/>
+          <dgm:constr type="w" for="ch" forName="FourNodes_2" refType="w" fact="0.8"/>
+          <dgm:constr type="h" for="ch" forName="FourNodes_2" refType="h" fact="0.22"/>
+          <dgm:constr type="ctrY" for="ch" forName="FourNodes_2" refType="h" fact="0.37"/>
+          <dgm:constr type="ctrX" for="ch" forName="FourNodes_2" refType="w" fact="0.467"/>
+          <dgm:constr type="w" for="ch" forName="FourNodes_3" refType="w" fact="0.8"/>
+          <dgm:constr type="h" for="ch" forName="FourNodes_3" refType="h" fact="0.22"/>
+          <dgm:constr type="ctrY" for="ch" forName="FourNodes_3" refType="h" fact="0.63"/>
+          <dgm:constr type="ctrX" for="ch" forName="FourNodes_3" refType="w" fact="0.533"/>
+          <dgm:constr type="w" for="ch" forName="FourNodes_4" refType="w" fact="0.8"/>
+          <dgm:constr type="h" for="ch" forName="FourNodes_4" refType="h" fact="0.22"/>
+          <dgm:constr type="b" for="ch" forName="FourNodes_4" refType="h"/>
+          <dgm:constr type="r" for="ch" forName="FourNodes_4" refType="w"/>
+          <dgm:constr type="w" for="ch" forName="FourConn_1-2" refType="h" refFor="ch" refForName="FourNodes_1" fact="0.65"/>
+          <dgm:constr type="h" for="ch" forName="FourConn_1-2" refType="h" refFor="ch" refForName="FourNodes_1" fact="0.65"/>
+          <dgm:constr type="ctrY" for="ch" forName="FourConn_1-2" refType="h" fact="0.24"/>
+          <dgm:constr type="r" for="ch" forName="FourConn_1-2" refType="r" refFor="ch" refForName="FourNodes_1"/>
+          <dgm:constr type="w" for="ch" forName="FourConn_2-3" refType="h" refFor="ch" refForName="FourNodes_2" fact="0.65"/>
+          <dgm:constr type="h" for="ch" forName="FourConn_2-3" refType="h" refFor="ch" refForName="FourNodes_2" fact="0.65"/>
+          <dgm:constr type="ctrY" for="ch" forName="FourConn_2-3" refType="h" fact="0.5"/>
+          <dgm:constr type="r" for="ch" forName="FourConn_2-3" refType="r" refFor="ch" refForName="FourNodes_2"/>
+          <dgm:constr type="w" for="ch" forName="FourConn_3-4" refType="h" refFor="ch" refForName="FourNodes_3" fact="0.65"/>
+          <dgm:constr type="h" for="ch" forName="FourConn_3-4" refType="h" refFor="ch" refForName="FourNodes_3" fact="0.65"/>
+          <dgm:constr type="ctrY" for="ch" forName="FourConn_3-4" refType="h" fact="0.76"/>
+          <dgm:constr type="r" for="ch" forName="FourConn_3-4" refType="r" refFor="ch" refForName="FourNodes_3"/>
+          <dgm:constr type="r" for="ch" forName="FourNodes_1_text" refType="l" refFor="ch" refForName="FourConn_1-2"/>
+          <dgm:constr type="rOff" for="ch" forName="FourNodes_1_text" refType="w" refFor="ch" refForName="FourConn_1-2" fact="-0.7"/>
+          <dgm:constr type="t" for="ch" forName="FourNodes_1_text" refType="t" refFor="ch" refForName="FourNodes_1"/>
+          <dgm:constr type="b" for="ch" forName="FourNodes_1_text" refType="b" refFor="ch" refForName="FourNodes_1"/>
+          <dgm:constr type="l" for="ch" forName="FourNodes_1_text" refType="l" refFor="ch" refForName="FourNodes_1"/>
+          <dgm:constr type="r" for="ch" forName="FourNodes_2_text" refType="l" refFor="ch" refForName="FourConn_1-2"/>
+          <dgm:constr type="t" for="ch" forName="FourNodes_2_text" refType="t" refFor="ch" refForName="FourNodes_2"/>
+          <dgm:constr type="b" for="ch" forName="FourNodes_2_text" refType="b" refFor="ch" refForName="FourNodes_2"/>
+          <dgm:constr type="l" for="ch" forName="FourNodes_2_text" refType="l" refFor="ch" refForName="FourNodes_2"/>
+          <dgm:constr type="r" for="ch" forName="FourNodes_3_text" refType="l" refFor="ch" refForName="FourConn_2-3"/>
+          <dgm:constr type="t" for="ch" forName="FourNodes_3_text" refType="t" refFor="ch" refForName="FourNodes_3"/>
+          <dgm:constr type="b" for="ch" forName="FourNodes_3_text" refType="b" refFor="ch" refForName="FourNodes_3"/>
+          <dgm:constr type="l" for="ch" forName="FourNodes_3_text" refType="l" refFor="ch" refForName="FourNodes_3"/>
+          <dgm:constr type="r" for="ch" forName="FourNodes_4_text" refType="l" refFor="ch" refForName="FourConn_3-4"/>
+          <dgm:constr type="t" for="ch" forName="FourNodes_4_text" refType="t" refFor="ch" refForName="FourNodes_4"/>
+          <dgm:constr type="b" for="ch" forName="FourNodes_4_text" refType="b" refFor="ch" refForName="FourNodes_4"/>
+          <dgm:constr type="l" for="ch" forName="FourNodes_4_text" refType="l" refFor="ch" refForName="FourNodes_4"/>
+          <dgm:constr type="w" for="ch" forName="FiveNodes_1" refType="w" fact="0.77"/>
+          <dgm:constr type="h" for="ch" forName="FiveNodes_1" refType="h" fact="0.18"/>
+          <dgm:constr type="t" for="ch" forName="FiveNodes_1"/>
+          <dgm:constr type="l" for="ch" forName="FiveNodes_1"/>
+          <dgm:constr type="w" for="ch" forName="FiveNodes_2" refType="w" fact="0.77"/>
+          <dgm:constr type="h" for="ch" forName="FiveNodes_2" refType="h" fact="0.18"/>
+          <dgm:constr type="ctrY" for="ch" forName="FiveNodes_2" refType="h" fact="0.295"/>
+          <dgm:constr type="ctrX" for="ch" forName="FiveNodes_2" refType="w" fact="0.4425"/>
+          <dgm:constr type="w" for="ch" forName="FiveNodes_3" refType="w" fact="0.77"/>
+          <dgm:constr type="h" for="ch" forName="FiveNodes_3" refType="h" fact="0.18"/>
+          <dgm:constr type="ctrY" for="ch" forName="FiveNodes_3" refType="h" fact="0.5"/>
+          <dgm:constr type="ctrX" for="ch" forName="FiveNodes_3" refType="w" fact="0.5"/>
+          <dgm:constr type="w" for="ch" forName="FiveNodes_4" refType="w" fact="0.77"/>
+          <dgm:constr type="h" for="ch" forName="FiveNodes_4" refType="h" fact="0.18"/>
+          <dgm:constr type="ctrY" for="ch" forName="FiveNodes_4" refType="h" fact="0.705"/>
+          <dgm:constr type="ctrX" for="ch" forName="FiveNodes_4" refType="w" fact="0.5575"/>
+          <dgm:constr type="w" for="ch" forName="FiveNodes_5" refType="w" fact="0.77"/>
+          <dgm:constr type="h" for="ch" forName="FiveNodes_5" refType="h" fact="0.18"/>
+          <dgm:constr type="b" for="ch" forName="FiveNodes_5" refType="h"/>
+          <dgm:constr type="r" for="ch" forName="FiveNodes_5" refType="w"/>
+          <dgm:constr type="w" for="ch" forName="FiveConn_1-2" refType="h" refFor="ch" refForName="FiveNodes_1" fact="0.65"/>
+          <dgm:constr type="h" for="ch" forName="FiveConn_1-2" refType="h" refFor="ch" refForName="FiveNodes_1" fact="0.65"/>
+          <dgm:constr type="ctrY" for="ch" forName="FiveConn_1-2" refType="h" fact="0.19"/>
+          <dgm:constr type="r" for="ch" forName="FiveConn_1-2" refType="r" refFor="ch" refForName="FiveNodes_1"/>
+          <dgm:constr type="w" for="ch" forName="FiveConn_2-3" refType="h" refFor="ch" refForName="FiveNodes_2" fact="0.65"/>
+          <dgm:constr type="h" for="ch" forName="FiveConn_2-3" refType="h" refFor="ch" refForName="FiveNodes_2" fact="0.65"/>
+          <dgm:constr type="ctrY" for="ch" forName="FiveConn_2-3" refType="h" fact="0.395"/>
+          <dgm:constr type="r" for="ch" forName="FiveConn_2-3" refType="r" refFor="ch" refForName="FiveNodes_2"/>
+          <dgm:constr type="w" for="ch" forName="FiveConn_3-4" refType="h" refFor="ch" refForName="FiveNodes_3" fact="0.65"/>
+          <dgm:constr type="h" for="ch" forName="FiveConn_3-4" refType="h" refFor="ch" refForName="FiveNodes_3" fact="0.65"/>
+          <dgm:constr type="ctrY" for="ch" forName="FiveConn_3-4" refType="h" fact="0.597"/>
+          <dgm:constr type="r" for="ch" forName="FiveConn_3-4" refType="r" refFor="ch" refForName="FiveNodes_3"/>
+          <dgm:constr type="w" for="ch" forName="FiveConn_4-5" refType="h" refFor="ch" refForName="FiveNodes_4" fact="0.65"/>
+          <dgm:constr type="h" for="ch" forName="FiveConn_4-5" refType="h" refFor="ch" refForName="FiveNodes_4" fact="0.65"/>
+          <dgm:constr type="ctrY" for="ch" forName="FiveConn_4-5" refType="h" fact="0.804"/>
+          <dgm:constr type="r" for="ch" forName="FiveConn_4-5" refType="r" refFor="ch" refForName="FiveNodes_4"/>
+          <dgm:constr type="r" for="ch" forName="FiveNodes_1_text" refType="l" refFor="ch" refForName="FiveConn_1-2"/>
+          <dgm:constr type="rOff" for="ch" forName="FiveNodes_1_text" refType="w" refFor="ch" refForName="FiveConn_1-2" fact="-0.75"/>
+          <dgm:constr type="t" for="ch" forName="FiveNodes_1_text" refType="t" refFor="ch" refForName="FiveNodes_1"/>
+          <dgm:constr type="b" for="ch" forName="FiveNodes_1_text" refType="b" refFor="ch" refForName="FiveNodes_1"/>
+          <dgm:constr type="l" for="ch" forName="FiveNodes_1_text" refType="l" refFor="ch" refForName="FiveNodes_1"/>
+          <dgm:constr type="r" for="ch" forName="FiveNodes_2_text" refType="l" refFor="ch" refForName="FiveConn_1-2"/>
+          <dgm:constr type="t" for="ch" forName="FiveNodes_2_text" refType="t" refFor="ch" refForName="FiveNodes_2"/>
+          <dgm:constr type="b" for="ch" forName="FiveNodes_2_text" refType="b" refFor="ch" refForName="FiveNodes_2"/>
+          <dgm:constr type="l" for="ch" forName="FiveNodes_2_text" refType="l" refFor="ch" refForName="FiveNodes_2"/>
+          <dgm:constr type="r" for="ch" forName="FiveNodes_3_text" refType="l" refFor="ch" refForName="FiveConn_2-3"/>
+          <dgm:constr type="t" for="ch" forName="FiveNodes_3_text" refType="t" refFor="ch" refForName="FiveNodes_3"/>
+          <dgm:constr type="b" for="ch" forName="FiveNodes_3_text" refType="b" refFor="ch" refForName="FiveNodes_3"/>
+          <dgm:constr type="l" for="ch" forName="FiveNodes_3_text" refType="l" refFor="ch" refForName="FiveNodes_3"/>
+          <dgm:constr type="r" for="ch" forName="FiveNodes_4_text" refType="l" refFor="ch" refForName="FiveConn_3-4"/>
+          <dgm:constr type="t" for="ch" forName="FiveNodes_4_text" refType="t" refFor="ch" refForName="FiveNodes_4"/>
+          <dgm:constr type="b" for="ch" forName="FiveNodes_4_text" refType="b" refFor="ch" refForName="FiveNodes_4"/>
+          <dgm:constr type="l" for="ch" forName="FiveNodes_4_text" refType="l" refFor="ch" refForName="FiveNodes_4"/>
+          <dgm:constr type="r" for="ch" forName="FiveNodes_5_text" refType="l" refFor="ch" refForName="FiveConn_4-5"/>
+          <dgm:constr type="t" for="ch" forName="FiveNodes_5_text" refType="t" refFor="ch" refForName="FiveNodes_5"/>
+          <dgm:constr type="b" for="ch" forName="FiveNodes_5_text" refType="b" refFor="ch" refForName="FiveNodes_5"/>
+          <dgm:constr type="l" for="ch" forName="FiveNodes_5_text" refType="l" refFor="ch" refForName="FiveNodes_5"/>
+        </dgm:constrLst>
+      </dgm:if>
+      <dgm:else name="Name2">
+        <dgm:constrLst>
+          <dgm:constr type="primFontSz" for="ch" ptType="node" op="equ" val="65"/>
+          <dgm:constr type="w" for="ch" forName="dummyMaxCanvas" refType="w"/>
+          <dgm:constr type="h" for="ch" forName="dummyMaxCanvas" refType="h"/>
+          <dgm:constr type="w" for="ch" forName="OneNode_1" refType="w"/>
+          <dgm:constr type="h" for="ch" forName="OneNode_1" refType="h" fact="0.5"/>
+          <dgm:constr type="ctrY" for="ch" forName="OneNode_1" refType="h" fact="0.5"/>
+          <dgm:constr type="w" for="ch" forName="TwoNodes_1" refType="w" fact="0.85"/>
+          <dgm:constr type="h" for="ch" forName="TwoNodes_1" refType="h" fact="0.45"/>
+          <dgm:constr type="t" for="ch" forName="TwoNodes_1"/>
+          <dgm:constr type="r" for="ch" forName="TwoNodes_1" refType="w"/>
+          <dgm:constr type="w" for="ch" forName="TwoNodes_2" refType="w" fact="0.85"/>
+          <dgm:constr type="h" for="ch" forName="TwoNodes_2" refType="h" fact="0.45"/>
+          <dgm:constr type="b" for="ch" forName="TwoNodes_2" refType="h"/>
+          <dgm:constr type="l" for="ch" forName="TwoNodes_2"/>
+          <dgm:constr type="w" for="ch" forName="TwoConn_1-2" refType="h" refFor="ch" refForName="TwoNodes_1" fact="0.65"/>
+          <dgm:constr type="h" for="ch" forName="TwoConn_1-2" refType="h" refFor="ch" refForName="TwoNodes_1" fact="0.65"/>
+          <dgm:constr type="ctrY" for="ch" forName="TwoConn_1-2" refType="h" fact="0.5"/>
+          <dgm:constr type="l" for="ch" forName="TwoConn_1-2" refType="l" refFor="ch" refForName="TwoNodes_1"/>
+          <dgm:constr type="l" for="ch" forName="TwoNodes_1_text" refType="r" refFor="ch" refForName="TwoConn_1-2"/>
+          <dgm:constr type="lOff" for="ch" forName="TwoNodes_1_text" refType="w" refFor="ch" refForName="TwoConn_1-2" fact="0.5"/>
+          <dgm:constr type="t" for="ch" forName="TwoNodes_1_text" refType="t" refFor="ch" refForName="TwoNodes_1"/>
+          <dgm:constr type="b" for="ch" forName="TwoNodes_1_text" refType="b" refFor="ch" refForName="TwoNodes_1"/>
+          <dgm:constr type="r" for="ch" forName="TwoNodes_1_text" refType="r" refFor="ch" refForName="TwoNodes_1"/>
+          <dgm:constr type="l" for="ch" forName="TwoNodes_2_text" refType="r" refFor="ch" refForName="TwoConn_1-2"/>
+          <dgm:constr type="t" for="ch" forName="TwoNodes_2_text" refType="t" refFor="ch" refForName="TwoNodes_2"/>
+          <dgm:constr type="b" for="ch" forName="TwoNodes_2_text" refType="b" refFor="ch" refForName="TwoNodes_2"/>
+          <dgm:constr type="r" for="ch" forName="TwoNodes_2_text" refType="r" refFor="ch" refForName="TwoNodes_2"/>
+          <dgm:constr type="w" for="ch" forName="ThreeNodes_1" refType="w" fact="0.85"/>
+          <dgm:constr type="h" for="ch" forName="ThreeNodes_1" refType="h" fact="0.3"/>
+          <dgm:constr type="t" for="ch" forName="ThreeNodes_1"/>
+          <dgm:constr type="r" for="ch" forName="ThreeNodes_1" refType="w"/>
+          <dgm:constr type="w" for="ch" forName="ThreeNodes_2" refType="w" fact="0.85"/>
+          <dgm:constr type="h" for="ch" forName="ThreeNodes_2" refType="h" fact="0.3"/>
+          <dgm:constr type="ctrY" for="ch" forName="ThreeNodes_2" refType="h" fact="0.5"/>
+          <dgm:constr type="ctrX" for="ch" forName="ThreeNodes_2" refType="w" fact="0.5"/>
+          <dgm:constr type="w" for="ch" forName="ThreeNodes_3" refType="w" fact="0.85"/>
+          <dgm:constr type="h" for="ch" forName="ThreeNodes_3" refType="h" fact="0.3"/>
+          <dgm:constr type="b" for="ch" forName="ThreeNodes_3" refType="h"/>
+          <dgm:constr type="l" for="ch" forName="ThreeNodes_3"/>
+          <dgm:constr type="w" for="ch" forName="ThreeConn_1-2" refType="h" refFor="ch" refForName="ThreeNodes_1" fact="0.65"/>
+          <dgm:constr type="h" for="ch" forName="ThreeConn_1-2" refType="h" refFor="ch" refForName="ThreeNodes_1" fact="0.65"/>
+          <dgm:constr type="ctrY" for="ch" forName="ThreeConn_1-2" refType="h" fact="0.325"/>
+          <dgm:constr type="l" for="ch" forName="ThreeConn_1-2" refType="l" refFor="ch" refForName="ThreeNodes_1"/>
+          <dgm:constr type="w" for="ch" forName="ThreeConn_2-3" refType="h" refFor="ch" refForName="ThreeNodes_2" fact="0.65"/>
+          <dgm:constr type="h" for="ch" forName="ThreeConn_2-3" refType="h" refFor="ch" refForName="ThreeNodes_2" fact="0.65"/>
+          <dgm:constr type="ctrY" for="ch" forName="ThreeConn_2-3" refType="h" fact="0.673"/>
+          <dgm:constr type="l" for="ch" forName="ThreeConn_2-3" refType="l" refFor="ch" refForName="ThreeNodes_2"/>
+          <dgm:constr type="l" for="ch" forName="ThreeNodes_1_text" refType="r" refFor="ch" refForName="ThreeConn_1-2"/>
+          <dgm:constr type="lOff" for="ch" forName="ThreeNodes_1_text" refType="w" refFor="ch" refForName="ThreeConn_1-2" fact="0.55"/>
+          <dgm:constr type="t" for="ch" forName="ThreeNodes_1_text" refType="t" refFor="ch" refForName="ThreeNodes_1"/>
+          <dgm:constr type="b" for="ch" forName="ThreeNodes_1_text" refType="b" refFor="ch" refForName="ThreeNodes_1"/>
+          <dgm:constr type="r" for="ch" forName="ThreeNodes_1_text" refType="r" refFor="ch" refForName="ThreeNodes_1"/>
+          <dgm:constr type="l" for="ch" forName="ThreeNodes_2_text" refType="r" refFor="ch" refForName="ThreeConn_1-2"/>
+          <dgm:constr type="t" for="ch" forName="ThreeNodes_2_text" refType="t" refFor="ch" refForName="ThreeNodes_2"/>
+          <dgm:constr type="b" for="ch" forName="ThreeNodes_2_text" refType="b" refFor="ch" refForName="ThreeNodes_2"/>
+          <dgm:constr type="r" for="ch" forName="ThreeNodes_2_text" refType="r" refFor="ch" refForName="ThreeNodes_2"/>
+          <dgm:constr type="l" for="ch" forName="ThreeNodes_3_text" refType="r" refFor="ch" refForName="ThreeConn_2-3"/>
+          <dgm:constr type="t" for="ch" forName="ThreeNodes_3_text" refType="t" refFor="ch" refForName="ThreeNodes_3"/>
+          <dgm:constr type="b" for="ch" forName="ThreeNodes_3_text" refType="b" refFor="ch" refForName="ThreeNodes_3"/>
+          <dgm:constr type="r" for="ch" forName="ThreeNodes_3_text" refType="r" refFor="ch" refForName="ThreeNodes_3"/>
+          <dgm:constr type="w" for="ch" forName="FourNodes_1" refType="w" fact="0.8"/>
+          <dgm:constr type="h" for="ch" forName="FourNodes_1" refType="h" fact="0.22"/>
+          <dgm:constr type="t" for="ch" forName="FourNodes_1"/>
+          <dgm:constr type="r" for="ch" forName="FourNodes_1" refType="w"/>
+          <dgm:constr type="w" for="ch" forName="FourNodes_2" refType="w" fact="0.8"/>
+          <dgm:constr type="h" for="ch" forName="FourNodes_2" refType="h" fact="0.22"/>
+          <dgm:constr type="ctrY" for="ch" forName="FourNodes_2" refType="h" fact="0.37"/>
+          <dgm:constr type="ctrX" for="ch" forName="FourNodes_2" refType="w" fact="0.533"/>
+          <dgm:constr type="w" for="ch" forName="FourNodes_3" refType="w" fact="0.8"/>
+          <dgm:constr type="h" for="ch" forName="FourNodes_3" refType="h" fact="0.22"/>
+          <dgm:constr type="ctrY" for="ch" forName="FourNodes_3" refType="h" fact="0.63"/>
+          <dgm:constr type="ctrX" for="ch" forName="FourNodes_3" refType="w" fact="0.467"/>
+          <dgm:constr type="w" for="ch" forName="FourNodes_4" refType="w" fact="0.8"/>
+          <dgm:constr type="h" for="ch" forName="FourNodes_4" refType="h" fact="0.22"/>
+          <dgm:constr type="b" for="ch" forName="FourNodes_4" refType="h"/>
+          <dgm:constr type="l" for="ch" forName="FourNodes_4"/>
+          <dgm:constr type="w" for="ch" forName="FourConn_1-2" refType="h" refFor="ch" refForName="FourNodes_1" fact="0.65"/>
+          <dgm:constr type="h" for="ch" forName="FourConn_1-2" refType="h" refFor="ch" refForName="FourNodes_1" fact="0.65"/>
+          <dgm:constr type="ctrY" for="ch" forName="FourConn_1-2" refType="h" fact="0.24"/>
+          <dgm:constr type="l" for="ch" forName="FourConn_1-2" refType="l" refFor="ch" refForName="FourNodes_1"/>
+          <dgm:constr type="w" for="ch" forName="FourConn_2-3" refType="h" refFor="ch" refForName="FourNodes_2" fact="0.65"/>
+          <dgm:constr type="h" for="ch" forName="FourConn_2-3" refType="h" refFor="ch" refForName="FourNodes_2" fact="0.65"/>
+          <dgm:constr type="ctrY" for="ch" forName="FourConn_2-3" refType="h" fact="0.5"/>
+          <dgm:constr type="l" for="ch" forName="FourConn_2-3" refType="l" refFor="ch" refForName="FourNodes_2"/>
+          <dgm:constr type="w" for="ch" forName="FourConn_3-4" refType="h" refFor="ch" refForName="FourNodes_3" fact="0.65"/>
+          <dgm:constr type="h" for="ch" forName="FourConn_3-4" refType="h" refFor="ch" refForName="FourNodes_3" fact="0.65"/>
+          <dgm:constr type="ctrY" for="ch" forName="FourConn_3-4" refType="h" fact="0.76"/>
+          <dgm:constr type="l" for="ch" forName="FourConn_3-4" refType="l" refFor="ch" refForName="FourNodes_3"/>
+          <dgm:constr type="l" for="ch" forName="FourNodes_1_text" refType="r" refFor="ch" refForName="FourConn_1-2"/>
+          <dgm:constr type="lOff" for="ch" forName="FourNodes_1_text" refType="w" refFor="ch" refForName="FourConn_1-2" fact="0.69"/>
+          <dgm:constr type="t" for="ch" forName="FourNodes_1_text" refType="t" refFor="ch" refForName="FourNodes_1"/>
+          <dgm:constr type="b" for="ch" forName="FourNodes_1_text" refType="b" refFor="ch" refForName="FourNodes_1"/>
+          <dgm:constr type="r" for="ch" forName="FourNodes_1_text" refType="r" refFor="ch" refForName="FourNodes_1"/>
+          <dgm:constr type="l" for="ch" forName="FourNodes_2_text" refType="r" refFor="ch" refForName="FourConn_1-2"/>
+          <dgm:constr type="t" for="ch" forName="FourNodes_2_text" refType="t" refFor="ch" refForName="FourNodes_2"/>
+          <dgm:constr type="b" for="ch" forName="FourNodes_2_text" refType="b" refFor="ch" refForName="FourNodes_2"/>
+          <dgm:constr type="r" for="ch" forName="FourNodes_2_text" refType="r" refFor="ch" refForName="FourNodes_2"/>
+          <dgm:constr type="l" for="ch" forName="FourNodes_3_text" refType="r" refFor="ch" refForName="FourConn_2-3"/>
+          <dgm:constr type="t" for="ch" forName="FourNodes_3_text" refType="t" refFor="ch" refForName="FourNodes_3"/>
+          <dgm:constr type="b" for="ch" forName="FourNodes_3_text" refType="b" refFor="ch" refForName="FourNodes_3"/>
+          <dgm:constr type="r" for="ch" forName="FourNodes_3_text" refType="r" refFor="ch" refForName="FourNodes_3"/>
+          <dgm:constr type="l" for="ch" forName="FourNodes_4_text" refType="r" refFor="ch" refForName="FourConn_3-4"/>
+          <dgm:constr type="t" for="ch" forName="FourNodes_4_text" refType="t" refFor="ch" refForName="FourNodes_4"/>
+          <dgm:constr type="b" for="ch" forName="FourNodes_4_text" refType="b" refFor="ch" refForName="FourNodes_4"/>
+          <dgm:constr type="r" for="ch" forName="FourNodes_4_text" refType="r" refFor="ch" refForName="FourNodes_4"/>
+          <dgm:constr type="w" for="ch" forName="FiveNodes_1" refType="w" fact="0.77"/>
+          <dgm:constr type="h" for="ch" forName="FiveNodes_1" refType="h" fact="0.18"/>
+          <dgm:constr type="t" for="ch" forName="FiveNodes_1"/>
+          <dgm:constr type="r" for="ch" forName="FiveNodes_1" refType="w"/>
+          <dgm:constr type="w" for="ch" forName="FiveNodes_2" refType="w" fact="0.77"/>
+          <dgm:constr type="h" for="ch" forName="FiveNodes_2" refType="h" fact="0.18"/>
+          <dgm:constr type="ctrY" for="ch" forName="FiveNodes_2" refType="h" fact="0.295"/>
+          <dgm:constr type="ctrX" for="ch" forName="FiveNodes_2" refType="w" fact="0.5575"/>
+          <dgm:constr type="w" for="ch" forName="FiveNodes_3" refType="w" fact="0.77"/>
+          <dgm:constr type="h" for="ch" forName="FiveNodes_3" refType="h" fact="0.18"/>
+          <dgm:constr type="ctrY" for="ch" forName="FiveNodes_3" refType="h" fact="0.5"/>
+          <dgm:constr type="ctrX" for="ch" forName="FiveNodes_3" refType="w" fact="0.5"/>
+          <dgm:constr type="w" for="ch" forName="FiveNodes_4" refType="w" fact="0.77"/>
+          <dgm:constr type="h" for="ch" forName="FiveNodes_4" refType="h" fact="0.18"/>
+          <dgm:constr type="ctrY" for="ch" forName="FiveNodes_4" refType="h" fact="0.705"/>
+          <dgm:constr type="ctrX" for="ch" forName="FiveNodes_4" refType="w" fact="0.4425"/>
+          <dgm:constr type="w" for="ch" forName="FiveNodes_5" refType="w" fact="0.77"/>
+          <dgm:constr type="h" for="ch" forName="FiveNodes_5" refType="h" fact="0.18"/>
+          <dgm:constr type="b" for="ch" forName="FiveNodes_5" refType="h"/>
+          <dgm:constr type="l" for="ch" forName="FiveNodes_5"/>
+          <dgm:constr type="w" for="ch" forName="FiveConn_1-2" refType="h" refFor="ch" refForName="FiveNodes_1" fact="0.65"/>
+          <dgm:constr type="h" for="ch" forName="FiveConn_1-2" refType="h" refFor="ch" refForName="FiveNodes_1" fact="0.65"/>
+          <dgm:constr type="ctrY" for="ch" forName="FiveConn_1-2" refType="h" fact="0.19"/>
+          <dgm:constr type="l" for="ch" forName="FiveConn_1-2" refType="l" refFor="ch" refForName="FiveNodes_1"/>
+          <dgm:constr type="w" for="ch" forName="FiveConn_2-3" refType="h" refFor="ch" refForName="FiveNodes_2" fact="0.65"/>
+          <dgm:constr type="h" for="ch" forName="FiveConn_2-3" refType="h" refFor="ch" refForName="FiveNodes_2" fact="0.65"/>
+          <dgm:constr type="ctrY" for="ch" forName="FiveConn_2-3" refType="h" fact="0.395"/>
+          <dgm:constr type="l" for="ch" forName="FiveConn_2-3" refType="l" refFor="ch" refForName="FiveNodes_2"/>
+          <dgm:constr type="w" for="ch" forName="FiveConn_3-4" refType="h" refFor="ch" refForName="FiveNodes_3" fact="0.65"/>
+          <dgm:constr type="h" for="ch" forName="FiveConn_3-4" refType="h" refFor="ch" refForName="FiveNodes_3" fact="0.65"/>
+          <dgm:constr type="ctrY" for="ch" forName="FiveConn_3-4" refType="h" fact="0.597"/>
+          <dgm:constr type="l" for="ch" forName="FiveConn_3-4" refType="l" refFor="ch" refForName="FiveNodes_3"/>
+          <dgm:constr type="w" for="ch" forName="FiveConn_4-5" refType="h" refFor="ch" refForName="FiveNodes_4" fact="0.65"/>
+          <dgm:constr type="h" for="ch" forName="FiveConn_4-5" refType="h" refFor="ch" refForName="FiveNodes_4" fact="0.65"/>
+          <dgm:constr type="ctrY" for="ch" forName="FiveConn_4-5" refType="h" fact="0.804"/>
+          <dgm:constr type="l" for="ch" forName="FiveConn_4-5" refType="l" refFor="ch" refForName="FiveNodes_4"/>
+          <dgm:constr type="l" for="ch" forName="FiveNodes_1_text" refType="r" refFor="ch" refForName="FiveConn_1-2"/>
+          <dgm:constr type="lOff" for="ch" forName="FiveNodes_1_text" refType="w" refFor="ch" refForName="FiveConn_1-2" fact="0.73"/>
+          <dgm:constr type="t" for="ch" forName="FiveNodes_1_text" refType="t" refFor="ch" refForName="FiveNodes_1"/>
+          <dgm:constr type="b" for="ch" forName="FiveNodes_1_text" refType="b" refFor="ch" refForName="FiveNodes_1"/>
+          <dgm:constr type="r" for="ch" forName="FiveNodes_1_text" refType="r" refFor="ch" refForName="FiveNodes_1"/>
+          <dgm:constr type="l" for="ch" forName="FiveNodes_2_text" refType="r" refFor="ch" refForName="FiveConn_1-2"/>
+          <dgm:constr type="t" for="ch" forName="FiveNodes_2_text" refType="t" refFor="ch" refForName="FiveNodes_2"/>
+          <dgm:constr type="b" for="ch" forName="FiveNodes_2_text" refType="b" refFor="ch" refForName="FiveNodes_2"/>
+          <dgm:constr type="r" for="ch" forName="FiveNodes_2_text" refType="r" refFor="ch" refForName="FiveNodes_2"/>
+          <dgm:constr type="l" for="ch" forName="FiveNodes_3_text" refType="r" refFor="ch" refForName="FiveConn_2-3"/>
+          <dgm:constr type="t" for="ch" forName="FiveNodes_3_text" refType="t" refFor="ch" refForName="FiveNodes_3"/>
+          <dgm:constr type="b" for="ch" forName="FiveNodes_3_text" refType="b" refFor="ch" refForName="FiveNodes_3"/>
+          <dgm:constr type="r" for="ch" forName="FiveNodes_3_text" refType="r" refFor="ch" refForName="FiveNodes_3"/>
+          <dgm:constr type="l" for="ch" forName="FiveNodes_4_text" refType="r" refFor="ch" refForName="FiveConn_3-4"/>
+          <dgm:constr type="t" for="ch" forName="FiveNodes_4_text" refType="t" refFor="ch" refForName="FiveNodes_4"/>
+          <dgm:constr type="b" for="ch" forName="FiveNodes_4_text" refType="b" refFor="ch" refForName="FiveNodes_4"/>
+          <dgm:constr type="r" for="ch" forName="FiveNodes_4_text" refType="r" refFor="ch" refForName="FiveNodes_4"/>
+          <dgm:constr type="l" for="ch" forName="FiveNodes_5_text" refType="r" refFor="ch" refForName="FiveConn_4-5"/>
+          <dgm:constr type="t" for="ch" forName="FiveNodes_5_text" refType="t" refFor="ch" refForName="FiveNodes_5"/>
+          <dgm:constr type="b" for="ch" forName="FiveNodes_5_text" refType="b" refFor="ch" refForName="FiveNodes_5"/>
+          <dgm:constr type="r" for="ch" forName="FiveNodes_5_text" refType="r" refFor="ch" refForName="FiveNodes_5"/>
+        </dgm:constrLst>
+      </dgm:else>
+    </dgm:choose>
+    <dgm:ruleLst/>
+    <dgm:layoutNode name="dummyMaxCanvas">
+      <dgm:varLst/>
+      <dgm:alg type="sp"/>
+      <dgm:shape xmlns:r="http://schemas.openxmlformats.org/officeDocument/2006/relationships" r:blip="">
+        <dgm:adjLst/>
+      </dgm:shape>
+      <dgm:presOf/>
+      <dgm:constrLst/>
+      <dgm:ruleLst/>
+    </dgm:layoutNode>
+    <dgm:choose name="Name3">
+      <dgm:if name="Name4" axis="ch" ptType="node" func="cnt" op="equ" val="1">
+        <dgm:layoutNode name="OneNode_1">
+          <dgm:varLst>
+            <dgm:bulletEnabled val="1"/>
+          </dgm:varLst>
+          <dgm:alg type="tx"/>
+          <dgm:shape xmlns:r="http://schemas.openxmlformats.org/officeDocument/2006/relationships" type="roundRect" r:blip="">
+            <dgm:adjLst>
+              <dgm:adj idx="1" val="0.1"/>
+            </dgm:adjLst>
+          </dgm:shape>
+          <dgm:presOf axis="ch desOrSelf" ptType="node node" st="1 1" cnt="1 0"/>
+          <dgm:constrLst>
+            <dgm:constr type="lMarg" refType="primFontSz" fact="0.3"/>
+            <dgm:constr type="rMarg" refType="primFontSz" fact="0.3"/>
+            <dgm:constr type="tMarg" refType="primFontSz" fact="0.3"/>
+            <dgm:constr type="bMarg" refType="primFontSz" fact="0.3"/>
+          </dgm:constrLst>
+          <dgm:ruleLst>
+            <dgm:rule type="primFontSz" val="5" fact="NaN" max="NaN"/>
+          </dgm:ruleLst>
+        </dgm:layoutNode>
+      </dgm:if>
+      <dgm:else name="Name5">
+        <dgm:choose name="Name6">
+          <dgm:if name="Name7" axis="ch" ptType="node" func="cnt" op="equ" val="2">
+            <dgm:layoutNode name="TwoNodes_1">
+              <dgm:varLst>
+                <dgm:bulletEnabled val="1"/>
+              </dgm:varLst>
+              <dgm:alg type="sp"/>
+              <dgm:shape xmlns:r="http://schemas.openxmlformats.org/officeDocument/2006/relationships" type="roundRect" r:blip="">
+                <dgm:adjLst>
+                  <dgm:adj idx="1" val="0.1"/>
+                </dgm:adjLst>
+              </dgm:shape>
+              <dgm:presOf axis="ch desOrSelf" ptType="node node" st="1 1" cnt="1 0"/>
+              <dgm:constrLst/>
+              <dgm:ruleLst/>
+            </dgm:layoutNode>
+            <dgm:layoutNode name="TwoNodes_2">
+              <dgm:varLst>
+                <dgm:bulletEnabled val="1"/>
+              </dgm:varLst>
+              <dgm:alg type="sp"/>
+              <dgm:shape xmlns:r="http://schemas.openxmlformats.org/officeDocument/2006/relationships" type="roundRect" r:blip="">
+                <dgm:adjLst>
+                  <dgm:adj idx="1" val="0.1"/>
+                </dgm:adjLst>
+              </dgm:shape>
+              <dgm:presOf axis="ch desOrSelf" ptType="node node" st="2 1" cnt="1 0"/>
+              <dgm:constrLst/>
+              <dgm:ruleLst/>
+            </dgm:layoutNode>
+            <dgm:layoutNode name="TwoConn_1-2" styleLbl="fgAccFollowNode1">
+              <dgm:varLst>
+                <dgm:bulletEnabled val="1"/>
+              </dgm:varLst>
+              <dgm:alg type="tx"/>
+              <dgm:shape xmlns:r="http://schemas.openxmlformats.org/officeDocument/2006/relationships" type="downArrow" r:blip="">
+                <dgm:adjLst>
+                  <dgm:adj idx="1" val="0.55"/>
+                  <dgm:adj idx="2" val="0.45"/>
+                </dgm:adjLst>
+              </dgm:shape>
+              <dgm:presOf axis="ch" ptType="sibTrans" cnt="1"/>
+              <dgm:constrLst>
+                <dgm:constr type="lMarg" refType="primFontSz" fact="0.1"/>
+                <dgm:constr type="rMarg" refType="primFontSz" fact="0.1"/>
+                <dgm:constr type="tMarg" refType="primFontSz" fact="0.1"/>
+                <dgm:constr type="bMarg" refType="primFontSz" fact="0.1"/>
+              </dgm:constrLst>
+              <dgm:ruleLst>
+                <dgm:rule type="primFontSz" val="5" fact="NaN" max="NaN"/>
+              </dgm:ruleLst>
+            </dgm:layoutNode>
+            <dgm:layoutNode name="TwoNodes_1_text">
+              <dgm:varLst>
+                <dgm:bulletEnabled val="1"/>
+              </dgm:varLst>
+              <dgm:alg type="tx">
+                <dgm:param type="parTxLTRAlign" val="l"/>
+                <dgm:param type="txAnchorVertCh" val="mid"/>
+              </dgm:alg>
+              <dgm:shape xmlns:r="http://schemas.openxmlformats.org/officeDocument/2006/relationships" type="roundRect" r:blip="" hideGeom="1">
+                <dgm:adjLst>
+                  <dgm:adj idx="1" val="0.1"/>
+                </dgm:adjLst>
+              </dgm:shape>
+              <dgm:presOf axis="ch desOrSelf" ptType="node node" st="1 1" cnt="1 0"/>
+              <dgm:constrLst>
+                <dgm:constr type="lMarg" refType="primFontSz" fact="0.3"/>
+                <dgm:constr type="rMarg" refType="primFontSz" fact="0.3"/>
+                <dgm:constr type="tMarg" refType="primFontSz" fact="0.3"/>
+                <dgm:constr type="bMarg" refType="primFontSz" fact="0.3"/>
+              </dgm:constrLst>
+              <dgm:ruleLst>
+                <dgm:rule type="primFontSz" val="5" fact="NaN" max="NaN"/>
+              </dgm:ruleLst>
+            </dgm:layoutNode>
+            <dgm:layoutNode name="TwoNodes_2_text">
+              <dgm:varLst>
+                <dgm:bulletEnabled val="1"/>
+              </dgm:varLst>
+              <dgm:alg type="tx">
+                <dgm:param type="parTxLTRAlign" val="l"/>
+                <dgm:param type="txAnchorVertCh" val="mid"/>
+              </dgm:alg>
+              <dgm:shape xmlns:r="http://schemas.openxmlformats.org/officeDocument/2006/relationships" type="roundRect" r:blip="" hideGeom="1">
+                <dgm:adjLst>
+                  <dgm:adj idx="1" val="0.1"/>
+                </dgm:adjLst>
+              </dgm:shape>
+              <dgm:presOf axis="ch desOrSelf" ptType="node node" st="2 1" cnt="1 0"/>
+              <dgm:constrLst>
+                <dgm:constr type="lMarg" refType="primFontSz" fact="0.3"/>
+                <dgm:constr type="rMarg" refType="primFontSz" fact="0.3"/>
+                <dgm:constr type="tMarg" refType="primFontSz" fact="0.3"/>
+                <dgm:constr type="bMarg" refType="primFontSz" fact="0.3"/>
+              </dgm:constrLst>
+              <dgm:ruleLst>
+                <dgm:rule type="primFontSz" val="5" fact="NaN" max="NaN"/>
+              </dgm:ruleLst>
+            </dgm:layoutNode>
+          </dgm:if>
+          <dgm:else name="Name8">
+            <dgm:choose name="Name9">
+              <dgm:if name="Name10" axis="ch" ptType="node" func="cnt" op="equ" val="3">
+                <dgm:layoutNode name="ThreeNodes_1">
+                  <dgm:varLst>
+                    <dgm:bulletEnabled val="1"/>
+                  </dgm:varLst>
+                  <dgm:alg type="sp"/>
+                  <dgm:shape xmlns:r="http://schemas.openxmlformats.org/officeDocument/2006/relationships" type="roundRect" r:blip="">
+                    <dgm:adjLst>
+                      <dgm:adj idx="1" val="0.1"/>
+                    </dgm:adjLst>
+                  </dgm:shape>
+                  <dgm:presOf axis="ch desOrSelf" ptType="node node" st="1 1" cnt="1 0"/>
+                  <dgm:constrLst/>
+                  <dgm:ruleLst/>
+                </dgm:layoutNode>
+                <dgm:layoutNode name="ThreeNodes_2">
+                  <dgm:varLst>
+                    <dgm:bulletEnabled val="1"/>
+                  </dgm:varLst>
+                  <dgm:alg type="sp"/>
+                  <dgm:shape xmlns:r="http://schemas.openxmlformats.org/officeDocument/2006/relationships" type="roundRect" r:blip="">
+                    <dgm:adjLst>
+                      <dgm:adj idx="1" val="0.1"/>
+                    </dgm:adjLst>
+                  </dgm:shape>
+                  <dgm:presOf axis="ch desOrSelf" ptType="node node" st="2 1" cnt="1 0"/>
+                  <dgm:constrLst/>
+                  <dgm:ruleLst/>
+                </dgm:layoutNode>
+                <dgm:layoutNode name="ThreeNodes_3">
+                  <dgm:varLst>
+                    <dgm:bulletEnabled val="1"/>
+                  </dgm:varLst>
+                  <dgm:alg type="sp"/>
+                  <dgm:shape xmlns:r="http://schemas.openxmlformats.org/officeDocument/2006/relationships" type="roundRect" r:blip="">
+                    <dgm:adjLst>
+                      <dgm:adj idx="1" val="0.1"/>
+                    </dgm:adjLst>
+                  </dgm:shape>
+                  <dgm:presOf axis="ch desOrSelf" ptType="node node" st="3 1" cnt="1 0"/>
+                  <dgm:constrLst/>
+                  <dgm:ruleLst/>
+                </dgm:layoutNode>
+                <dgm:layoutNode name="ThreeConn_1-2" styleLbl="fgAccFollowNode1">
+                  <dgm:varLst>
+                    <dgm:bulletEnabled val="1"/>
+                  </dgm:varLst>
+                  <dgm:alg type="tx"/>
+                  <dgm:shape xmlns:r="http://schemas.openxmlformats.org/officeDocument/2006/relationships" type="downArrow" r:blip="">
+                    <dgm:adjLst>
+                      <dgm:adj idx="1" val="0.55"/>
+                      <dgm:adj idx="2" val="0.45"/>
+                    </dgm:adjLst>
+                  </dgm:shape>
+                  <dgm:presOf axis="ch" ptType="sibTrans" cnt="1"/>
+                  <dgm:constrLst>
+                    <dgm:constr type="lMarg" refType="primFontSz" fact="0.1"/>
+                    <dgm:constr type="rMarg" refType="primFontSz" fact="0.1"/>
+                    <dgm:constr type="tMarg" refType="primFontSz" fact="0.1"/>
+                    <dgm:constr type="bMarg" refType="primFontSz" fact="0.1"/>
+                  </dgm:constrLst>
+                  <dgm:ruleLst>
+                    <dgm:rule type="primFontSz" val="5" fact="NaN" max="NaN"/>
+                  </dgm:ruleLst>
+                </dgm:layoutNode>
+                <dgm:layoutNode name="ThreeConn_2-3" styleLbl="fgAccFollowNode1">
+                  <dgm:varLst>
+                    <dgm:bulletEnabled val="1"/>
+                  </dgm:varLst>
+                  <dgm:alg type="tx"/>
+                  <dgm:shape xmlns:r="http://schemas.openxmlformats.org/officeDocument/2006/relationships" type="downArrow" r:blip="">
+                    <dgm:adjLst>
+                      <dgm:adj idx="1" val="0.55"/>
+                      <dgm:adj idx="2" val="0.45"/>
+                    </dgm:adjLst>
+                  </dgm:shape>
+                  <dgm:presOf axis="ch" ptType="sibTrans" st="2" cnt="1"/>
+                  <dgm:constrLst>
+                    <dgm:constr type="lMarg" refType="primFontSz" fact="0.1"/>
+                    <dgm:constr type="rMarg" refType="primFontSz" fact="0.1"/>
+                    <dgm:constr type="tMarg" refType="primFontSz" fact="0.1"/>
+                    <dgm:constr type="bMarg" refType="primFontSz" fact="0.1"/>
+                  </dgm:constrLst>
+                  <dgm:ruleLst>
+                    <dgm:rule type="primFontSz" val="5" fact="NaN" max="NaN"/>
+                  </dgm:ruleLst>
+                </dgm:layoutNode>
+                <dgm:layoutNode name="ThreeNodes_1_text">
+                  <dgm:varLst>
+                    <dgm:bulletEnabled val="1"/>
+                  </dgm:varLst>
+                  <dgm:alg type="tx">
+                    <dgm:param type="parTxLTRAlign" val="l"/>
+                    <dgm:param type="txAnchorVertCh" val="mid"/>
+                  </dgm:alg>
+                  <dgm:shape xmlns:r="http://schemas.openxmlformats.org/officeDocument/2006/relationships" type="roundRect" r:blip="" hideGeom="1">
+                    <dgm:adjLst>
+                      <dgm:adj idx="1" val="0.1"/>
+                    </dgm:adjLst>
+                  </dgm:shape>
+                  <dgm:presOf axis="ch desOrSelf" ptType="node node" st="1 1" cnt="1 0"/>
+                  <dgm:constrLst>
+                    <dgm:constr type="lMarg" refType="primFontSz" fact="0.3"/>
+                    <dgm:constr type="rMarg" refType="primFontSz" fact="0.3"/>
+                    <dgm:constr type="tMarg" refType="primFontSz" fact="0.3"/>
+                    <dgm:constr type="bMarg" refType="primFontSz" fact="0.3"/>
+                  </dgm:constrLst>
+                  <dgm:ruleLst>
+                    <dgm:rule type="primFontSz" val="5" fact="NaN" max="NaN"/>
+                  </dgm:ruleLst>
+                </dgm:layoutNode>
+                <dgm:layoutNode name="ThreeNodes_2_text">
+                  <dgm:varLst>
+                    <dgm:bulletEnabled val="1"/>
+                  </dgm:varLst>
+                  <dgm:alg type="tx">
+                    <dgm:param type="parTxLTRAlign" val="l"/>
+                    <dgm:param type="txAnchorVertCh" val="mid"/>
+                  </dgm:alg>
+                  <dgm:shape xmlns:r="http://schemas.openxmlformats.org/officeDocument/2006/relationships" type="roundRect" r:blip="" hideGeom="1">
+                    <dgm:adjLst>
+                      <dgm:adj idx="1" val="0.1"/>
+                    </dgm:adjLst>
+                  </dgm:shape>
+                  <dgm:presOf axis="ch desOrSelf" ptType="node node" st="2 1" cnt="1 0"/>
+                  <dgm:constrLst>
+                    <dgm:constr type="lMarg" refType="primFontSz" fact="0.3"/>
+                    <dgm:constr type="rMarg" refType="primFontSz" fact="0.3"/>
+                    <dgm:constr type="tMarg" refType="primFontSz" fact="0.3"/>
+                    <dgm:constr type="bMarg" refType="primFontSz" fact="0.3"/>
+                  </dgm:constrLst>
+                  <dgm:ruleLst>
+                    <dgm:rule type="primFontSz" val="5" fact="NaN" max="NaN"/>
+                  </dgm:ruleLst>
+                </dgm:layoutNode>
+                <dgm:layoutNode name="ThreeNodes_3_text">
+                  <dgm:varLst>
+                    <dgm:bulletEnabled val="1"/>
+                  </dgm:varLst>
+                  <dgm:alg type="tx">
+                    <dgm:param type="parTxLTRAlign" val="l"/>
+                    <dgm:param type="txAnchorVertCh" val="mid"/>
+                  </dgm:alg>
+                  <dgm:shape xmlns:r="http://schemas.openxmlformats.org/officeDocument/2006/relationships" type="roundRect" r:blip="" hideGeom="1">
+                    <dgm:adjLst>
+                      <dgm:adj idx="1" val="0.1"/>
+                    </dgm:adjLst>
+                  </dgm:shape>
+                  <dgm:presOf axis="ch desOrSelf" ptType="node node" st="3 1" cnt="1 0"/>
+                  <dgm:constrLst>
+                    <dgm:constr type="lMarg" refType="primFontSz" fact="0.3"/>
+                    <dgm:constr type="rMarg" refType="primFontSz" fact="0.3"/>
+                    <dgm:constr type="tMarg" refType="primFontSz" fact="0.3"/>
+                    <dgm:constr type="bMarg" refType="primFontSz" fact="0.3"/>
+                  </dgm:constrLst>
+                  <dgm:ruleLst>
+                    <dgm:rule type="primFontSz" val="5" fact="NaN" max="NaN"/>
+                  </dgm:ruleLst>
+                </dgm:layoutNode>
+              </dgm:if>
+              <dgm:else name="Name11">
+                <dgm:choose name="Name12">
+                  <dgm:if name="Name13" axis="ch" ptType="node" func="cnt" op="equ" val="4">
+                    <dgm:layoutNode name="FourNodes_1">
+                      <dgm:varLst>
+                        <dgm:bulletEnabled val="1"/>
+                      </dgm:varLst>
+                      <dgm:alg type="sp"/>
+                      <dgm:shape xmlns:r="http://schemas.openxmlformats.org/officeDocument/2006/relationships" type="roundRect" r:blip="">
+                        <dgm:adjLst>
+                          <dgm:adj idx="1" val="0.1"/>
+                        </dgm:adjLst>
+                      </dgm:shape>
+                      <dgm:presOf axis="ch desOrSelf" ptType="node node" st="1 1" cnt="1 0"/>
+                      <dgm:constrLst/>
+                      <dgm:ruleLst/>
+                    </dgm:layoutNode>
+                    <dgm:layoutNode name="FourNodes_2">
+                      <dgm:varLst>
+                        <dgm:bulletEnabled val="1"/>
+                      </dgm:varLst>
+                      <dgm:alg type="sp"/>
+                      <dgm:shape xmlns:r="http://schemas.openxmlformats.org/officeDocument/2006/relationships" type="roundRect" r:blip="">
+                        <dgm:adjLst>
+                          <dgm:adj idx="1" val="0.1"/>
+                        </dgm:adjLst>
+                      </dgm:shape>
+                      <dgm:presOf axis="ch desOrSelf" ptType="node node" st="2 1" cnt="1 0"/>
+                      <dgm:constrLst/>
+                      <dgm:ruleLst/>
+                    </dgm:layoutNode>
+                    <dgm:layoutNode name="FourNodes_3">
+                      <dgm:varLst>
+                        <dgm:bulletEnabled val="1"/>
+                      </dgm:varLst>
+                      <dgm:alg type="sp"/>
+                      <dgm:shape xmlns:r="http://schemas.openxmlformats.org/officeDocument/2006/relationships" type="roundRect" r:blip="">
+                        <dgm:adjLst>
+                          <dgm:adj idx="1" val="0.1"/>
+                        </dgm:adjLst>
+                      </dgm:shape>
+                      <dgm:presOf axis="ch desOrSelf" ptType="node node" st="3 1" cnt="1 0"/>
+                      <dgm:constrLst/>
+                      <dgm:ruleLst/>
+                    </dgm:layoutNode>
+                    <dgm:layoutNode name="FourNodes_4">
+                      <dgm:varLst>
+                        <dgm:bulletEnabled val="1"/>
+                      </dgm:varLst>
+                      <dgm:alg type="sp"/>
+                      <dgm:shape xmlns:r="http://schemas.openxmlformats.org/officeDocument/2006/relationships" type="roundRect" r:blip="">
+                        <dgm:adjLst>
+                          <dgm:adj idx="1" val="0.1"/>
+                        </dgm:adjLst>
+                      </dgm:shape>
+                      <dgm:presOf axis="ch desOrSelf" ptType="node node" st="4 1" cnt="1 0"/>
+                      <dgm:constrLst/>
+                      <dgm:ruleLst/>
+                    </dgm:layoutNode>
+                    <dgm:layoutNode name="FourConn_1-2" styleLbl="fgAccFollowNode1">
+                      <dgm:varLst>
+                        <dgm:bulletEnabled val="1"/>
+                      </dgm:varLst>
+                      <dgm:alg type="tx"/>
+                      <dgm:shape xmlns:r="http://schemas.openxmlformats.org/officeDocument/2006/relationships" type="downArrow" r:blip="">
+                        <dgm:adjLst>
+                          <dgm:adj idx="1" val="0.55"/>
+                          <dgm:adj idx="2" val="0.45"/>
+                        </dgm:adjLst>
+                      </dgm:shape>
+                      <dgm:presOf axis="ch" ptType="sibTrans" cnt="1"/>
+                      <dgm:constrLst>
+                        <dgm:constr type="lMarg" refType="primFontSz" fact="0.1"/>
+                        <dgm:constr type="rMarg" refType="primFontSz" fact="0.1"/>
+                        <dgm:constr type="tMarg" refType="primFontSz" fact="0.1"/>
+                        <dgm:constr type="bMarg" refType="primFontSz" fact="0.1"/>
+                      </dgm:constrLst>
+                      <dgm:ruleLst>
+                        <dgm:rule type="primFontSz" val="5" fact="NaN" max="NaN"/>
+                      </dgm:ruleLst>
+                    </dgm:layoutNode>
+                    <dgm:layoutNode name="FourConn_2-3" styleLbl="fgAccFollowNode1">
+                      <dgm:varLst>
+                        <dgm:bulletEnabled val="1"/>
+                      </dgm:varLst>
+                      <dgm:alg type="tx"/>
+                      <dgm:shape xmlns:r="http://schemas.openxmlformats.org/officeDocument/2006/relationships" type="downArrow" r:blip="">
+                        <dgm:adjLst>
+                          <dgm:adj idx="1" val="0.55"/>
+                          <dgm:adj idx="2" val="0.45"/>
+                        </dgm:adjLst>
+                      </dgm:shape>
+                      <dgm:presOf axis="ch" ptType="sibTrans" st="2" cnt="1"/>
+                      <dgm:constrLst>
+                        <dgm:constr type="lMarg" refType="primFontSz" fact="0.1"/>
+                        <dgm:constr type="rMarg" refType="primFontSz" fact="0.1"/>
+                        <dgm:constr type="tMarg" refType="primFontSz" fact="0.1"/>
+                        <dgm:constr type="bMarg" refType="primFontSz" fact="0.1"/>
+                      </dgm:constrLst>
+                      <dgm:ruleLst>
+                        <dgm:rule type="primFontSz" val="5" fact="NaN" max="NaN"/>
+                      </dgm:ruleLst>
+                    </dgm:layoutNode>
+                    <dgm:layoutNode name="FourConn_3-4" styleLbl="fgAccFollowNode1">
+                      <dgm:varLst>
+                        <dgm:bulletEnabled val="1"/>
+                      </dgm:varLst>
+                      <dgm:alg type="tx"/>
+                      <dgm:shape xmlns:r="http://schemas.openxmlformats.org/officeDocument/2006/relationships" type="downArrow" r:blip="">
+                        <dgm:adjLst>
+                          <dgm:adj idx="1" val="0.55"/>
+                          <dgm:adj idx="2" val="0.45"/>
+                        </dgm:adjLst>
+                      </dgm:shape>
+                      <dgm:presOf axis="ch" ptType="sibTrans" st="3" cnt="1"/>
+                      <dgm:constrLst>
+                        <dgm:constr type="lMarg" refType="primFontSz" fact="0.1"/>
+                        <dgm:constr type="rMarg" refType="primFontSz" fact="0.1"/>
+                        <dgm:constr type="tMarg" refType="primFontSz" fact="0.1"/>
+                        <dgm:constr type="bMarg" refType="primFontSz" fact="0.1"/>
+                      </dgm:constrLst>
+                      <dgm:ruleLst>
+                        <dgm:rule type="primFontSz" val="5" fact="NaN" max="NaN"/>
+                      </dgm:ruleLst>
+                    </dgm:layoutNode>
+                    <dgm:layoutNode name="FourNodes_1_text">
+                      <dgm:varLst>
+                        <dgm:bulletEnabled val="1"/>
+                      </dgm:varLst>
+                      <dgm:alg type="tx">
+                        <dgm:param type="parTxLTRAlign" val="l"/>
+                        <dgm:param type="txAnchorVertCh" val="mid"/>
+                      </dgm:alg>
+                      <dgm:shape xmlns:r="http://schemas.openxmlformats.org/officeDocument/2006/relationships" type="roundRect" r:blip="" hideGeom="1">
+                        <dgm:adjLst>
+                          <dgm:adj idx="1" val="0.1"/>
+                        </dgm:adjLst>
+                      </dgm:shape>
+                      <dgm:presOf axis="ch desOrSelf" ptType="node node" st="1 1" cnt="1 0"/>
+                      <dgm:constrLst>
+                        <dgm:constr type="lMarg" refType="primFontSz" fact="0.3"/>
+                        <dgm:constr type="rMarg" refType="primFontSz" fact="0.3"/>
+                        <dgm:constr type="tMarg" refType="primFontSz" fact="0.3"/>
+                        <dgm:constr type="bMarg" refType="primFontSz" fact="0.3"/>
+                      </dgm:constrLst>
+                      <dgm:ruleLst>
+                        <dgm:rule type="primFontSz" val="5" fact="NaN" max="NaN"/>
+                      </dgm:ruleLst>
+                    </dgm:layoutNode>
+                    <dgm:layoutNode name="FourNodes_2_text">
+                      <dgm:varLst>
+                        <dgm:bulletEnabled val="1"/>
+                      </dgm:varLst>
+                      <dgm:alg type="tx">
+                        <dgm:param type="parTxLTRAlign" val="l"/>
+                        <dgm:param type="txAnchorVertCh" val="mid"/>
+                      </dgm:alg>
+                      <dgm:shape xmlns:r="http://schemas.openxmlformats.org/officeDocument/2006/relationships" type="roundRect" r:blip="" hideGeom="1">
+                        <dgm:adjLst>
+                          <dgm:adj idx="1" val="0.1"/>
+                        </dgm:adjLst>
+                      </dgm:shape>
+                      <dgm:presOf axis="ch desOrSelf" ptType="node node" st="2 1" cnt="1 0"/>
+                      <dgm:constrLst>
+                        <dgm:constr type="lMarg" refType="primFontSz" fact="0.3"/>
+                        <dgm:constr type="rMarg" refType="primFontSz" fact="0.3"/>
+                        <dgm:constr type="tMarg" refType="primFontSz" fact="0.3"/>
+                        <dgm:constr type="bMarg" refType="primFontSz" fact="0.3"/>
+                      </dgm:constrLst>
+                      <dgm:ruleLst>
+                        <dgm:rule type="primFontSz" val="5" fact="NaN" max="NaN"/>
+                      </dgm:ruleLst>
+                    </dgm:layoutNode>
+                    <dgm:layoutNode name="FourNodes_3_text">
+                      <dgm:varLst>
+                        <dgm:bulletEnabled val="1"/>
+                      </dgm:varLst>
+                      <dgm:alg type="tx">
+                        <dgm:param type="parTxLTRAlign" val="l"/>
+                        <dgm:param type="txAnchorVertCh" val="mid"/>
+                      </dgm:alg>
+                      <dgm:shape xmlns:r="http://schemas.openxmlformats.org/officeDocument/2006/relationships" type="roundRect" r:blip="" hideGeom="1">
+                        <dgm:adjLst>
+                          <dgm:adj idx="1" val="0.1"/>
+                        </dgm:adjLst>
+                      </dgm:shape>
+                      <dgm:presOf axis="ch desOrSelf" ptType="node node" st="3 1" cnt="1 0"/>
+                      <dgm:constrLst>
+                        <dgm:constr type="lMarg" refType="primFontSz" fact="0.3"/>
+                        <dgm:constr type="rMarg" refType="primFontSz" fact="0.3"/>
+                        <dgm:constr type="tMarg" refType="primFontSz" fact="0.3"/>
+                        <dgm:constr type="bMarg" refType="primFontSz" fact="0.3"/>
+                      </dgm:constrLst>
+                      <dgm:ruleLst>
+                        <dgm:rule type="primFontSz" val="5" fact="NaN" max="NaN"/>
+                      </dgm:ruleLst>
+                    </dgm:layoutNode>
+                    <dgm:layoutNode name="FourNodes_4_text">
+                      <dgm:varLst>
+                        <dgm:bulletEnabled val="1"/>
+                      </dgm:varLst>
+                      <dgm:alg type="tx">
+                        <dgm:param type="parTxLTRAlign" val="l"/>
+                        <dgm:param type="txAnchorVertCh" val="mid"/>
+                      </dgm:alg>
+                      <dgm:shape xmlns:r="http://schemas.openxmlformats.org/officeDocument/2006/relationships" type="roundRect" r:blip="" hideGeom="1">
+                        <dgm:adjLst>
+                          <dgm:adj idx="1" val="0.1"/>
+                        </dgm:adjLst>
+                      </dgm:shape>
+                      <dgm:presOf axis="ch desOrSelf" ptType="node node" st="4 1" cnt="1 0"/>
+                      <dgm:constrLst>
+                        <dgm:constr type="lMarg" refType="primFontSz" fact="0.3"/>
+                        <dgm:constr type="rMarg" refType="primFontSz" fact="0.3"/>
+                        <dgm:constr type="tMarg" refType="primFontSz" fact="0.3"/>
+                        <dgm:constr type="bMarg" refType="primFontSz" fact="0.3"/>
+                      </dgm:constrLst>
+                      <dgm:ruleLst>
+                        <dgm:rule type="primFontSz" val="5" fact="NaN" max="NaN"/>
+                      </dgm:ruleLst>
+                    </dgm:layoutNode>
+                  </dgm:if>
+                  <dgm:else name="Name14">
+                    <dgm:choose name="Name15">
+                      <dgm:if name="Name16" axis="ch" ptType="node" func="cnt" op="gte" val="5">
+                        <dgm:layoutNode name="FiveNodes_1">
+                          <dgm:varLst>
+                            <dgm:bulletEnabled val="1"/>
+                          </dgm:varLst>
+                          <dgm:alg type="sp"/>
+                          <dgm:shape xmlns:r="http://schemas.openxmlformats.org/officeDocument/2006/relationships" type="roundRect" r:blip="">
+                            <dgm:adjLst>
+                              <dgm:adj idx="1" val="0.1"/>
+                            </dgm:adjLst>
+                          </dgm:shape>
+                          <dgm:presOf axis="ch desOrSelf" ptType="node node" st="1 1" cnt="1 0"/>
+                          <dgm:constrLst/>
+                          <dgm:ruleLst/>
+                        </dgm:layoutNode>
+                        <dgm:layoutNode name="FiveNodes_2">
+                          <dgm:varLst>
+                            <dgm:bulletEnabled val="1"/>
+                          </dgm:varLst>
+                          <dgm:alg type="sp"/>
+                          <dgm:shape xmlns:r="http://schemas.openxmlformats.org/officeDocument/2006/relationships" type="roundRect" r:blip="">
+                            <dgm:adjLst>
+                              <dgm:adj idx="1" val="0.1"/>
+                            </dgm:adjLst>
+                          </dgm:shape>
+                          <dgm:presOf axis="ch desOrSelf" ptType="node node" st="2 1" cnt="1 0"/>
+                          <dgm:constrLst/>
+                          <dgm:ruleLst/>
+                        </dgm:layoutNode>
+                        <dgm:layoutNode name="FiveNodes_3">
+                          <dgm:varLst>
+                            <dgm:bulletEnabled val="1"/>
+                          </dgm:varLst>
+                          <dgm:alg type="sp"/>
+                          <dgm:shape xmlns:r="http://schemas.openxmlformats.org/officeDocument/2006/relationships" type="roundRect" r:blip="">
+                            <dgm:adjLst>
+                              <dgm:adj idx="1" val="0.1"/>
+                            </dgm:adjLst>
+                          </dgm:shape>
+                          <dgm:presOf axis="ch desOrSelf" ptType="node node" st="3 1" cnt="1 0"/>
+                          <dgm:constrLst/>
+                          <dgm:ruleLst/>
+                        </dgm:layoutNode>
+                        <dgm:layoutNode name="FiveNodes_4">
+                          <dgm:varLst>
+                            <dgm:bulletEnabled val="1"/>
+                          </dgm:varLst>
+                          <dgm:alg type="sp"/>
+                          <dgm:shape xmlns:r="http://schemas.openxmlformats.org/officeDocument/2006/relationships" type="roundRect" r:blip="">
+                            <dgm:adjLst>
+                              <dgm:adj idx="1" val="0.1"/>
+                            </dgm:adjLst>
+                          </dgm:shape>
+                          <dgm:presOf axis="ch desOrSelf" ptType="node node" st="4 1" cnt="1 0"/>
+                          <dgm:constrLst/>
+                          <dgm:ruleLst/>
+                        </dgm:layoutNode>
+                        <dgm:layoutNode name="FiveNodes_5">
+                          <dgm:varLst>
+                            <dgm:bulletEnabled val="1"/>
+                          </dgm:varLst>
+                          <dgm:alg type="sp"/>
+                          <dgm:shape xmlns:r="http://schemas.openxmlformats.org/officeDocument/2006/relationships" type="roundRect" r:blip="">
+                            <dgm:adjLst>
+                              <dgm:adj idx="1" val="0.1"/>
+                            </dgm:adjLst>
+                          </dgm:shape>
+                          <dgm:presOf axis="ch desOrSelf" ptType="node node" st="5 1" cnt="1 0"/>
+                          <dgm:constrLst/>
+                          <dgm:ruleLst/>
+                        </dgm:layoutNode>
+                        <dgm:layoutNode name="FiveConn_1-2" styleLbl="fgAccFollowNode1">
+                          <dgm:varLst>
+                            <dgm:bulletEnabled val="1"/>
+                          </dgm:varLst>
+                          <dgm:alg type="tx"/>
+                          <dgm:shape xmlns:r="http://schemas.openxmlformats.org/officeDocument/2006/relationships" type="downArrow" r:blip="">
+                            <dgm:adjLst>
+                              <dgm:adj idx="1" val="0.55"/>
+                              <dgm:adj idx="2" val="0.45"/>
+                            </dgm:adjLst>
+                          </dgm:shape>
+                          <dgm:presOf axis="ch" ptType="sibTrans" cnt="1"/>
+                          <dgm:constrLst>
+                            <dgm:constr type="lMarg" refType="primFontSz" fact="0.1"/>
+                            <dgm:constr type="rMarg" refType="primFontSz" fact="0.1"/>
+                            <dgm:constr type="tMarg" refType="primFontSz" fact="0.1"/>
+                            <dgm:constr type="bMarg" refType="primFontSz" fact="0.1"/>
+                          </dgm:constrLst>
+                          <dgm:ruleLst>
+                            <dgm:rule type="primFontSz" val="5" fact="NaN" max="NaN"/>
+                          </dgm:ruleLst>
+                        </dgm:layoutNode>
+                        <dgm:layoutNode name="FiveConn_2-3" styleLbl="fgAccFollowNode1">
+                          <dgm:varLst>
+                            <dgm:bulletEnabled val="1"/>
+                          </dgm:varLst>
+                          <dgm:alg type="tx"/>
+                          <dgm:shape xmlns:r="http://schemas.openxmlformats.org/officeDocument/2006/relationships" type="downArrow" r:blip="">
+                            <dgm:adjLst>
+                              <dgm:adj idx="1" val="0.55"/>
+                              <dgm:adj idx="2" val="0.45"/>
+                            </dgm:adjLst>
+                          </dgm:shape>
+                          <dgm:presOf axis="ch" ptType="sibTrans" st="2" cnt="1"/>
+                          <dgm:constrLst>
+                            <dgm:constr type="lMarg" refType="primFontSz" fact="0.1"/>
+                            <dgm:constr type="rMarg" refType="primFontSz" fact="0.1"/>
+                            <dgm:constr type="tMarg" refType="primFontSz" fact="0.1"/>
+                            <dgm:constr type="bMarg" refType="primFontSz" fact="0.1"/>
+                          </dgm:constrLst>
+                          <dgm:ruleLst>
+                            <dgm:rule type="primFontSz" val="5" fact="NaN" max="NaN"/>
+                          </dgm:ruleLst>
+                        </dgm:layoutNode>
+                        <dgm:layoutNode name="FiveConn_3-4" styleLbl="fgAccFollowNode1">
+                          <dgm:varLst>
+                            <dgm:bulletEnabled val="1"/>
+                          </dgm:varLst>
+                          <dgm:alg type="tx"/>
+                          <dgm:shape xmlns:r="http://schemas.openxmlformats.org/officeDocument/2006/relationships" type="downArrow" r:blip="">
+                            <dgm:adjLst>
+                              <dgm:adj idx="1" val="0.55"/>
+                              <dgm:adj idx="2" val="0.45"/>
+                            </dgm:adjLst>
+                          </dgm:shape>
+                          <dgm:presOf axis="ch" ptType="sibTrans" st="3" cnt="1"/>
+                          <dgm:constrLst>
+                            <dgm:constr type="lMarg" refType="primFontSz" fact="0.1"/>
+                            <dgm:constr type="rMarg" refType="primFontSz" fact="0.1"/>
+                            <dgm:constr type="tMarg" refType="primFontSz" fact="0.1"/>
+                            <dgm:constr type="bMarg" refType="primFontSz" fact="0.1"/>
+                          </dgm:constrLst>
+                          <dgm:ruleLst>
+                            <dgm:rule type="primFontSz" val="5" fact="NaN" max="NaN"/>
+                          </dgm:ruleLst>
+                        </dgm:layoutNode>
+                        <dgm:layoutNode name="FiveConn_4-5" styleLbl="fgAccFollowNode1">
+                          <dgm:varLst>
+                            <dgm:bulletEnabled val="1"/>
+                          </dgm:varLst>
+                          <dgm:alg type="tx"/>
+                          <dgm:shape xmlns:r="http://schemas.openxmlformats.org/officeDocument/2006/relationships" type="downArrow" r:blip="">
+                            <dgm:adjLst>
+                              <dgm:adj idx="1" val="0.55"/>
+                              <dgm:adj idx="2" val="0.45"/>
+                            </dgm:adjLst>
+                          </dgm:shape>
+                          <dgm:presOf axis="ch" ptType="sibTrans" st="4" cnt="1"/>
+                          <dgm:constrLst>
+                            <dgm:constr type="lMarg" refType="primFontSz" fact="0.1"/>
+                            <dgm:constr type="rMarg" refType="primFontSz" fact="0.1"/>
+                            <dgm:constr type="tMarg" refType="primFontSz" fact="0.1"/>
+                            <dgm:constr type="bMarg" refType="primFontSz" fact="0.1"/>
+                          </dgm:constrLst>
+                          <dgm:ruleLst>
+                            <dgm:rule type="primFontSz" val="5" fact="NaN" max="NaN"/>
+                          </dgm:ruleLst>
+                        </dgm:layoutNode>
+                        <dgm:layoutNode name="FiveNodes_1_text">
+                          <dgm:varLst>
+                            <dgm:bulletEnabled val="1"/>
+                          </dgm:varLst>
+                          <dgm:alg type="tx">
+                            <dgm:param type="parTxLTRAlign" val="l"/>
+                            <dgm:param type="txAnchorVertCh" val="mid"/>
+                          </dgm:alg>
+                          <dgm:shape xmlns:r="http://schemas.openxmlformats.org/officeDocument/2006/relationships" type="roundRect" r:blip="" hideGeom="1">
+                            <dgm:adjLst>
+                              <dgm:adj idx="1" val="0.1"/>
+                            </dgm:adjLst>
+                          </dgm:shape>
+                          <dgm:presOf axis="ch desOrSelf" ptType="node node" st="1 1" cnt="1 0"/>
+                          <dgm:constrLst>
+                            <dgm:constr type="lMarg" refType="primFontSz" fact="0.3"/>
+                            <dgm:constr type="rMarg" refType="primFontSz" fact="0.3"/>
+                            <dgm:constr type="tMarg" refType="primFontSz" fact="0.3"/>
+                            <dgm:constr type="bMarg" refType="primFontSz" fact="0.3"/>
+                          </dgm:constrLst>
+                          <dgm:ruleLst>
+                            <dgm:rule type="primFontSz" val="5" fact="NaN" max="NaN"/>
+                          </dgm:ruleLst>
+                        </dgm:layoutNode>
+                        <dgm:layoutNode name="FiveNodes_2_text">
+                          <dgm:varLst>
+                            <dgm:bulletEnabled val="1"/>
+                          </dgm:varLst>
+                          <dgm:alg type="tx">
+                            <dgm:param type="parTxLTRAlign" val="l"/>
+                            <dgm:param type="txAnchorVertCh" val="mid"/>
+                          </dgm:alg>
+                          <dgm:shape xmlns:r="http://schemas.openxmlformats.org/officeDocument/2006/relationships" type="roundRect" r:blip="" hideGeom="1">
+                            <dgm:adjLst>
+                              <dgm:adj idx="1" val="0.1"/>
+                            </dgm:adjLst>
+                          </dgm:shape>
+                          <dgm:presOf axis="ch desOrSelf" ptType="node node" st="2 1" cnt="1 0"/>
+                          <dgm:constrLst>
+                            <dgm:constr type="lMarg" refType="primFontSz" fact="0.3"/>
+                            <dgm:constr type="rMarg" refType="primFontSz" fact="0.3"/>
+                            <dgm:constr type="tMarg" refType="primFontSz" fact="0.3"/>
+                            <dgm:constr type="bMarg" refType="primFontSz" fact="0.3"/>
+                          </dgm:constrLst>
+                          <dgm:ruleLst>
+                            <dgm:rule type="primFontSz" val="5" fact="NaN" max="NaN"/>
+                          </dgm:ruleLst>
+                        </dgm:layoutNode>
+                        <dgm:layoutNode name="FiveNodes_3_text">
+                          <dgm:varLst>
+                            <dgm:bulletEnabled val="1"/>
+                          </dgm:varLst>
+                          <dgm:alg type="tx">
+                            <dgm:param type="parTxLTRAlign" val="l"/>
+                            <dgm:param type="txAnchorVertCh" val="mid"/>
+                          </dgm:alg>
+                          <dgm:shape xmlns:r="http://schemas.openxmlformats.org/officeDocument/2006/relationships" type="roundRect" r:blip="" hideGeom="1">
+                            <dgm:adjLst>
+                              <dgm:adj idx="1" val="0.1"/>
+                            </dgm:adjLst>
+                          </dgm:shape>
+                          <dgm:presOf axis="ch desOrSelf" ptType="node node" st="3 1" cnt="1 0"/>
+                          <dgm:constrLst>
+                            <dgm:constr type="lMarg" refType="primFontSz" fact="0.3"/>
+                            <dgm:constr type="rMarg" refType="primFontSz" fact="0.3"/>
+                            <dgm:constr type="tMarg" refType="primFontSz" fact="0.3"/>
+                            <dgm:constr type="bMarg" refType="primFontSz" fact="0.3"/>
+                          </dgm:constrLst>
+                          <dgm:ruleLst>
+                            <dgm:rule type="primFontSz" val="5" fact="NaN" max="NaN"/>
+                          </dgm:ruleLst>
+                        </dgm:layoutNode>
+                        <dgm:layoutNode name="FiveNodes_4_text">
+                          <dgm:varLst>
+                            <dgm:bulletEnabled val="1"/>
+                          </dgm:varLst>
+                          <dgm:alg type="tx">
+                            <dgm:param type="parTxLTRAlign" val="l"/>
+                            <dgm:param type="txAnchorVertCh" val="mid"/>
+                          </dgm:alg>
+                          <dgm:shape xmlns:r="http://schemas.openxmlformats.org/officeDocument/2006/relationships" type="roundRect" r:blip="" hideGeom="1">
+                            <dgm:adjLst>
+                              <dgm:adj idx="1" val="0.1"/>
+                            </dgm:adjLst>
+                          </dgm:shape>
+                          <dgm:presOf axis="ch desOrSelf" ptType="node node" st="4 1" cnt="1 0"/>
+                          <dgm:constrLst>
+                            <dgm:constr type="lMarg" refType="primFontSz" fact="0.3"/>
+                            <dgm:constr type="rMarg" refType="primFontSz" fact="0.3"/>
+                            <dgm:constr type="tMarg" refType="primFontSz" fact="0.3"/>
+                            <dgm:constr type="bMarg" refType="primFontSz" fact="0.3"/>
+                          </dgm:constrLst>
+                          <dgm:ruleLst>
+                            <dgm:rule type="primFontSz" val="5" fact="NaN" max="NaN"/>
+                          </dgm:ruleLst>
+                        </dgm:layoutNode>
+                        <dgm:layoutNode name="FiveNodes_5_text">
+                          <dgm:varLst>
+                            <dgm:bulletEnabled val="1"/>
+                          </dgm:varLst>
+                          <dgm:alg type="tx">
+                            <dgm:param type="parTxLTRAlign" val="l"/>
+                            <dgm:param type="txAnchorVertCh" val="mid"/>
+                          </dgm:alg>
+                          <dgm:shape xmlns:r="http://schemas.openxmlformats.org/officeDocument/2006/relationships" type="roundRect" r:blip="" hideGeom="1">
+                            <dgm:adjLst>
+                              <dgm:adj idx="1" val="0.1"/>
+                            </dgm:adjLst>
+                          </dgm:shape>
+                          <dgm:presOf axis="ch desOrSelf" ptType="node node" st="5 1" cnt="1 0"/>
+                          <dgm:constrLst>
+                            <dgm:constr type="lMarg" refType="primFontSz" fact="0.3"/>
+                            <dgm:constr type="rMarg" refType="primFontSz" fact="0.3"/>
+                            <dgm:constr type="tMarg" refType="primFontSz" fact="0.3"/>
+                            <dgm:constr type="bMarg" refType="primFontSz" fact="0.3"/>
+                          </dgm:constrLst>
+                          <dgm:ruleLst>
+                            <dgm:rule type="primFontSz" val="5" fact="NaN" max="NaN"/>
+                          </dgm:ruleLst>
+                        </dgm:layoutNode>
+                      </dgm:if>
+                      <dgm:else name="Name17"/>
+                    </dgm:choose>
+                  </dgm:else>
+                </dgm:choose>
+              </dgm:else>
+            </dgm:choose>
+          </dgm:else>
+        </dgm:choose>
+      </dgm:else>
+    </dgm:choose>
+  </dgm:layoutNode>
+</dgm:layoutDef>
+</file>
+
+<file path=ppt/diagrams/layout2.xml><?xml version="1.0" encoding="utf-8"?>
 <dgm:layoutDef xmlns:dgm="http://schemas.openxmlformats.org/drawingml/2006/diagram" xmlns:a="http://schemas.openxmlformats.org/drawingml/2006/main" uniqueId="urn:microsoft.com/office/officeart/2005/8/layout/hProcess9">
   <dgm:title val=""/>
   <dgm:desc val=""/>
@@ -2672,6 +5520,1040 @@
 </dgm:styleDef>
 </file>
 
+<file path=ppt/diagrams/quickStyle2.xml><?xml version="1.0" encoding="utf-8"?>
+<dgm:styleDef xmlns:dgm="http://schemas.openxmlformats.org/drawingml/2006/diagram" xmlns:a="http://schemas.openxmlformats.org/drawingml/2006/main" uniqueId="urn:microsoft.com/office/officeart/2005/8/quickstyle/simple1">
+  <dgm:title val=""/>
+  <dgm:desc val=""/>
+  <dgm:catLst>
+    <dgm:cat type="simple" pri="10100"/>
+  </dgm:catLst>
+  <dgm:scene3d>
+    <a:camera prst="orthographicFront"/>
+    <a:lightRig rig="threePt" dir="t"/>
+  </dgm:scene3d>
+  <dgm:styleLbl name="node0">
+    <dgm:scene3d>
+      <a:camera prst="orthographicFront"/>
+      <a:lightRig rig="threePt" dir="t"/>
+    </dgm:scene3d>
+    <dgm:sp3d/>
+    <dgm:txPr/>
+    <dgm:style>
+      <a:lnRef idx="2">
+        <a:scrgbClr r="0" g="0" b="0"/>
+      </a:lnRef>
+      <a:fillRef idx="1">
+        <a:scrgbClr r="0" g="0" b="0"/>
+      </a:fillRef>
+      <a:effectRef idx="0">
+        <a:scrgbClr r="0" g="0" b="0"/>
+      </a:effectRef>
+      <a:fontRef idx="minor">
+        <a:schemeClr val="lt1"/>
+      </a:fontRef>
+    </dgm:style>
+  </dgm:styleLbl>
+  <dgm:styleLbl name="lnNode1">
+    <dgm:scene3d>
+      <a:camera prst="orthographicFront"/>
+      <a:lightRig rig="threePt" dir="t"/>
+    </dgm:scene3d>
+    <dgm:sp3d/>
+    <dgm:txPr/>
+    <dgm:style>
+      <a:lnRef idx="2">
+        <a:scrgbClr r="0" g="0" b="0"/>
+      </a:lnRef>
+      <a:fillRef idx="1">
+        <a:scrgbClr r="0" g="0" b="0"/>
+      </a:fillRef>
+      <a:effectRef idx="0">
+        <a:scrgbClr r="0" g="0" b="0"/>
+      </a:effectRef>
+      <a:fontRef idx="minor">
+        <a:schemeClr val="lt1"/>
+      </a:fontRef>
+    </dgm:style>
+  </dgm:styleLbl>
+  <dgm:styleLbl name="vennNode1">
+    <dgm:scene3d>
+      <a:camera prst="orthographicFront"/>
+      <a:lightRig rig="threePt" dir="t"/>
+    </dgm:scene3d>
+    <dgm:sp3d/>
+    <dgm:txPr/>
+    <dgm:style>
+      <a:lnRef idx="2">
+        <a:scrgbClr r="0" g="0" b="0"/>
+      </a:lnRef>
+      <a:fillRef idx="1">
+        <a:scrgbClr r="0" g="0" b="0"/>
+      </a:fillRef>
+      <a:effectRef idx="0">
+        <a:scrgbClr r="0" g="0" b="0"/>
+      </a:effectRef>
+      <a:fontRef idx="minor">
+        <a:schemeClr val="tx1"/>
+      </a:fontRef>
+    </dgm:style>
+  </dgm:styleLbl>
+  <dgm:styleLbl name="alignNode1">
+    <dgm:scene3d>
+      <a:camera prst="orthographicFront"/>
+      <a:lightRig rig="threePt" dir="t"/>
+    </dgm:scene3d>
+    <dgm:sp3d/>
+    <dgm:txPr/>
+    <dgm:style>
+      <a:lnRef idx="2">
+        <a:scrgbClr r="0" g="0" b="0"/>
+      </a:lnRef>
+      <a:fillRef idx="1">
+        <a:scrgbClr r="0" g="0" b="0"/>
+      </a:fillRef>
+      <a:effectRef idx="0">
+        <a:scrgbClr r="0" g="0" b="0"/>
+      </a:effectRef>
+      <a:fontRef idx="minor">
+        <a:schemeClr val="lt1"/>
+      </a:fontRef>
+    </dgm:style>
+  </dgm:styleLbl>
+  <dgm:styleLbl name="node1">
+    <dgm:scene3d>
+      <a:camera prst="orthographicFront"/>
+      <a:lightRig rig="threePt" dir="t"/>
+    </dgm:scene3d>
+    <dgm:sp3d/>
+    <dgm:txPr/>
+    <dgm:style>
+      <a:lnRef idx="2">
+        <a:scrgbClr r="0" g="0" b="0"/>
+      </a:lnRef>
+      <a:fillRef idx="1">
+        <a:scrgbClr r="0" g="0" b="0"/>
+      </a:fillRef>
+      <a:effectRef idx="0">
+        <a:scrgbClr r="0" g="0" b="0"/>
+      </a:effectRef>
+      <a:fontRef idx="minor">
+        <a:schemeClr val="lt1"/>
+      </a:fontRef>
+    </dgm:style>
+  </dgm:styleLbl>
+  <dgm:styleLbl name="node2">
+    <dgm:scene3d>
+      <a:camera prst="orthographicFront"/>
+      <a:lightRig rig="threePt" dir="t"/>
+    </dgm:scene3d>
+    <dgm:sp3d/>
+    <dgm:txPr/>
+    <dgm:style>
+      <a:lnRef idx="2">
+        <a:scrgbClr r="0" g="0" b="0"/>
+      </a:lnRef>
+      <a:fillRef idx="1">
+        <a:scrgbClr r="0" g="0" b="0"/>
+      </a:fillRef>
+      <a:effectRef idx="0">
+        <a:scrgbClr r="0" g="0" b="0"/>
+      </a:effectRef>
+      <a:fontRef idx="minor">
+        <a:schemeClr val="lt1"/>
+      </a:fontRef>
+    </dgm:style>
+  </dgm:styleLbl>
+  <dgm:styleLbl name="node3">
+    <dgm:scene3d>
+      <a:camera prst="orthographicFront"/>
+      <a:lightRig rig="threePt" dir="t"/>
+    </dgm:scene3d>
+    <dgm:sp3d/>
+    <dgm:txPr/>
+    <dgm:style>
+      <a:lnRef idx="2">
+        <a:scrgbClr r="0" g="0" b="0"/>
+      </a:lnRef>
+      <a:fillRef idx="1">
+        <a:scrgbClr r="0" g="0" b="0"/>
+      </a:fillRef>
+      <a:effectRef idx="0">
+        <a:scrgbClr r="0" g="0" b="0"/>
+      </a:effectRef>
+      <a:fontRef idx="minor">
+        <a:schemeClr val="lt1"/>
+      </a:fontRef>
+    </dgm:style>
+  </dgm:styleLbl>
+  <dgm:styleLbl name="node4">
+    <dgm:scene3d>
+      <a:camera prst="orthographicFront"/>
+      <a:lightRig rig="threePt" dir="t"/>
+    </dgm:scene3d>
+    <dgm:sp3d/>
+    <dgm:txPr/>
+    <dgm:style>
+      <a:lnRef idx="2">
+        <a:scrgbClr r="0" g="0" b="0"/>
+      </a:lnRef>
+      <a:fillRef idx="1">
+        <a:scrgbClr r="0" g="0" b="0"/>
+      </a:fillRef>
+      <a:effectRef idx="0">
+        <a:scrgbClr r="0" g="0" b="0"/>
+      </a:effectRef>
+      <a:fontRef idx="minor">
+        <a:schemeClr val="lt1"/>
+      </a:fontRef>
+    </dgm:style>
+  </dgm:styleLbl>
+  <dgm:styleLbl name="fgImgPlace1">
+    <dgm:scene3d>
+      <a:camera prst="orthographicFront"/>
+      <a:lightRig rig="threePt" dir="t"/>
+    </dgm:scene3d>
+    <dgm:sp3d/>
+    <dgm:txPr/>
+    <dgm:style>
+      <a:lnRef idx="2">
+        <a:scrgbClr r="0" g="0" b="0"/>
+      </a:lnRef>
+      <a:fillRef idx="1">
+        <a:scrgbClr r="0" g="0" b="0"/>
+      </a:fillRef>
+      <a:effectRef idx="0">
+        <a:scrgbClr r="0" g="0" b="0"/>
+      </a:effectRef>
+      <a:fontRef idx="minor"/>
+    </dgm:style>
+  </dgm:styleLbl>
+  <dgm:styleLbl name="alignImgPlace1">
+    <dgm:scene3d>
+      <a:camera prst="orthographicFront"/>
+      <a:lightRig rig="threePt" dir="t"/>
+    </dgm:scene3d>
+    <dgm:sp3d/>
+    <dgm:txPr/>
+    <dgm:style>
+      <a:lnRef idx="2">
+        <a:scrgbClr r="0" g="0" b="0"/>
+      </a:lnRef>
+      <a:fillRef idx="1">
+        <a:scrgbClr r="0" g="0" b="0"/>
+      </a:fillRef>
+      <a:effectRef idx="0">
+        <a:scrgbClr r="0" g="0" b="0"/>
+      </a:effectRef>
+      <a:fontRef idx="minor"/>
+    </dgm:style>
+  </dgm:styleLbl>
+  <dgm:styleLbl name="bgImgPlace1">
+    <dgm:scene3d>
+      <a:camera prst="orthographicFront"/>
+      <a:lightRig rig="threePt" dir="t"/>
+    </dgm:scene3d>
+    <dgm:sp3d/>
+    <dgm:txPr/>
+    <dgm:style>
+      <a:lnRef idx="2">
+        <a:scrgbClr r="0" g="0" b="0"/>
+      </a:lnRef>
+      <a:fillRef idx="1">
+        <a:scrgbClr r="0" g="0" b="0"/>
+      </a:fillRef>
+      <a:effectRef idx="0">
+        <a:scrgbClr r="0" g="0" b="0"/>
+      </a:effectRef>
+      <a:fontRef idx="minor"/>
+    </dgm:style>
+  </dgm:styleLbl>
+  <dgm:styleLbl name="sibTrans2D1">
+    <dgm:scene3d>
+      <a:camera prst="orthographicFront"/>
+      <a:lightRig rig="threePt" dir="t"/>
+    </dgm:scene3d>
+    <dgm:sp3d/>
+    <dgm:txPr/>
+    <dgm:style>
+      <a:lnRef idx="0">
+        <a:scrgbClr r="0" g="0" b="0"/>
+      </a:lnRef>
+      <a:fillRef idx="1">
+        <a:scrgbClr r="0" g="0" b="0"/>
+      </a:fillRef>
+      <a:effectRef idx="0">
+        <a:scrgbClr r="0" g="0" b="0"/>
+      </a:effectRef>
+      <a:fontRef idx="minor">
+        <a:schemeClr val="lt1"/>
+      </a:fontRef>
+    </dgm:style>
+  </dgm:styleLbl>
+  <dgm:styleLbl name="fgSibTrans2D1">
+    <dgm:scene3d>
+      <a:camera prst="orthographicFront"/>
+      <a:lightRig rig="threePt" dir="t"/>
+    </dgm:scene3d>
+    <dgm:sp3d/>
+    <dgm:txPr/>
+    <dgm:style>
+      <a:lnRef idx="0">
+        <a:scrgbClr r="0" g="0" b="0"/>
+      </a:lnRef>
+      <a:fillRef idx="1">
+        <a:scrgbClr r="0" g="0" b="0"/>
+      </a:fillRef>
+      <a:effectRef idx="0">
+        <a:scrgbClr r="0" g="0" b="0"/>
+      </a:effectRef>
+      <a:fontRef idx="minor">
+        <a:schemeClr val="lt1"/>
+      </a:fontRef>
+    </dgm:style>
+  </dgm:styleLbl>
+  <dgm:styleLbl name="bgSibTrans2D1">
+    <dgm:scene3d>
+      <a:camera prst="orthographicFront"/>
+      <a:lightRig rig="threePt" dir="t"/>
+    </dgm:scene3d>
+    <dgm:sp3d/>
+    <dgm:txPr/>
+    <dgm:style>
+      <a:lnRef idx="0">
+        <a:scrgbClr r="0" g="0" b="0"/>
+      </a:lnRef>
+      <a:fillRef idx="1">
+        <a:scrgbClr r="0" g="0" b="0"/>
+      </a:fillRef>
+      <a:effectRef idx="0">
+        <a:scrgbClr r="0" g="0" b="0"/>
+      </a:effectRef>
+      <a:fontRef idx="minor">
+        <a:schemeClr val="lt1"/>
+      </a:fontRef>
+    </dgm:style>
+  </dgm:styleLbl>
+  <dgm:styleLbl name="sibTrans1D1">
+    <dgm:scene3d>
+      <a:camera prst="orthographicFront"/>
+      <a:lightRig rig="threePt" dir="t"/>
+    </dgm:scene3d>
+    <dgm:sp3d/>
+    <dgm:txPr/>
+    <dgm:style>
+      <a:lnRef idx="1">
+        <a:scrgbClr r="0" g="0" b="0"/>
+      </a:lnRef>
+      <a:fillRef idx="0">
+        <a:scrgbClr r="0" g="0" b="0"/>
+      </a:fillRef>
+      <a:effectRef idx="0">
+        <a:scrgbClr r="0" g="0" b="0"/>
+      </a:effectRef>
+      <a:fontRef idx="minor"/>
+    </dgm:style>
+  </dgm:styleLbl>
+  <dgm:styleLbl name="callout">
+    <dgm:scene3d>
+      <a:camera prst="orthographicFront"/>
+      <a:lightRig rig="threePt" dir="t"/>
+    </dgm:scene3d>
+    <dgm:sp3d/>
+    <dgm:txPr/>
+    <dgm:style>
+      <a:lnRef idx="2">
+        <a:scrgbClr r="0" g="0" b="0"/>
+      </a:lnRef>
+      <a:fillRef idx="1">
+        <a:scrgbClr r="0" g="0" b="0"/>
+      </a:fillRef>
+      <a:effectRef idx="0">
+        <a:scrgbClr r="0" g="0" b="0"/>
+      </a:effectRef>
+      <a:fontRef idx="minor"/>
+    </dgm:style>
+  </dgm:styleLbl>
+  <dgm:styleLbl name="asst0">
+    <dgm:scene3d>
+      <a:camera prst="orthographicFront"/>
+      <a:lightRig rig="threePt" dir="t"/>
+    </dgm:scene3d>
+    <dgm:sp3d/>
+    <dgm:txPr/>
+    <dgm:style>
+      <a:lnRef idx="2">
+        <a:scrgbClr r="0" g="0" b="0"/>
+      </a:lnRef>
+      <a:fillRef idx="1">
+        <a:scrgbClr r="0" g="0" b="0"/>
+      </a:fillRef>
+      <a:effectRef idx="0">
+        <a:scrgbClr r="0" g="0" b="0"/>
+      </a:effectRef>
+      <a:fontRef idx="minor">
+        <a:schemeClr val="lt1"/>
+      </a:fontRef>
+    </dgm:style>
+  </dgm:styleLbl>
+  <dgm:styleLbl name="asst1">
+    <dgm:scene3d>
+      <a:camera prst="orthographicFront"/>
+      <a:lightRig rig="threePt" dir="t"/>
+    </dgm:scene3d>
+    <dgm:sp3d/>
+    <dgm:txPr/>
+    <dgm:style>
+      <a:lnRef idx="2">
+        <a:scrgbClr r="0" g="0" b="0"/>
+      </a:lnRef>
+      <a:fillRef idx="1">
+        <a:scrgbClr r="0" g="0" b="0"/>
+      </a:fillRef>
+      <a:effectRef idx="0">
+        <a:scrgbClr r="0" g="0" b="0"/>
+      </a:effectRef>
+      <a:fontRef idx="minor">
+        <a:schemeClr val="lt1"/>
+      </a:fontRef>
+    </dgm:style>
+  </dgm:styleLbl>
+  <dgm:styleLbl name="asst2">
+    <dgm:scene3d>
+      <a:camera prst="orthographicFront"/>
+      <a:lightRig rig="threePt" dir="t"/>
+    </dgm:scene3d>
+    <dgm:sp3d/>
+    <dgm:txPr/>
+    <dgm:style>
+      <a:lnRef idx="2">
+        <a:scrgbClr r="0" g="0" b="0"/>
+      </a:lnRef>
+      <a:fillRef idx="1">
+        <a:scrgbClr r="0" g="0" b="0"/>
+      </a:fillRef>
+      <a:effectRef idx="0">
+        <a:scrgbClr r="0" g="0" b="0"/>
+      </a:effectRef>
+      <a:fontRef idx="minor">
+        <a:schemeClr val="lt1"/>
+      </a:fontRef>
+    </dgm:style>
+  </dgm:styleLbl>
+  <dgm:styleLbl name="asst3">
+    <dgm:scene3d>
+      <a:camera prst="orthographicFront"/>
+      <a:lightRig rig="threePt" dir="t"/>
+    </dgm:scene3d>
+    <dgm:sp3d/>
+    <dgm:txPr/>
+    <dgm:style>
+      <a:lnRef idx="2">
+        <a:scrgbClr r="0" g="0" b="0"/>
+      </a:lnRef>
+      <a:fillRef idx="1">
+        <a:scrgbClr r="0" g="0" b="0"/>
+      </a:fillRef>
+      <a:effectRef idx="0">
+        <a:scrgbClr r="0" g="0" b="0"/>
+      </a:effectRef>
+      <a:fontRef idx="minor">
+        <a:schemeClr val="lt1"/>
+      </a:fontRef>
+    </dgm:style>
+  </dgm:styleLbl>
+  <dgm:styleLbl name="asst4">
+    <dgm:scene3d>
+      <a:camera prst="orthographicFront"/>
+      <a:lightRig rig="threePt" dir="t"/>
+    </dgm:scene3d>
+    <dgm:sp3d/>
+    <dgm:txPr/>
+    <dgm:style>
+      <a:lnRef idx="2">
+        <a:scrgbClr r="0" g="0" b="0"/>
+      </a:lnRef>
+      <a:fillRef idx="1">
+        <a:scrgbClr r="0" g="0" b="0"/>
+      </a:fillRef>
+      <a:effectRef idx="0">
+        <a:scrgbClr r="0" g="0" b="0"/>
+      </a:effectRef>
+      <a:fontRef idx="minor">
+        <a:schemeClr val="lt1"/>
+      </a:fontRef>
+    </dgm:style>
+  </dgm:styleLbl>
+  <dgm:styleLbl name="parChTrans2D1">
+    <dgm:scene3d>
+      <a:camera prst="orthographicFront"/>
+      <a:lightRig rig="threePt" dir="t"/>
+    </dgm:scene3d>
+    <dgm:sp3d/>
+    <dgm:txPr/>
+    <dgm:style>
+      <a:lnRef idx="2">
+        <a:scrgbClr r="0" g="0" b="0"/>
+      </a:lnRef>
+      <a:fillRef idx="1">
+        <a:scrgbClr r="0" g="0" b="0"/>
+      </a:fillRef>
+      <a:effectRef idx="0">
+        <a:scrgbClr r="0" g="0" b="0"/>
+      </a:effectRef>
+      <a:fontRef idx="minor">
+        <a:schemeClr val="lt1"/>
+      </a:fontRef>
+    </dgm:style>
+  </dgm:styleLbl>
+  <dgm:styleLbl name="parChTrans2D2">
+    <dgm:scene3d>
+      <a:camera prst="orthographicFront"/>
+      <a:lightRig rig="threePt" dir="t"/>
+    </dgm:scene3d>
+    <dgm:sp3d/>
+    <dgm:txPr/>
+    <dgm:style>
+      <a:lnRef idx="2">
+        <a:scrgbClr r="0" g="0" b="0"/>
+      </a:lnRef>
+      <a:fillRef idx="1">
+        <a:scrgbClr r="0" g="0" b="0"/>
+      </a:fillRef>
+      <a:effectRef idx="0">
+        <a:scrgbClr r="0" g="0" b="0"/>
+      </a:effectRef>
+      <a:fontRef idx="minor">
+        <a:schemeClr val="lt1"/>
+      </a:fontRef>
+    </dgm:style>
+  </dgm:styleLbl>
+  <dgm:styleLbl name="parChTrans2D3">
+    <dgm:scene3d>
+      <a:camera prst="orthographicFront"/>
+      <a:lightRig rig="threePt" dir="t"/>
+    </dgm:scene3d>
+    <dgm:sp3d/>
+    <dgm:txPr/>
+    <dgm:style>
+      <a:lnRef idx="2">
+        <a:scrgbClr r="0" g="0" b="0"/>
+      </a:lnRef>
+      <a:fillRef idx="1">
+        <a:scrgbClr r="0" g="0" b="0"/>
+      </a:fillRef>
+      <a:effectRef idx="0">
+        <a:scrgbClr r="0" g="0" b="0"/>
+      </a:effectRef>
+      <a:fontRef idx="minor">
+        <a:schemeClr val="lt1"/>
+      </a:fontRef>
+    </dgm:style>
+  </dgm:styleLbl>
+  <dgm:styleLbl name="parChTrans2D4">
+    <dgm:scene3d>
+      <a:camera prst="orthographicFront"/>
+      <a:lightRig rig="threePt" dir="t"/>
+    </dgm:scene3d>
+    <dgm:sp3d/>
+    <dgm:txPr/>
+    <dgm:style>
+      <a:lnRef idx="2">
+        <a:scrgbClr r="0" g="0" b="0"/>
+      </a:lnRef>
+      <a:fillRef idx="1">
+        <a:scrgbClr r="0" g="0" b="0"/>
+      </a:fillRef>
+      <a:effectRef idx="0">
+        <a:scrgbClr r="0" g="0" b="0"/>
+      </a:effectRef>
+      <a:fontRef idx="minor">
+        <a:schemeClr val="lt1"/>
+      </a:fontRef>
+    </dgm:style>
+  </dgm:styleLbl>
+  <dgm:styleLbl name="parChTrans1D1">
+    <dgm:scene3d>
+      <a:camera prst="orthographicFront"/>
+      <a:lightRig rig="threePt" dir="t"/>
+    </dgm:scene3d>
+    <dgm:sp3d/>
+    <dgm:txPr/>
+    <dgm:style>
+      <a:lnRef idx="2">
+        <a:scrgbClr r="0" g="0" b="0"/>
+      </a:lnRef>
+      <a:fillRef idx="0">
+        <a:scrgbClr r="0" g="0" b="0"/>
+      </a:fillRef>
+      <a:effectRef idx="0">
+        <a:scrgbClr r="0" g="0" b="0"/>
+      </a:effectRef>
+      <a:fontRef idx="minor"/>
+    </dgm:style>
+  </dgm:styleLbl>
+  <dgm:styleLbl name="parChTrans1D2">
+    <dgm:scene3d>
+      <a:camera prst="orthographicFront"/>
+      <a:lightRig rig="threePt" dir="t"/>
+    </dgm:scene3d>
+    <dgm:sp3d/>
+    <dgm:txPr/>
+    <dgm:style>
+      <a:lnRef idx="2">
+        <a:scrgbClr r="0" g="0" b="0"/>
+      </a:lnRef>
+      <a:fillRef idx="0">
+        <a:scrgbClr r="0" g="0" b="0"/>
+      </a:fillRef>
+      <a:effectRef idx="0">
+        <a:scrgbClr r="0" g="0" b="0"/>
+      </a:effectRef>
+      <a:fontRef idx="minor"/>
+    </dgm:style>
+  </dgm:styleLbl>
+  <dgm:styleLbl name="parChTrans1D3">
+    <dgm:scene3d>
+      <a:camera prst="orthographicFront"/>
+      <a:lightRig rig="threePt" dir="t"/>
+    </dgm:scene3d>
+    <dgm:sp3d/>
+    <dgm:txPr/>
+    <dgm:style>
+      <a:lnRef idx="2">
+        <a:scrgbClr r="0" g="0" b="0"/>
+      </a:lnRef>
+      <a:fillRef idx="0">
+        <a:scrgbClr r="0" g="0" b="0"/>
+      </a:fillRef>
+      <a:effectRef idx="0">
+        <a:scrgbClr r="0" g="0" b="0"/>
+      </a:effectRef>
+      <a:fontRef idx="minor"/>
+    </dgm:style>
+  </dgm:styleLbl>
+  <dgm:styleLbl name="parChTrans1D4">
+    <dgm:scene3d>
+      <a:camera prst="orthographicFront"/>
+      <a:lightRig rig="threePt" dir="t"/>
+    </dgm:scene3d>
+    <dgm:sp3d/>
+    <dgm:txPr/>
+    <dgm:style>
+      <a:lnRef idx="2">
+        <a:scrgbClr r="0" g="0" b="0"/>
+      </a:lnRef>
+      <a:fillRef idx="0">
+        <a:scrgbClr r="0" g="0" b="0"/>
+      </a:fillRef>
+      <a:effectRef idx="0">
+        <a:scrgbClr r="0" g="0" b="0"/>
+      </a:effectRef>
+      <a:fontRef idx="minor"/>
+    </dgm:style>
+  </dgm:styleLbl>
+  <dgm:styleLbl name="fgAcc1">
+    <dgm:scene3d>
+      <a:camera prst="orthographicFront"/>
+      <a:lightRig rig="threePt" dir="t"/>
+    </dgm:scene3d>
+    <dgm:sp3d/>
+    <dgm:txPr/>
+    <dgm:style>
+      <a:lnRef idx="2">
+        <a:scrgbClr r="0" g="0" b="0"/>
+      </a:lnRef>
+      <a:fillRef idx="1">
+        <a:scrgbClr r="0" g="0" b="0"/>
+      </a:fillRef>
+      <a:effectRef idx="0">
+        <a:scrgbClr r="0" g="0" b="0"/>
+      </a:effectRef>
+      <a:fontRef idx="minor"/>
+    </dgm:style>
+  </dgm:styleLbl>
+  <dgm:styleLbl name="conFgAcc1">
+    <dgm:scene3d>
+      <a:camera prst="orthographicFront"/>
+      <a:lightRig rig="threePt" dir="t"/>
+    </dgm:scene3d>
+    <dgm:sp3d/>
+    <dgm:txPr/>
+    <dgm:style>
+      <a:lnRef idx="2">
+        <a:scrgbClr r="0" g="0" b="0"/>
+      </a:lnRef>
+      <a:fillRef idx="1">
+        <a:scrgbClr r="0" g="0" b="0"/>
+      </a:fillRef>
+      <a:effectRef idx="0">
+        <a:scrgbClr r="0" g="0" b="0"/>
+      </a:effectRef>
+      <a:fontRef idx="minor"/>
+    </dgm:style>
+  </dgm:styleLbl>
+  <dgm:styleLbl name="alignAcc1">
+    <dgm:scene3d>
+      <a:camera prst="orthographicFront"/>
+      <a:lightRig rig="threePt" dir="t"/>
+    </dgm:scene3d>
+    <dgm:sp3d/>
+    <dgm:txPr/>
+    <dgm:style>
+      <a:lnRef idx="2">
+        <a:scrgbClr r="0" g="0" b="0"/>
+      </a:lnRef>
+      <a:fillRef idx="1">
+        <a:scrgbClr r="0" g="0" b="0"/>
+      </a:fillRef>
+      <a:effectRef idx="0">
+        <a:scrgbClr r="0" g="0" b="0"/>
+      </a:effectRef>
+      <a:fontRef idx="minor"/>
+    </dgm:style>
+  </dgm:styleLbl>
+  <dgm:styleLbl name="trAlignAcc1">
+    <dgm:scene3d>
+      <a:camera prst="orthographicFront"/>
+      <a:lightRig rig="threePt" dir="t"/>
+    </dgm:scene3d>
+    <dgm:sp3d/>
+    <dgm:txPr/>
+    <dgm:style>
+      <a:lnRef idx="1">
+        <a:scrgbClr r="0" g="0" b="0"/>
+      </a:lnRef>
+      <a:fillRef idx="1">
+        <a:scrgbClr r="0" g="0" b="0"/>
+      </a:fillRef>
+      <a:effectRef idx="0">
+        <a:scrgbClr r="0" g="0" b="0"/>
+      </a:effectRef>
+      <a:fontRef idx="minor"/>
+    </dgm:style>
+  </dgm:styleLbl>
+  <dgm:styleLbl name="bgAcc1">
+    <dgm:scene3d>
+      <a:camera prst="orthographicFront"/>
+      <a:lightRig rig="threePt" dir="t"/>
+    </dgm:scene3d>
+    <dgm:sp3d/>
+    <dgm:txPr/>
+    <dgm:style>
+      <a:lnRef idx="2">
+        <a:scrgbClr r="0" g="0" b="0"/>
+      </a:lnRef>
+      <a:fillRef idx="1">
+        <a:scrgbClr r="0" g="0" b="0"/>
+      </a:fillRef>
+      <a:effectRef idx="0">
+        <a:scrgbClr r="0" g="0" b="0"/>
+      </a:effectRef>
+      <a:fontRef idx="minor"/>
+    </dgm:style>
+  </dgm:styleLbl>
+  <dgm:styleLbl name="solidFgAcc1">
+    <dgm:scene3d>
+      <a:camera prst="orthographicFront"/>
+      <a:lightRig rig="threePt" dir="t"/>
+    </dgm:scene3d>
+    <dgm:sp3d/>
+    <dgm:txPr/>
+    <dgm:style>
+      <a:lnRef idx="2">
+        <a:scrgbClr r="0" g="0" b="0"/>
+      </a:lnRef>
+      <a:fillRef idx="1">
+        <a:scrgbClr r="0" g="0" b="0"/>
+      </a:fillRef>
+      <a:effectRef idx="0">
+        <a:scrgbClr r="0" g="0" b="0"/>
+      </a:effectRef>
+      <a:fontRef idx="minor"/>
+    </dgm:style>
+  </dgm:styleLbl>
+  <dgm:styleLbl name="solidAlignAcc1">
+    <dgm:scene3d>
+      <a:camera prst="orthographicFront"/>
+      <a:lightRig rig="threePt" dir="t"/>
+    </dgm:scene3d>
+    <dgm:sp3d/>
+    <dgm:txPr/>
+    <dgm:style>
+      <a:lnRef idx="2">
+        <a:scrgbClr r="0" g="0" b="0"/>
+      </a:lnRef>
+      <a:fillRef idx="1">
+        <a:scrgbClr r="0" g="0" b="0"/>
+      </a:fillRef>
+      <a:effectRef idx="0">
+        <a:scrgbClr r="0" g="0" b="0"/>
+      </a:effectRef>
+      <a:fontRef idx="minor"/>
+    </dgm:style>
+  </dgm:styleLbl>
+  <dgm:styleLbl name="solidBgAcc1">
+    <dgm:scene3d>
+      <a:camera prst="orthographicFront"/>
+      <a:lightRig rig="threePt" dir="t"/>
+    </dgm:scene3d>
+    <dgm:sp3d/>
+    <dgm:txPr/>
+    <dgm:style>
+      <a:lnRef idx="2">
+        <a:scrgbClr r="0" g="0" b="0"/>
+      </a:lnRef>
+      <a:fillRef idx="1">
+        <a:scrgbClr r="0" g="0" b="0"/>
+      </a:fillRef>
+      <a:effectRef idx="0">
+        <a:scrgbClr r="0" g="0" b="0"/>
+      </a:effectRef>
+      <a:fontRef idx="minor"/>
+    </dgm:style>
+  </dgm:styleLbl>
+  <dgm:styleLbl name="fgAccFollowNode1">
+    <dgm:scene3d>
+      <a:camera prst="orthographicFront"/>
+      <a:lightRig rig="threePt" dir="t"/>
+    </dgm:scene3d>
+    <dgm:sp3d/>
+    <dgm:txPr/>
+    <dgm:style>
+      <a:lnRef idx="2">
+        <a:scrgbClr r="0" g="0" b="0"/>
+      </a:lnRef>
+      <a:fillRef idx="1">
+        <a:scrgbClr r="0" g="0" b="0"/>
+      </a:fillRef>
+      <a:effectRef idx="0">
+        <a:scrgbClr r="0" g="0" b="0"/>
+      </a:effectRef>
+      <a:fontRef idx="minor"/>
+    </dgm:style>
+  </dgm:styleLbl>
+  <dgm:styleLbl name="alignAccFollowNode1">
+    <dgm:scene3d>
+      <a:camera prst="orthographicFront"/>
+      <a:lightRig rig="threePt" dir="t"/>
+    </dgm:scene3d>
+    <dgm:sp3d/>
+    <dgm:txPr/>
+    <dgm:style>
+      <a:lnRef idx="2">
+        <a:scrgbClr r="0" g="0" b="0"/>
+      </a:lnRef>
+      <a:fillRef idx="1">
+        <a:scrgbClr r="0" g="0" b="0"/>
+      </a:fillRef>
+      <a:effectRef idx="0">
+        <a:scrgbClr r="0" g="0" b="0"/>
+      </a:effectRef>
+      <a:fontRef idx="minor"/>
+    </dgm:style>
+  </dgm:styleLbl>
+  <dgm:styleLbl name="bgAccFollowNode1">
+    <dgm:scene3d>
+      <a:camera prst="orthographicFront"/>
+      <a:lightRig rig="threePt" dir="t"/>
+    </dgm:scene3d>
+    <dgm:sp3d/>
+    <dgm:txPr/>
+    <dgm:style>
+      <a:lnRef idx="2">
+        <a:scrgbClr r="0" g="0" b="0"/>
+      </a:lnRef>
+      <a:fillRef idx="1">
+        <a:scrgbClr r="0" g="0" b="0"/>
+      </a:fillRef>
+      <a:effectRef idx="0">
+        <a:scrgbClr r="0" g="0" b="0"/>
+      </a:effectRef>
+      <a:fontRef idx="minor"/>
+    </dgm:style>
+  </dgm:styleLbl>
+  <dgm:styleLbl name="fgAcc0">
+    <dgm:scene3d>
+      <a:camera prst="orthographicFront"/>
+      <a:lightRig rig="threePt" dir="t"/>
+    </dgm:scene3d>
+    <dgm:sp3d/>
+    <dgm:txPr/>
+    <dgm:style>
+      <a:lnRef idx="2">
+        <a:scrgbClr r="0" g="0" b="0"/>
+      </a:lnRef>
+      <a:fillRef idx="1">
+        <a:scrgbClr r="0" g="0" b="0"/>
+      </a:fillRef>
+      <a:effectRef idx="0">
+        <a:scrgbClr r="0" g="0" b="0"/>
+      </a:effectRef>
+      <a:fontRef idx="minor"/>
+    </dgm:style>
+  </dgm:styleLbl>
+  <dgm:styleLbl name="fgAcc2">
+    <dgm:scene3d>
+      <a:camera prst="orthographicFront"/>
+      <a:lightRig rig="threePt" dir="t"/>
+    </dgm:scene3d>
+    <dgm:sp3d/>
+    <dgm:txPr/>
+    <dgm:style>
+      <a:lnRef idx="2">
+        <a:scrgbClr r="0" g="0" b="0"/>
+      </a:lnRef>
+      <a:fillRef idx="1">
+        <a:scrgbClr r="0" g="0" b="0"/>
+      </a:fillRef>
+      <a:effectRef idx="0">
+        <a:scrgbClr r="0" g="0" b="0"/>
+      </a:effectRef>
+      <a:fontRef idx="minor"/>
+    </dgm:style>
+  </dgm:styleLbl>
+  <dgm:styleLbl name="fgAcc3">
+    <dgm:scene3d>
+      <a:camera prst="orthographicFront"/>
+      <a:lightRig rig="threePt" dir="t"/>
+    </dgm:scene3d>
+    <dgm:sp3d/>
+    <dgm:txPr/>
+    <dgm:style>
+      <a:lnRef idx="2">
+        <a:scrgbClr r="0" g="0" b="0"/>
+      </a:lnRef>
+      <a:fillRef idx="1">
+        <a:scrgbClr r="0" g="0" b="0"/>
+      </a:fillRef>
+      <a:effectRef idx="0">
+        <a:scrgbClr r="0" g="0" b="0"/>
+      </a:effectRef>
+      <a:fontRef idx="minor"/>
+    </dgm:style>
+  </dgm:styleLbl>
+  <dgm:styleLbl name="fgAcc4">
+    <dgm:scene3d>
+      <a:camera prst="orthographicFront"/>
+      <a:lightRig rig="threePt" dir="t"/>
+    </dgm:scene3d>
+    <dgm:sp3d/>
+    <dgm:txPr/>
+    <dgm:style>
+      <a:lnRef idx="2">
+        <a:scrgbClr r="0" g="0" b="0"/>
+      </a:lnRef>
+      <a:fillRef idx="1">
+        <a:scrgbClr r="0" g="0" b="0"/>
+      </a:fillRef>
+      <a:effectRef idx="0">
+        <a:scrgbClr r="0" g="0" b="0"/>
+      </a:effectRef>
+      <a:fontRef idx="minor"/>
+    </dgm:style>
+  </dgm:styleLbl>
+  <dgm:styleLbl name="bgShp">
+    <dgm:scene3d>
+      <a:camera prst="orthographicFront"/>
+      <a:lightRig rig="threePt" dir="t"/>
+    </dgm:scene3d>
+    <dgm:sp3d/>
+    <dgm:txPr/>
+    <dgm:style>
+      <a:lnRef idx="0">
+        <a:scrgbClr r="0" g="0" b="0"/>
+      </a:lnRef>
+      <a:fillRef idx="1">
+        <a:scrgbClr r="0" g="0" b="0"/>
+      </a:fillRef>
+      <a:effectRef idx="0">
+        <a:scrgbClr r="0" g="0" b="0"/>
+      </a:effectRef>
+      <a:fontRef idx="minor"/>
+    </dgm:style>
+  </dgm:styleLbl>
+  <dgm:styleLbl name="dkBgShp">
+    <dgm:scene3d>
+      <a:camera prst="orthographicFront"/>
+      <a:lightRig rig="threePt" dir="t"/>
+    </dgm:scene3d>
+    <dgm:sp3d/>
+    <dgm:txPr/>
+    <dgm:style>
+      <a:lnRef idx="0">
+        <a:scrgbClr r="0" g="0" b="0"/>
+      </a:lnRef>
+      <a:fillRef idx="1">
+        <a:scrgbClr r="0" g="0" b="0"/>
+      </a:fillRef>
+      <a:effectRef idx="0">
+        <a:scrgbClr r="0" g="0" b="0"/>
+      </a:effectRef>
+      <a:fontRef idx="minor"/>
+    </dgm:style>
+  </dgm:styleLbl>
+  <dgm:styleLbl name="trBgShp">
+    <dgm:scene3d>
+      <a:camera prst="orthographicFront"/>
+      <a:lightRig rig="threePt" dir="t"/>
+    </dgm:scene3d>
+    <dgm:sp3d/>
+    <dgm:txPr/>
+    <dgm:style>
+      <a:lnRef idx="0">
+        <a:scrgbClr r="0" g="0" b="0"/>
+      </a:lnRef>
+      <a:fillRef idx="1">
+        <a:scrgbClr r="0" g="0" b="0"/>
+      </a:fillRef>
+      <a:effectRef idx="0">
+        <a:scrgbClr r="0" g="0" b="0"/>
+      </a:effectRef>
+      <a:fontRef idx="minor"/>
+    </dgm:style>
+  </dgm:styleLbl>
+  <dgm:styleLbl name="fgShp">
+    <dgm:scene3d>
+      <a:camera prst="orthographicFront"/>
+      <a:lightRig rig="threePt" dir="t"/>
+    </dgm:scene3d>
+    <dgm:sp3d/>
+    <dgm:txPr/>
+    <dgm:style>
+      <a:lnRef idx="2">
+        <a:scrgbClr r="0" g="0" b="0"/>
+      </a:lnRef>
+      <a:fillRef idx="1">
+        <a:scrgbClr r="0" g="0" b="0"/>
+      </a:fillRef>
+      <a:effectRef idx="0">
+        <a:scrgbClr r="0" g="0" b="0"/>
+      </a:effectRef>
+      <a:fontRef idx="minor"/>
+    </dgm:style>
+  </dgm:styleLbl>
+  <dgm:styleLbl name="revTx">
+    <dgm:scene3d>
+      <a:camera prst="orthographicFront"/>
+      <a:lightRig rig="threePt" dir="t"/>
+    </dgm:scene3d>
+    <dgm:sp3d/>
+    <dgm:txPr/>
+    <dgm:style>
+      <a:lnRef idx="0">
+        <a:scrgbClr r="0" g="0" b="0"/>
+      </a:lnRef>
+      <a:fillRef idx="0">
+        <a:scrgbClr r="0" g="0" b="0"/>
+      </a:fillRef>
+      <a:effectRef idx="0">
+        <a:scrgbClr r="0" g="0" b="0"/>
+      </a:effectRef>
+      <a:fontRef idx="minor"/>
+    </dgm:style>
+  </dgm:styleLbl>
+</dgm:styleDef>
+</file>
+
 <file path=ppt/notesMasters/notesMaster1.xml><?xml version="1.0" encoding="utf-8"?>
 <p:notesMaster xmlns:a="http://schemas.openxmlformats.org/drawingml/2006/main" xmlns:r="http://schemas.openxmlformats.org/officeDocument/2006/relationships" xmlns:p="http://schemas.openxmlformats.org/presentationml/2006/main">
   <p:cSld>
@@ -2754,7 +6636,7 @@
           <a:p>
             <a:fld id="{B6FF37AB-1278-4555-8E1E-629030646749}" type="datetimeFigureOut">
               <a:rPr lang="en-US" smtClean="0"/>
-              <a:t>4/18/2023</a:t>
+              <a:t>4/26/2023</a:t>
             </a:fld>
             <a:endParaRPr lang="en-US"/>
           </a:p>
@@ -3168,7 +7050,7 @@
           <a:p>
             <a:fld id="{373F947A-B4DE-48EE-8D7C-4BB9A5B7195B}" type="datetime1">
               <a:rPr lang="en-US" smtClean="0"/>
-              <a:t>4/18/2023</a:t>
+              <a:t>4/26/2023</a:t>
             </a:fld>
             <a:endParaRPr lang="en-US"/>
           </a:p>
@@ -3366,7 +7248,7 @@
           <a:p>
             <a:fld id="{6DF1D984-3EC5-48C3-B2BF-F67012460C5F}" type="datetime1">
               <a:rPr lang="en-US" smtClean="0"/>
-              <a:t>4/18/2023</a:t>
+              <a:t>4/26/2023</a:t>
             </a:fld>
             <a:endParaRPr lang="en-US"/>
           </a:p>
@@ -3574,7 +7456,7 @@
           <a:p>
             <a:fld id="{9697B614-E20E-49D6-969D-0F733D373B69}" type="datetime1">
               <a:rPr lang="en-US" smtClean="0"/>
-              <a:t>4/18/2023</a:t>
+              <a:t>4/26/2023</a:t>
             </a:fld>
             <a:endParaRPr lang="en-US"/>
           </a:p>
@@ -3772,7 +7654,7 @@
           <a:p>
             <a:fld id="{BF4C6F01-8282-4E98-8BBB-1D4B0654D068}" type="datetime1">
               <a:rPr lang="en-US" smtClean="0"/>
-              <a:t>4/18/2023</a:t>
+              <a:t>4/26/2023</a:t>
             </a:fld>
             <a:endParaRPr lang="en-US"/>
           </a:p>
@@ -4047,7 +7929,7 @@
           <a:p>
             <a:fld id="{4DA74900-59BC-4422-846B-D368E7DA1F88}" type="datetime1">
               <a:rPr lang="en-US" smtClean="0"/>
-              <a:t>4/18/2023</a:t>
+              <a:t>4/26/2023</a:t>
             </a:fld>
             <a:endParaRPr lang="en-US"/>
           </a:p>
@@ -4312,7 +8194,7 @@
           <a:p>
             <a:fld id="{C3949FD8-F76C-4334-8F67-5261DAB8283B}" type="datetime1">
               <a:rPr lang="en-US" smtClean="0"/>
-              <a:t>4/18/2023</a:t>
+              <a:t>4/26/2023</a:t>
             </a:fld>
             <a:endParaRPr lang="en-US"/>
           </a:p>
@@ -4724,7 +8606,7 @@
           <a:p>
             <a:fld id="{FD3EE7BC-1A30-4086-BB3C-9A5B74FB52CD}" type="datetime1">
               <a:rPr lang="en-US" smtClean="0"/>
-              <a:t>4/18/2023</a:t>
+              <a:t>4/26/2023</a:t>
             </a:fld>
             <a:endParaRPr lang="en-US"/>
           </a:p>
@@ -4865,7 +8747,7 @@
           <a:p>
             <a:fld id="{7240562C-9A4D-4424-AA72-DCA8EAC67DF2}" type="datetime1">
               <a:rPr lang="en-US" smtClean="0"/>
-              <a:t>4/18/2023</a:t>
+              <a:t>4/26/2023</a:t>
             </a:fld>
             <a:endParaRPr lang="en-US"/>
           </a:p>
@@ -4978,7 +8860,7 @@
           <a:p>
             <a:fld id="{E2DCB292-5FFB-4199-8B72-18CE4DC27BE9}" type="datetime1">
               <a:rPr lang="en-US" smtClean="0"/>
-              <a:t>4/18/2023</a:t>
+              <a:t>4/26/2023</a:t>
             </a:fld>
             <a:endParaRPr lang="en-US"/>
           </a:p>
@@ -5289,7 +9171,7 @@
           <a:p>
             <a:fld id="{7A7481A3-5B6C-4EB6-A3A1-4996FCA10DC0}" type="datetime1">
               <a:rPr lang="en-US" smtClean="0"/>
-              <a:t>4/18/2023</a:t>
+              <a:t>4/26/2023</a:t>
             </a:fld>
             <a:endParaRPr lang="en-US"/>
           </a:p>
@@ -5577,7 +9459,7 @@
           <a:p>
             <a:fld id="{E405CF91-A7C1-47F6-886B-9E8209CA9E7C}" type="datetime1">
               <a:rPr lang="en-US" smtClean="0"/>
-              <a:t>4/18/2023</a:t>
+              <a:t>4/26/2023</a:t>
             </a:fld>
             <a:endParaRPr lang="en-US"/>
           </a:p>
@@ -5818,7 +9700,7 @@
           <a:p>
             <a:fld id="{ACF83ACE-CCB7-4256-8B11-BBA06764713F}" type="datetime1">
               <a:rPr lang="en-US" smtClean="0"/>
-              <a:t>4/18/2023</a:t>
+              <a:t>4/26/2023</a:t>
             </a:fld>
             <a:endParaRPr lang="en-US"/>
           </a:p>
@@ -10399,109 +14281,6 @@
           </a:p>
         </p:txBody>
       </p:sp>
-      <p:sp>
-        <p:nvSpPr>
-          <p:cNvPr id="2" name="TextBox 1">
-            <a:extLst>
-              <a:ext uri="{FF2B5EF4-FFF2-40B4-BE49-F238E27FC236}">
-                <a16:creationId xmlns:a16="http://schemas.microsoft.com/office/drawing/2014/main" id="{A0BC89AD-575C-7DDD-45F8-4F9B262A1740}"/>
-              </a:ext>
-            </a:extLst>
-          </p:cNvPr>
-          <p:cNvSpPr txBox="1"/>
-          <p:nvPr/>
-        </p:nvSpPr>
-        <p:spPr>
-          <a:xfrm>
-            <a:off x="3281702" y="2053309"/>
-            <a:ext cx="4887000" cy="2340321"/>
-          </a:xfrm>
-          <a:prstGeom prst="rect">
-            <a:avLst/>
-          </a:prstGeom>
-          <a:noFill/>
-        </p:spPr>
-        <p:txBody>
-          <a:bodyPr wrap="square">
-            <a:spAutoFit/>
-          </a:bodyPr>
-          <a:lstStyle/>
-          <a:p>
-            <a:pPr marL="0" marR="0" indent="194310" algn="ctr" fontAlgn="base" latinLnBrk="1">
-              <a:lnSpc>
-                <a:spcPct val="158000"/>
-              </a:lnSpc>
-              <a:spcBef>
-                <a:spcPts val="0"/>
-              </a:spcBef>
-              <a:spcAft>
-                <a:spcPts val="0"/>
-              </a:spcAft>
-            </a:pPr>
-            <a:r>
-              <a:rPr lang="en-US" sz="3200" kern="0" spc="-50" dirty="0">
-                <a:solidFill>
-                  <a:srgbClr val="000000"/>
-                </a:solidFill>
-                <a:effectLst/>
-                <a:latin typeface="한양신명조"/>
-                <a:ea typeface="한양신명조"/>
-              </a:rPr>
-              <a:t>Demonstration:</a:t>
-            </a:r>
-            <a:br>
-              <a:rPr lang="en-US" sz="3200" kern="0" spc="-50" dirty="0">
-                <a:solidFill>
-                  <a:srgbClr val="000000"/>
-                </a:solidFill>
-                <a:effectLst/>
-                <a:latin typeface="한양신명조"/>
-                <a:ea typeface="한양신명조"/>
-              </a:rPr>
-            </a:br>
-            <a:br>
-              <a:rPr lang="en-US" sz="3200" kern="0" spc="-50" dirty="0">
-                <a:solidFill>
-                  <a:srgbClr val="000000"/>
-                </a:solidFill>
-                <a:effectLst/>
-                <a:latin typeface="한양신명조"/>
-                <a:ea typeface="한양신명조"/>
-              </a:rPr>
-            </a:br>
-            <a:r>
-              <a:rPr lang="en-US" sz="3200" kern="0" spc="-50" dirty="0">
-                <a:solidFill>
-                  <a:srgbClr val="000000"/>
-                </a:solidFill>
-                <a:effectLst/>
-                <a:latin typeface="한양신명조"/>
-                <a:ea typeface="한양신명조"/>
-                <a:hlinkClick r:id="rId3"/>
-              </a:rPr>
-              <a:t>http://210.123.42.64:5000/</a:t>
-            </a:r>
-            <a:r>
-              <a:rPr lang="en-US" sz="3200" kern="0" spc="-50" dirty="0">
-                <a:solidFill>
-                  <a:srgbClr val="000000"/>
-                </a:solidFill>
-                <a:effectLst/>
-                <a:latin typeface="한양신명조"/>
-                <a:ea typeface="한양신명조"/>
-              </a:rPr>
-              <a:t> </a:t>
-            </a:r>
-            <a:endParaRPr lang="en-US" sz="3600" kern="0" dirty="0">
-              <a:solidFill>
-                <a:srgbClr val="000000"/>
-              </a:solidFill>
-              <a:effectLst/>
-              <a:latin typeface="한양신명조"/>
-            </a:endParaRPr>
-          </a:p>
-        </p:txBody>
-      </p:sp>
     </p:spTree>
     <p:extLst>
       <p:ext uri="{BB962C8B-B14F-4D97-AF65-F5344CB8AC3E}">
@@ -12110,6 +15889,76 @@
       </p:grpSpPr>
       <p:pic>
         <p:nvPicPr>
+          <p:cNvPr id="3" name="Picture 4" descr="What's The Carbon Footprint of Solar Panels? | The Eco Experts">
+            <a:extLst>
+              <a:ext uri="{FF2B5EF4-FFF2-40B4-BE49-F238E27FC236}">
+                <a16:creationId xmlns:a16="http://schemas.microsoft.com/office/drawing/2014/main" id="{9725EA81-3B82-1E64-66B9-EDD884941CF1}"/>
+              </a:ext>
+            </a:extLst>
+          </p:cNvPr>
+          <p:cNvPicPr>
+            <a:picLocks noChangeAspect="1" noChangeArrowheads="1"/>
+          </p:cNvPicPr>
+          <p:nvPr/>
+        </p:nvPicPr>
+        <p:blipFill>
+          <a:blip r:embed="rId2">
+            <a:extLst>
+              <a:ext uri="{28A0092B-C50C-407E-A947-70E740481C1C}">
+                <a14:useLocalDpi xmlns:a14="http://schemas.microsoft.com/office/drawing/2010/main" val="0"/>
+              </a:ext>
+            </a:extLst>
+          </a:blip>
+          <a:srcRect/>
+          <a:stretch>
+            <a:fillRect/>
+          </a:stretch>
+        </p:blipFill>
+        <p:spPr bwMode="auto">
+          <a:xfrm>
+            <a:off x="8506691" y="3353167"/>
+            <a:ext cx="3503574" cy="1963129"/>
+          </a:xfrm>
+          <a:prstGeom prst="ellipse">
+            <a:avLst/>
+          </a:prstGeom>
+          <a:ln w="63500" cap="rnd">
+            <a:solidFill>
+              <a:srgbClr val="333333"/>
+            </a:solidFill>
+          </a:ln>
+          <a:effectLst>
+            <a:outerShdw blurRad="381000" dist="292100" dir="5400000" sx="-80000" sy="-18000" rotWithShape="0">
+              <a:srgbClr val="000000">
+                <a:alpha val="22000"/>
+              </a:srgbClr>
+            </a:outerShdw>
+          </a:effectLst>
+          <a:scene3d>
+            <a:camera prst="orthographicFront"/>
+            <a:lightRig rig="contrasting" dir="t">
+              <a:rot lat="0" lon="0" rev="3000000"/>
+            </a:lightRig>
+          </a:scene3d>
+          <a:sp3d contourW="7620">
+            <a:bevelT w="95250" h="31750"/>
+            <a:contourClr>
+              <a:srgbClr val="333333"/>
+            </a:contourClr>
+          </a:sp3d>
+          <a:extLst>
+            <a:ext uri="{909E8E84-426E-40DD-AFC4-6F175D3DCCD1}">
+              <a14:hiddenFill xmlns:a14="http://schemas.microsoft.com/office/drawing/2010/main">
+                <a:solidFill>
+                  <a:srgbClr val="FFFFFF"/>
+                </a:solidFill>
+              </a14:hiddenFill>
+            </a:ext>
+          </a:extLst>
+        </p:spPr>
+      </p:pic>
+      <p:pic>
+        <p:nvPicPr>
           <p:cNvPr id="6" name="그림 6" descr="텍스트이(가) 표시된 사진&#10;&#10;자동 생성된 설명">
             <a:extLst>
               <a:ext uri="{FF2B5EF4-FFF2-40B4-BE49-F238E27FC236}">
@@ -12123,7 +15972,7 @@
           <p:nvPr/>
         </p:nvPicPr>
         <p:blipFill rotWithShape="1">
-          <a:blip r:embed="rId2">
+          <a:blip r:embed="rId3">
             <a:extLst>
               <a:ext uri="{28A0092B-C50C-407E-A947-70E740481C1C}">
                 <a14:useLocalDpi xmlns:a14="http://schemas.microsoft.com/office/drawing/2010/main" val="0"/>
@@ -12454,82 +16303,43 @@
           </a:fontRef>
         </p:style>
       </p:cxnSp>
-      <p:sp>
-        <p:nvSpPr>
-          <p:cNvPr id="20" name="Content Placeholder 2">
+      <p:graphicFrame>
+        <p:nvGraphicFramePr>
+          <p:cNvPr id="1028" name="Content Placeholder 2">
             <a:extLst>
               <a:ext uri="{FF2B5EF4-FFF2-40B4-BE49-F238E27FC236}">
-                <a16:creationId xmlns:a16="http://schemas.microsoft.com/office/drawing/2014/main" id="{3DE21D85-D3D9-5919-293E-5A3180086254}"/>
+                <a16:creationId xmlns:a16="http://schemas.microsoft.com/office/drawing/2014/main" id="{883B0EB0-162D-B3CE-5418-FFFA9466710B}"/>
               </a:ext>
             </a:extLst>
           </p:cNvPr>
-          <p:cNvSpPr>
-            <a:spLocks noGrp="1"/>
-          </p:cNvSpPr>
+          <p:cNvGraphicFramePr>
+            <a:graphicFrameLocks noGrp="1"/>
+          </p:cNvGraphicFramePr>
           <p:nvPr>
             <p:ph idx="1"/>
+            <p:extLst>
+              <p:ext uri="{D42A27DB-BD31-4B8C-83A1-F6EECF244321}">
+                <p14:modId xmlns:p14="http://schemas.microsoft.com/office/powerpoint/2010/main" val="2316145137"/>
+              </p:ext>
+            </p:extLst>
           </p:nvPr>
-        </p:nvSpPr>
-        <p:spPr>
-          <a:xfrm>
-            <a:off x="635137" y="1914545"/>
-            <a:ext cx="8677334" cy="3319842"/>
-          </a:xfrm>
-        </p:spPr>
-        <p:txBody>
-          <a:bodyPr>
-            <a:normAutofit fontScale="85000" lnSpcReduction="10000"/>
-          </a:bodyPr>
-          <a:lstStyle/>
-          <a:p>
-            <a:pPr lvl="1"/>
-            <a:r>
-              <a:rPr lang="en-US" sz="1700" dirty="0"/>
-              <a:t>Reliance on fossil fuels may lead to an energy crisis due to pollution and greenhouse gas emissions, making them unreliable as future energy sources. This creates challenges in finding cleaner and sustainable energy sources to meet future demands, such as solar and wind energy. However, these weather-dependent sources carry uncertainties in power production, with solar power being affected by weather conditions and cloud cover, impacting power dispatch. [1][2][3]</a:t>
-            </a:r>
-          </a:p>
-          <a:p>
-            <a:pPr marL="457200" lvl="1" indent="0">
-              <a:buNone/>
-            </a:pPr>
-            <a:endParaRPr lang="en-US" sz="1700" dirty="0"/>
-          </a:p>
-          <a:p>
-            <a:pPr lvl="1"/>
-            <a:r>
-              <a:rPr lang="en-US" sz="1700" dirty="0"/>
-              <a:t>To address the challenge of predicting solar irradiance for solar energy potential, models such as multi-regression and Artificial Neural Networks (ANN) have been developed. ANN, in particular, is gaining popularity in renewable energy forecasting as it can overcome limitations of time series models. ANN is a self-learning network that uses historical data to predict future values and is organized in layers with inputs at the bottom and outputs at the top. [4][5]</a:t>
-            </a:r>
-          </a:p>
-          <a:p>
-            <a:pPr marL="457200" lvl="1" indent="0">
-              <a:buNone/>
-            </a:pPr>
-            <a:endParaRPr lang="en-US" sz="1700" dirty="0"/>
-          </a:p>
-          <a:p>
-            <a:pPr lvl="1"/>
-            <a:r>
-              <a:rPr lang="en-US" sz="1700" dirty="0"/>
-              <a:t>This research aims to use advanced ANN models, including LSTM, Bi-LSTM, RNN, and </a:t>
-            </a:r>
-            <a:r>
-              <a:rPr lang="en-US" sz="1700" dirty="0" err="1"/>
-              <a:t>ConvLSTM</a:t>
-            </a:r>
-            <a:r>
-              <a:rPr lang="en-US" sz="1700" dirty="0"/>
-              <a:t>, to forecast solar power generation using plant data and weather information. A Flask-based REST API will be created for output predictions, reducing deviations in solar power production and maintaining reliability with accurate forecasting from advanced ANN models. [5][2]</a:t>
-            </a:r>
-          </a:p>
-        </p:txBody>
-      </p:sp>
+        </p:nvGraphicFramePr>
+        <p:xfrm>
+          <a:off x="411060" y="920512"/>
+          <a:ext cx="8948168" cy="5096386"/>
+        </p:xfrm>
+        <a:graphic>
+          <a:graphicData uri="http://schemas.openxmlformats.org/drawingml/2006/diagram">
+            <dgm:relIds xmlns:dgm="http://schemas.openxmlformats.org/drawingml/2006/diagram" xmlns:r="http://schemas.openxmlformats.org/officeDocument/2006/relationships" r:dm="rId4" r:lo="rId5" r:qs="rId6" r:cs="rId7"/>
+          </a:graphicData>
+        </a:graphic>
+      </p:graphicFrame>
       <p:pic>
         <p:nvPicPr>
-          <p:cNvPr id="3076" name="Picture 4" descr="69,115 Energy Crisis Images, Stock Photos &amp; Vectors | Shutterstock">
+          <p:cNvPr id="1026" name="Picture 2" descr="Energy crisis? What experts are saying as world faces historic energy-price  crunch - MarketWatch">
             <a:extLst>
               <a:ext uri="{FF2B5EF4-FFF2-40B4-BE49-F238E27FC236}">
-                <a16:creationId xmlns:a16="http://schemas.microsoft.com/office/drawing/2014/main" id="{789F7F9C-4978-818E-C2CF-488BBE16C085}"/>
+                <a16:creationId xmlns:a16="http://schemas.microsoft.com/office/drawing/2014/main" id="{84231BA3-EE76-862A-221E-5927BCE86EB4}"/>
               </a:ext>
             </a:extLst>
           </p:cNvPr>
@@ -12538,27 +16348,41 @@
           </p:cNvPicPr>
           <p:nvPr/>
         </p:nvPicPr>
-        <p:blipFill rotWithShape="1">
-          <a:blip r:embed="rId3">
-            <a:grayscl/>
+        <p:blipFill>
+          <a:blip r:embed="rId9">
             <a:extLst>
               <a:ext uri="{28A0092B-C50C-407E-A947-70E740481C1C}">
                 <a14:useLocalDpi xmlns:a14="http://schemas.microsoft.com/office/drawing/2010/main" val="0"/>
               </a:ext>
             </a:extLst>
           </a:blip>
-          <a:srcRect l="10649" t="14356" r="12963" b="16546"/>
-          <a:stretch/>
+          <a:srcRect/>
+          <a:stretch>
+            <a:fillRect/>
+          </a:stretch>
         </p:blipFill>
         <p:spPr bwMode="auto">
           <a:xfrm>
-            <a:off x="9601168" y="2357272"/>
-            <a:ext cx="1955695" cy="1908283"/>
+            <a:off x="8372748" y="968260"/>
+            <a:ext cx="3629923" cy="2525389"/>
           </a:xfrm>
           <a:prstGeom prst="rect">
             <a:avLst/>
           </a:prstGeom>
-          <a:noFill/>
+          <a:ln w="38100" cap="sq">
+            <a:solidFill>
+              <a:srgbClr val="000000"/>
+            </a:solidFill>
+            <a:prstDash val="solid"/>
+            <a:miter lim="800000"/>
+          </a:ln>
+          <a:effectLst>
+            <a:outerShdw blurRad="50800" dist="38100" dir="2700000" algn="tl" rotWithShape="0">
+              <a:srgbClr val="000000">
+                <a:alpha val="43000"/>
+              </a:srgbClr>
+            </a:outerShdw>
+          </a:effectLst>
           <a:extLst>
             <a:ext uri="{909E8E84-426E-40DD-AFC4-6F175D3DCCD1}">
               <a14:hiddenFill xmlns:a14="http://schemas.microsoft.com/office/drawing/2010/main">
@@ -12628,19 +16452,7 @@
           </a:bodyPr>
           <a:lstStyle/>
           <a:p>
-            <a:r>
-              <a:rPr lang="en-US" sz="1700" dirty="0"/>
-              <a:t>The motivation of this paper is to develop a predictive model for forecasting solar power generation using weather data. </a:t>
-            </a:r>
-          </a:p>
-          <a:p>
             <a:endParaRPr lang="en-US" sz="1700" dirty="0"/>
-          </a:p>
-          <a:p>
-            <a:r>
-              <a:rPr lang="en-US" sz="1700" dirty="0"/>
-              <a:t>Based on the background we can get that , accurate forecasting tools can help reduce deviations and maintain reliability in solar power generation, aiding investment decisions and distribution system planning.</a:t>
-            </a:r>
           </a:p>
         </p:txBody>
       </p:sp>
@@ -13638,7 +17450,7 @@
             <a:pPr algn="ctr"/>
             <a:r>
               <a:rPr lang="en-US" dirty="0"/>
-              <a:t>Interpolate Missing value using interpolation with nearest method.</a:t>
+              <a:t>Interpolate Missing value using interpolation with linear method.</a:t>
             </a:r>
           </a:p>
         </p:txBody>
